--- a/files/slides/EuroSys26-MegaScale-MoE-slides.pptx
+++ b/files/slides/EuroSys26-MegaScale-MoE-slides.pptx
@@ -5,29 +5,31 @@
     <p:sldMasterId id="2147483648" r:id="rId1"/>
   </p:sldMasterIdLst>
   <p:notesMasterIdLst>
-    <p:notesMasterId r:id="rId22"/>
+    <p:notesMasterId r:id="rId24"/>
   </p:notesMasterIdLst>
   <p:sldIdLst>
     <p:sldId id="256" r:id="rId2"/>
     <p:sldId id="275" r:id="rId3"/>
     <p:sldId id="274" r:id="rId4"/>
     <p:sldId id="257" r:id="rId5"/>
-    <p:sldId id="281" r:id="rId6"/>
-    <p:sldId id="277" r:id="rId7"/>
-    <p:sldId id="285" r:id="rId8"/>
-    <p:sldId id="276" r:id="rId9"/>
-    <p:sldId id="282" r:id="rId10"/>
-    <p:sldId id="283" r:id="rId11"/>
-    <p:sldId id="284" r:id="rId12"/>
-    <p:sldId id="258" r:id="rId13"/>
-    <p:sldId id="279" r:id="rId14"/>
-    <p:sldId id="280" r:id="rId15"/>
-    <p:sldId id="286" r:id="rId16"/>
-    <p:sldId id="272" r:id="rId17"/>
-    <p:sldId id="270" r:id="rId18"/>
-    <p:sldId id="273" r:id="rId19"/>
-    <p:sldId id="271" r:id="rId20"/>
-    <p:sldId id="278" r:id="rId21"/>
+    <p:sldId id="287" r:id="rId6"/>
+    <p:sldId id="281" r:id="rId7"/>
+    <p:sldId id="277" r:id="rId8"/>
+    <p:sldId id="285" r:id="rId9"/>
+    <p:sldId id="276" r:id="rId10"/>
+    <p:sldId id="282" r:id="rId11"/>
+    <p:sldId id="288" r:id="rId12"/>
+    <p:sldId id="283" r:id="rId13"/>
+    <p:sldId id="284" r:id="rId14"/>
+    <p:sldId id="258" r:id="rId15"/>
+    <p:sldId id="279" r:id="rId16"/>
+    <p:sldId id="280" r:id="rId17"/>
+    <p:sldId id="286" r:id="rId18"/>
+    <p:sldId id="272" r:id="rId19"/>
+    <p:sldId id="270" r:id="rId20"/>
+    <p:sldId id="273" r:id="rId21"/>
+    <p:sldId id="271" r:id="rId22"/>
+    <p:sldId id="278" r:id="rId23"/>
   </p:sldIdLst>
   <p:sldSz cx="12192000" cy="6858000"/>
   <p:notesSz cx="6858000" cy="9144000"/>
@@ -760,6 +762,353 @@
         <p:cNvPr id="1" name="">
           <a:extLst>
             <a:ext uri="{FF2B5EF4-FFF2-40B4-BE49-F238E27FC236}">
+              <a16:creationId xmlns:a16="http://schemas.microsoft.com/office/drawing/2014/main" id="{B82E3B9F-F8F7-1AA0-0C83-E3D2B3535CE8}"/>
+            </a:ext>
+          </a:extLst>
+        </p:cNvPr>
+        <p:cNvGrpSpPr/>
+        <p:nvPr/>
+      </p:nvGrpSpPr>
+      <p:grpSpPr>
+        <a:xfrm>
+          <a:off x="0" y="0"/>
+          <a:ext cx="0" cy="0"/>
+          <a:chOff x="0" y="0"/>
+          <a:chExt cx="0" cy="0"/>
+        </a:xfrm>
+      </p:grpSpPr>
+      <p:sp>
+        <p:nvSpPr>
+          <p:cNvPr id="2" name="幻灯片图像占位符 1">
+            <a:extLst>
+              <a:ext uri="{FF2B5EF4-FFF2-40B4-BE49-F238E27FC236}">
+                <a16:creationId xmlns:a16="http://schemas.microsoft.com/office/drawing/2014/main" id="{E455D180-1132-5EBE-F0D3-80F7921E3D74}"/>
+              </a:ext>
+            </a:extLst>
+          </p:cNvPr>
+          <p:cNvSpPr>
+            <a:spLocks noGrp="1" noRot="1" noChangeAspect="1"/>
+          </p:cNvSpPr>
+          <p:nvPr>
+            <p:ph type="sldImg"/>
+          </p:nvPr>
+        </p:nvSpPr>
+        <p:spPr/>
+      </p:sp>
+      <p:sp>
+        <p:nvSpPr>
+          <p:cNvPr id="3" name="备注占位符 2">
+            <a:extLst>
+              <a:ext uri="{FF2B5EF4-FFF2-40B4-BE49-F238E27FC236}">
+                <a16:creationId xmlns:a16="http://schemas.microsoft.com/office/drawing/2014/main" id="{99977C20-B051-2CE3-4B50-7C32E1521185}"/>
+              </a:ext>
+            </a:extLst>
+          </p:cNvPr>
+          <p:cNvSpPr>
+            <a:spLocks noGrp="1"/>
+          </p:cNvSpPr>
+          <p:nvPr>
+            <p:ph type="body" idx="1"/>
+          </p:nvPr>
+        </p:nvSpPr>
+        <p:spPr/>
+        <p:txBody>
+          <a:bodyPr/>
+          <a:lstStyle/>
+          <a:p>
+            <a:r>
+              <a:rPr lang="en" altLang="zh-CN" dirty="0"/>
+              <a:t>Let’s first look at the attention module. A common approach is tensor parallelism, which partitions all attention operators along the hidden dimension. However, TP introduces all-gather and reduce-scatter communication for the entire hidden state on the critical path.</a:t>
+            </a:r>
+            <a:r>
+              <a:rPr kumimoji="1" lang="en-US" altLang="zh-CN" dirty="0"/>
+              <a:t> </a:t>
+            </a:r>
+            <a:br>
+              <a:rPr kumimoji="1" lang="en-US" altLang="zh-CN" dirty="0"/>
+            </a:br>
+            <a:r>
+              <a:rPr lang="en" altLang="zh-CN" dirty="0" err="1"/>
+              <a:t>MegaScale-MoE</a:t>
+            </a:r>
+            <a:r>
+              <a:rPr lang="en" altLang="zh-CN" dirty="0"/>
+              <a:t> instead adopts sequence parallelism for attention. [click] The reason is closely related to grouped-query attention, or GQA, which is widely used in recent LLMs to reduce the number of key-value heads and improve attention efficiency. With GQA, the size of key and value tensors is much smaller than the query tensor. [click] Sequence parallelism takes advantage of this property: instead of communicating the whole hidden state, it mainly exchanges the query, key, and value tensors needed by attention.</a:t>
+            </a:r>
+          </a:p>
+          <a:p>
+            <a:r>
+              <a:rPr lang="en" altLang="zh-CN" dirty="0"/>
+              <a:t>As a result, compared with tensor parallelism, the communication volume is reduced by about three times in practice.</a:t>
+            </a:r>
+          </a:p>
+          <a:p>
+            <a:pPr marL="0" marR="0" lvl="0" indent="0" algn="l" defTabSz="914400" rtl="0" eaLnBrk="1" fontAlgn="auto" latinLnBrk="0" hangingPunct="1">
+              <a:lnSpc>
+                <a:spcPct val="100000"/>
+              </a:lnSpc>
+              <a:spcBef>
+                <a:spcPts val="0"/>
+              </a:spcBef>
+              <a:spcAft>
+                <a:spcPts val="0"/>
+              </a:spcAft>
+              <a:buClrTx/>
+              <a:buSzTx/>
+              <a:buFontTx/>
+              <a:buNone/>
+              <a:tabLst/>
+              <a:defRPr/>
+            </a:pPr>
+            <a:endParaRPr lang="en" altLang="zh-CN" dirty="0"/>
+          </a:p>
+          <a:p>
+            <a:pPr marL="0" marR="0" lvl="0" indent="0" algn="l" defTabSz="914400" rtl="0" eaLnBrk="1" fontAlgn="auto" latinLnBrk="0" hangingPunct="1">
+              <a:lnSpc>
+                <a:spcPct val="100000"/>
+              </a:lnSpc>
+              <a:spcBef>
+                <a:spcPts val="0"/>
+              </a:spcBef>
+              <a:spcAft>
+                <a:spcPts val="0"/>
+              </a:spcAft>
+              <a:buClrTx/>
+              <a:buSzTx/>
+              <a:buFontTx/>
+              <a:buNone/>
+              <a:tabLst/>
+              <a:defRPr/>
+            </a:pPr>
+            <a:r>
+              <a:rPr lang="en" altLang="zh-CN" dirty="0"/>
+              <a:t>[7:15]</a:t>
+            </a:r>
+          </a:p>
+        </p:txBody>
+      </p:sp>
+      <p:sp>
+        <p:nvSpPr>
+          <p:cNvPr id="4" name="灯片编号占位符 3">
+            <a:extLst>
+              <a:ext uri="{FF2B5EF4-FFF2-40B4-BE49-F238E27FC236}">
+                <a16:creationId xmlns:a16="http://schemas.microsoft.com/office/drawing/2014/main" id="{9BC88C4C-D80D-310A-C87C-950687F4E065}"/>
+              </a:ext>
+            </a:extLst>
+          </p:cNvPr>
+          <p:cNvSpPr>
+            <a:spLocks noGrp="1"/>
+          </p:cNvSpPr>
+          <p:nvPr>
+            <p:ph type="sldNum" sz="quarter" idx="5"/>
+          </p:nvPr>
+        </p:nvSpPr>
+        <p:spPr/>
+        <p:txBody>
+          <a:bodyPr/>
+          <a:lstStyle/>
+          <a:p>
+            <a:fld id="{BF4A37DF-3F3B-E649-8A1A-F4B332B15B36}" type="slidenum">
+              <a:rPr kumimoji="1" lang="zh-CN" altLang="en-US" smtClean="0"/>
+              <a:t>10</a:t>
+            </a:fld>
+            <a:endParaRPr kumimoji="1" lang="zh-CN" altLang="en-US"/>
+          </a:p>
+        </p:txBody>
+      </p:sp>
+    </p:spTree>
+    <p:extLst>
+      <p:ext uri="{BB962C8B-B14F-4D97-AF65-F5344CB8AC3E}">
+        <p14:creationId xmlns:p14="http://schemas.microsoft.com/office/powerpoint/2010/main" val="1554702800"/>
+      </p:ext>
+    </p:extLst>
+  </p:cSld>
+  <p:clrMapOvr>
+    <a:masterClrMapping/>
+  </p:clrMapOvr>
+</p:notes>
+</file>
+
+<file path=ppt/notesSlides/notesSlide11.xml><?xml version="1.0" encoding="utf-8"?>
+<p:notes xmlns:a="http://schemas.openxmlformats.org/drawingml/2006/main" xmlns:r="http://schemas.openxmlformats.org/officeDocument/2006/relationships" xmlns:p="http://schemas.openxmlformats.org/presentationml/2006/main">
+  <p:cSld>
+    <p:spTree>
+      <p:nvGrpSpPr>
+        <p:cNvPr id="1" name="">
+          <a:extLst>
+            <a:ext uri="{FF2B5EF4-FFF2-40B4-BE49-F238E27FC236}">
+              <a16:creationId xmlns:a16="http://schemas.microsoft.com/office/drawing/2014/main" id="{41B26B8A-6566-D0B0-ECBE-4B01540ECE11}"/>
+            </a:ext>
+          </a:extLst>
+        </p:cNvPr>
+        <p:cNvGrpSpPr/>
+        <p:nvPr/>
+      </p:nvGrpSpPr>
+      <p:grpSpPr>
+        <a:xfrm>
+          <a:off x="0" y="0"/>
+          <a:ext cx="0" cy="0"/>
+          <a:chOff x="0" y="0"/>
+          <a:chExt cx="0" cy="0"/>
+        </a:xfrm>
+      </p:grpSpPr>
+      <p:sp>
+        <p:nvSpPr>
+          <p:cNvPr id="2" name="幻灯片图像占位符 1">
+            <a:extLst>
+              <a:ext uri="{FF2B5EF4-FFF2-40B4-BE49-F238E27FC236}">
+                <a16:creationId xmlns:a16="http://schemas.microsoft.com/office/drawing/2014/main" id="{96DEAFD4-E834-DE6E-F35E-2F65A8175910}"/>
+              </a:ext>
+            </a:extLst>
+          </p:cNvPr>
+          <p:cNvSpPr>
+            <a:spLocks noGrp="1" noRot="1" noChangeAspect="1"/>
+          </p:cNvSpPr>
+          <p:nvPr>
+            <p:ph type="sldImg"/>
+          </p:nvPr>
+        </p:nvSpPr>
+        <p:spPr/>
+      </p:sp>
+      <p:sp>
+        <p:nvSpPr>
+          <p:cNvPr id="3" name="备注占位符 2">
+            <a:extLst>
+              <a:ext uri="{FF2B5EF4-FFF2-40B4-BE49-F238E27FC236}">
+                <a16:creationId xmlns:a16="http://schemas.microsoft.com/office/drawing/2014/main" id="{12D55A6B-42B1-9C18-F514-E27F55C89A6A}"/>
+              </a:ext>
+            </a:extLst>
+          </p:cNvPr>
+          <p:cNvSpPr>
+            <a:spLocks noGrp="1"/>
+          </p:cNvSpPr>
+          <p:nvPr>
+            <p:ph type="body" idx="1"/>
+          </p:nvPr>
+        </p:nvSpPr>
+        <p:spPr/>
+        <p:txBody>
+          <a:bodyPr/>
+          <a:lstStyle/>
+          <a:p>
+            <a:r>
+              <a:rPr lang="en" altLang="zh-CN" dirty="0"/>
+              <a:t>For the FFNs, we use expert parallelism instead of tensor parallelism.</a:t>
+            </a:r>
+            <a:r>
+              <a:rPr lang="zh-CN" altLang="en-US" dirty="0"/>
+              <a:t> </a:t>
+            </a:r>
+            <a:r>
+              <a:rPr lang="en" altLang="zh-CN" dirty="0"/>
+              <a:t>Tensor parallelism partitions each expert along the hidden dimension, which reduces GEMM efficiency because each GPU only computes a smaller shard of the expert.</a:t>
+            </a:r>
+          </a:p>
+          <a:p>
+            <a:r>
+              <a:rPr lang="en" altLang="zh-CN" dirty="0"/>
+              <a:t>Expert parallelism is more natural for </a:t>
+            </a:r>
+            <a:r>
+              <a:rPr lang="en" altLang="zh-CN" dirty="0" err="1"/>
+              <a:t>MoE</a:t>
+            </a:r>
+            <a:r>
+              <a:rPr lang="en" altLang="zh-CN" dirty="0"/>
+              <a:t>: each GPU hosts a subset of experts, and each expert remains a full GEMM.</a:t>
+            </a:r>
+          </a:p>
+          <a:p>
+            <a:r>
+              <a:rPr lang="en" altLang="zh-CN" dirty="0"/>
+              <a:t>The challenge is token dispatch and combine. </a:t>
+            </a:r>
+            <a:r>
+              <a:rPr lang="en-US" altLang="zh-CN" dirty="0"/>
+              <a:t>[click] </a:t>
+            </a:r>
+            <a:r>
+              <a:rPr lang="en" altLang="zh-CN" dirty="0"/>
+              <a:t>A typical implementation uses all-to-all communication, whose volume grows with the top-k value. [click]</a:t>
+            </a:r>
+          </a:p>
+          <a:p>
+            <a:r>
+              <a:rPr lang="en" altLang="zh-CN" dirty="0" err="1"/>
+              <a:t>MegaScale-MoE</a:t>
+            </a:r>
+            <a:r>
+              <a:rPr lang="en" altLang="zh-CN" dirty="0"/>
+              <a:t> therefore uses an adaptive communication pattern. For small top-k, we use all-to-all. [click] When top-k becomes large, we replace it with all-gather and reduce-scatter, together with efficient local operators.</a:t>
+            </a:r>
+          </a:p>
+          <a:p>
+            <a:r>
+              <a:rPr lang="en" altLang="zh-CN" dirty="0"/>
+              <a:t>In this way, we preserve high GEMM efficiency while keeping expert communication efficient.</a:t>
+            </a:r>
+          </a:p>
+          <a:p>
+            <a:endParaRPr lang="en" altLang="zh-CN" dirty="0"/>
+          </a:p>
+          <a:p>
+            <a:r>
+              <a:rPr lang="en" altLang="zh-CN" dirty="0"/>
+              <a:t>[8:25]</a:t>
+            </a:r>
+          </a:p>
+        </p:txBody>
+      </p:sp>
+      <p:sp>
+        <p:nvSpPr>
+          <p:cNvPr id="4" name="灯片编号占位符 3">
+            <a:extLst>
+              <a:ext uri="{FF2B5EF4-FFF2-40B4-BE49-F238E27FC236}">
+                <a16:creationId xmlns:a16="http://schemas.microsoft.com/office/drawing/2014/main" id="{0D8907AE-7BA7-4B49-0E2E-582809E610DD}"/>
+              </a:ext>
+            </a:extLst>
+          </p:cNvPr>
+          <p:cNvSpPr>
+            <a:spLocks noGrp="1"/>
+          </p:cNvSpPr>
+          <p:nvPr>
+            <p:ph type="sldNum" sz="quarter" idx="5"/>
+          </p:nvPr>
+        </p:nvSpPr>
+        <p:spPr/>
+        <p:txBody>
+          <a:bodyPr/>
+          <a:lstStyle/>
+          <a:p>
+            <a:fld id="{BF4A37DF-3F3B-E649-8A1A-F4B332B15B36}" type="slidenum">
+              <a:rPr kumimoji="1" lang="zh-CN" altLang="en-US" smtClean="0"/>
+              <a:t>11</a:t>
+            </a:fld>
+            <a:endParaRPr kumimoji="1" lang="zh-CN" altLang="en-US"/>
+          </a:p>
+        </p:txBody>
+      </p:sp>
+    </p:spTree>
+    <p:extLst>
+      <p:ext uri="{BB962C8B-B14F-4D97-AF65-F5344CB8AC3E}">
+        <p14:creationId xmlns:p14="http://schemas.microsoft.com/office/powerpoint/2010/main" val="3687031853"/>
+      </p:ext>
+    </p:extLst>
+  </p:cSld>
+  <p:clrMapOvr>
+    <a:masterClrMapping/>
+  </p:clrMapOvr>
+</p:notes>
+</file>
+
+<file path=ppt/notesSlides/notesSlide12.xml><?xml version="1.0" encoding="utf-8"?>
+<p:notes xmlns:a="http://schemas.openxmlformats.org/drawingml/2006/main" xmlns:r="http://schemas.openxmlformats.org/officeDocument/2006/relationships" xmlns:p="http://schemas.openxmlformats.org/presentationml/2006/main">
+  <p:cSld>
+    <p:spTree>
+      <p:nvGrpSpPr>
+        <p:cNvPr id="1" name="">
+          <a:extLst>
+            <a:ext uri="{FF2B5EF4-FFF2-40B4-BE49-F238E27FC236}">
               <a16:creationId xmlns:a16="http://schemas.microsoft.com/office/drawing/2014/main" id="{B52D9861-4D08-9F4E-BC03-D1E974EFA2E5}"/>
             </a:ext>
           </a:extLst>
@@ -905,7 +1254,7 @@
           <a:p>
             <a:fld id="{BF4A37DF-3F3B-E649-8A1A-F4B332B15B36}" type="slidenum">
               <a:rPr kumimoji="1" lang="zh-CN" altLang="en-US" smtClean="0"/>
-              <a:t>10</a:t>
+              <a:t>12</a:t>
             </a:fld>
             <a:endParaRPr kumimoji="1" lang="zh-CN" altLang="en-US"/>
           </a:p>
@@ -924,7 +1273,7 @@
 </p:notes>
 </file>
 
-<file path=ppt/notesSlides/notesSlide11.xml><?xml version="1.0" encoding="utf-8"?>
+<file path=ppt/notesSlides/notesSlide13.xml><?xml version="1.0" encoding="utf-8"?>
 <p:notes xmlns:a="http://schemas.openxmlformats.org/drawingml/2006/main" xmlns:r="http://schemas.openxmlformats.org/officeDocument/2006/relationships" xmlns:p="http://schemas.openxmlformats.org/presentationml/2006/main">
   <p:cSld>
     <p:spTree>
@@ -1036,7 +1385,7 @@
           <a:p>
             <a:fld id="{BF4A37DF-3F3B-E649-8A1A-F4B332B15B36}" type="slidenum">
               <a:rPr kumimoji="1" lang="zh-CN" altLang="en-US" smtClean="0"/>
-              <a:t>11</a:t>
+              <a:t>13</a:t>
             </a:fld>
             <a:endParaRPr kumimoji="1" lang="zh-CN" altLang="en-US"/>
           </a:p>
@@ -1055,7 +1404,7 @@
 </p:notes>
 </file>
 
-<file path=ppt/notesSlides/notesSlide12.xml><?xml version="1.0" encoding="utf-8"?>
+<file path=ppt/notesSlides/notesSlide14.xml><?xml version="1.0" encoding="utf-8"?>
 <p:notes xmlns:a="http://schemas.openxmlformats.org/drawingml/2006/main" xmlns:r="http://schemas.openxmlformats.org/officeDocument/2006/relationships" xmlns:p="http://schemas.openxmlformats.org/presentationml/2006/main">
   <p:cSld>
     <p:spTree>
@@ -1318,7 +1667,7 @@
           <a:p>
             <a:fld id="{BF4A37DF-3F3B-E649-8A1A-F4B332B15B36}" type="slidenum">
               <a:rPr kumimoji="1" lang="zh-CN" altLang="en-US" smtClean="0"/>
-              <a:t>12</a:t>
+              <a:t>14</a:t>
             </a:fld>
             <a:endParaRPr kumimoji="1" lang="zh-CN" altLang="en-US"/>
           </a:p>
@@ -1337,7 +1686,7 @@
 </p:notes>
 </file>
 
-<file path=ppt/notesSlides/notesSlide13.xml><?xml version="1.0" encoding="utf-8"?>
+<file path=ppt/notesSlides/notesSlide15.xml><?xml version="1.0" encoding="utf-8"?>
 <p:notes xmlns:a="http://schemas.openxmlformats.org/drawingml/2006/main" xmlns:r="http://schemas.openxmlformats.org/officeDocument/2006/relationships" xmlns:p="http://schemas.openxmlformats.org/presentationml/2006/main">
   <p:cSld>
     <p:spTree>
@@ -1493,7 +1842,7 @@
           <a:p>
             <a:fld id="{BF4A37DF-3F3B-E649-8A1A-F4B332B15B36}" type="slidenum">
               <a:rPr kumimoji="1" lang="zh-CN" altLang="en-US" smtClean="0"/>
-              <a:t>13</a:t>
+              <a:t>15</a:t>
             </a:fld>
             <a:endParaRPr kumimoji="1" lang="zh-CN" altLang="en-US"/>
           </a:p>
@@ -1512,7 +1861,7 @@
 </p:notes>
 </file>
 
-<file path=ppt/notesSlides/notesSlide14.xml><?xml version="1.0" encoding="utf-8"?>
+<file path=ppt/notesSlides/notesSlide16.xml><?xml version="1.0" encoding="utf-8"?>
 <p:notes xmlns:a="http://schemas.openxmlformats.org/drawingml/2006/main" xmlns:r="http://schemas.openxmlformats.org/officeDocument/2006/relationships" xmlns:p="http://schemas.openxmlformats.org/presentationml/2006/main">
   <p:cSld>
     <p:spTree>
@@ -1655,7 +2004,7 @@
           <a:p>
             <a:fld id="{BF4A37DF-3F3B-E649-8A1A-F4B332B15B36}" type="slidenum">
               <a:rPr kumimoji="1" lang="zh-CN" altLang="en-US" smtClean="0"/>
-              <a:t>14</a:t>
+              <a:t>16</a:t>
             </a:fld>
             <a:endParaRPr kumimoji="1" lang="zh-CN" altLang="en-US"/>
           </a:p>
@@ -1674,7 +2023,7 @@
 </p:notes>
 </file>
 
-<file path=ppt/notesSlides/notesSlide15.xml><?xml version="1.0" encoding="utf-8"?>
+<file path=ppt/notesSlides/notesSlide17.xml><?xml version="1.0" encoding="utf-8"?>
 <p:notes xmlns:a="http://schemas.openxmlformats.org/drawingml/2006/main" xmlns:r="http://schemas.openxmlformats.org/officeDocument/2006/relationships" xmlns:p="http://schemas.openxmlformats.org/presentationml/2006/main">
   <p:cSld>
     <p:spTree>
@@ -1778,7 +2127,7 @@
           <a:p>
             <a:fld id="{BF4A37DF-3F3B-E649-8A1A-F4B332B15B36}" type="slidenum">
               <a:rPr kumimoji="1" lang="zh-CN" altLang="en-US" smtClean="0"/>
-              <a:t>15</a:t>
+              <a:t>17</a:t>
             </a:fld>
             <a:endParaRPr kumimoji="1" lang="zh-CN" altLang="en-US"/>
           </a:p>
@@ -1788,343 +2137,6 @@
     <p:extLst>
       <p:ext uri="{BB962C8B-B14F-4D97-AF65-F5344CB8AC3E}">
         <p14:creationId xmlns:p14="http://schemas.microsoft.com/office/powerpoint/2010/main" val="1163168731"/>
-      </p:ext>
-    </p:extLst>
-  </p:cSld>
-  <p:clrMapOvr>
-    <a:masterClrMapping/>
-  </p:clrMapOvr>
-</p:notes>
-</file>
-
-<file path=ppt/notesSlides/notesSlide16.xml><?xml version="1.0" encoding="utf-8"?>
-<p:notes xmlns:a="http://schemas.openxmlformats.org/drawingml/2006/main" xmlns:r="http://schemas.openxmlformats.org/officeDocument/2006/relationships" xmlns:p="http://schemas.openxmlformats.org/presentationml/2006/main">
-  <p:cSld>
-    <p:spTree>
-      <p:nvGrpSpPr>
-        <p:cNvPr id="1" name=""/>
-        <p:cNvGrpSpPr/>
-        <p:nvPr/>
-      </p:nvGrpSpPr>
-      <p:grpSpPr>
-        <a:xfrm>
-          <a:off x="0" y="0"/>
-          <a:ext cx="0" cy="0"/>
-          <a:chOff x="0" y="0"/>
-          <a:chExt cx="0" cy="0"/>
-        </a:xfrm>
-      </p:grpSpPr>
-      <p:sp>
-        <p:nvSpPr>
-          <p:cNvPr id="2" name="幻灯片图像占位符 1"/>
-          <p:cNvSpPr>
-            <a:spLocks noGrp="1" noRot="1" noChangeAspect="1"/>
-          </p:cNvSpPr>
-          <p:nvPr>
-            <p:ph type="sldImg"/>
-          </p:nvPr>
-        </p:nvSpPr>
-        <p:spPr/>
-      </p:sp>
-      <p:sp>
-        <p:nvSpPr>
-          <p:cNvPr id="3" name="备注占位符 2"/>
-          <p:cNvSpPr>
-            <a:spLocks noGrp="1"/>
-          </p:cNvSpPr>
-          <p:nvPr>
-            <p:ph type="body" idx="1"/>
-          </p:nvPr>
-        </p:nvSpPr>
-        <p:spPr/>
-        <p:txBody>
-          <a:bodyPr/>
-          <a:lstStyle/>
-          <a:p>
-            <a:r>
-              <a:rPr lang="en" altLang="zh-CN" dirty="0"/>
-              <a:t>We evaluate </a:t>
-            </a:r>
-            <a:r>
-              <a:rPr lang="en" altLang="zh-CN" dirty="0" err="1"/>
-              <a:t>MegaScale-MoE</a:t>
-            </a:r>
-            <a:r>
-              <a:rPr lang="en" altLang="zh-CN" dirty="0"/>
-              <a:t> from multiple perspectives. This includes end-to-end training performance, performance breakdown, and a set of ablation studies for each major optimization. </a:t>
-            </a:r>
-          </a:p>
-          <a:p>
-            <a:r>
-              <a:rPr lang="en" altLang="zh-CN" dirty="0"/>
-              <a:t>I will focus on two key results in this talk: the overall training performance and the performance breakdown. You can refer to our paper for more your interested part. </a:t>
-            </a:r>
-          </a:p>
-          <a:p>
-            <a:endParaRPr lang="en" altLang="zh-CN" dirty="0"/>
-          </a:p>
-          <a:p>
-            <a:r>
-              <a:rPr lang="en-US" altLang="zh-CN" dirty="0"/>
-              <a:t>[12:15]</a:t>
-            </a:r>
-            <a:endParaRPr lang="en" altLang="zh-CN" dirty="0"/>
-          </a:p>
-          <a:p>
-            <a:endParaRPr kumimoji="1" lang="zh-CN" altLang="en-US" dirty="0"/>
-          </a:p>
-        </p:txBody>
-      </p:sp>
-      <p:sp>
-        <p:nvSpPr>
-          <p:cNvPr id="4" name="灯片编号占位符 3"/>
-          <p:cNvSpPr>
-            <a:spLocks noGrp="1"/>
-          </p:cNvSpPr>
-          <p:nvPr>
-            <p:ph type="sldNum" sz="quarter" idx="5"/>
-          </p:nvPr>
-        </p:nvSpPr>
-        <p:spPr/>
-        <p:txBody>
-          <a:bodyPr/>
-          <a:lstStyle/>
-          <a:p>
-            <a:fld id="{BF4A37DF-3F3B-E649-8A1A-F4B332B15B36}" type="slidenum">
-              <a:rPr kumimoji="1" lang="zh-CN" altLang="en-US" smtClean="0"/>
-              <a:t>16</a:t>
-            </a:fld>
-            <a:endParaRPr kumimoji="1" lang="zh-CN" altLang="en-US"/>
-          </a:p>
-        </p:txBody>
-      </p:sp>
-    </p:spTree>
-    <p:extLst>
-      <p:ext uri="{BB962C8B-B14F-4D97-AF65-F5344CB8AC3E}">
-        <p14:creationId xmlns:p14="http://schemas.microsoft.com/office/powerpoint/2010/main" val="1721587271"/>
-      </p:ext>
-    </p:extLst>
-  </p:cSld>
-  <p:clrMapOvr>
-    <a:masterClrMapping/>
-  </p:clrMapOvr>
-</p:notes>
-</file>
-
-<file path=ppt/notesSlides/notesSlide17.xml><?xml version="1.0" encoding="utf-8"?>
-<p:notes xmlns:a="http://schemas.openxmlformats.org/drawingml/2006/main" xmlns:r="http://schemas.openxmlformats.org/officeDocument/2006/relationships" xmlns:p="http://schemas.openxmlformats.org/presentationml/2006/main">
-  <p:cSld>
-    <p:spTree>
-      <p:nvGrpSpPr>
-        <p:cNvPr id="1" name=""/>
-        <p:cNvGrpSpPr/>
-        <p:nvPr/>
-      </p:nvGrpSpPr>
-      <p:grpSpPr>
-        <a:xfrm>
-          <a:off x="0" y="0"/>
-          <a:ext cx="0" cy="0"/>
-          <a:chOff x="0" y="0"/>
-          <a:chExt cx="0" cy="0"/>
-        </a:xfrm>
-      </p:grpSpPr>
-      <p:sp>
-        <p:nvSpPr>
-          <p:cNvPr id="2" name="幻灯片图像占位符 1"/>
-          <p:cNvSpPr>
-            <a:spLocks noGrp="1" noRot="1" noChangeAspect="1"/>
-          </p:cNvSpPr>
-          <p:nvPr>
-            <p:ph type="sldImg"/>
-          </p:nvPr>
-        </p:nvSpPr>
-        <p:spPr/>
-      </p:sp>
-      <p:sp>
-        <p:nvSpPr>
-          <p:cNvPr id="3" name="备注占位符 2"/>
-          <p:cNvSpPr>
-            <a:spLocks noGrp="1"/>
-          </p:cNvSpPr>
-          <p:nvPr>
-            <p:ph type="body" idx="1"/>
-          </p:nvPr>
-        </p:nvSpPr>
-        <p:spPr/>
-        <p:txBody>
-          <a:bodyPr/>
-          <a:lstStyle/>
-          <a:p>
-            <a:pPr marL="0" marR="0" indent="0" algn="l" defTabSz="914400" rtl="0" eaLnBrk="1" fontAlgn="auto" latinLnBrk="0" hangingPunct="1">
-              <a:lnSpc>
-                <a:spcPct val="100000"/>
-              </a:lnSpc>
-              <a:spcBef>
-                <a:spcPts val="0"/>
-              </a:spcBef>
-              <a:spcAft>
-                <a:spcPts val="0"/>
-              </a:spcAft>
-              <a:buClrTx/>
-              <a:buSzTx/>
-              <a:buFontTx/>
-              <a:buNone/>
-              <a:tabLst/>
-              <a:defRPr/>
-            </a:pPr>
-            <a:r>
-              <a:rPr kumimoji="1" lang="en" altLang="zh-CN" dirty="0"/>
-              <a:t>We evaluate the strong-scaling training performance of Megatron-LM and </a:t>
-            </a:r>
-            <a:r>
-              <a:rPr kumimoji="1" lang="en" altLang="zh-CN" dirty="0" err="1"/>
-              <a:t>MegaScale-MoE</a:t>
-            </a:r>
-            <a:r>
-              <a:rPr kumimoji="1" lang="en" altLang="zh-CN" dirty="0"/>
-              <a:t> on the there hundred and fifty two billion (352B) model with thirty two (32) experts each layer by increasing the number of GPUs and maintaining a constant batch size. This experimental setting is realistic, given that batch size is constrained by convergence effects and cannot be infinitely scaled with the number of GPUs. </a:t>
-            </a:r>
-          </a:p>
-          <a:p>
-            <a:pPr marL="0" marR="0" indent="0" algn="l" defTabSz="914400" rtl="0" eaLnBrk="1" fontAlgn="auto" latinLnBrk="0" hangingPunct="1">
-              <a:lnSpc>
-                <a:spcPct val="100000"/>
-              </a:lnSpc>
-              <a:spcBef>
-                <a:spcPts val="0"/>
-              </a:spcBef>
-              <a:spcAft>
-                <a:spcPts val="0"/>
-              </a:spcAft>
-              <a:buClrTx/>
-              <a:buSzTx/>
-              <a:buFontTx/>
-              <a:buNone/>
-              <a:tabLst/>
-              <a:defRPr/>
-            </a:pPr>
-            <a:r>
-              <a:rPr kumimoji="1" lang="en" altLang="zh-CN" dirty="0"/>
-              <a:t>From the table we can see that </a:t>
-            </a:r>
-            <a:r>
-              <a:rPr kumimoji="1" lang="en" altLang="zh-CN" dirty="0" err="1"/>
-              <a:t>MegaScale-MoE</a:t>
-            </a:r>
-            <a:r>
-              <a:rPr kumimoji="1" lang="en" altLang="zh-CN" dirty="0"/>
-              <a:t> achieves up to one point eight eight times (1.88x) speedups over Megatron-LM across all settings, enabling us to train the model over one trillion (1T) tokens on </a:t>
-            </a:r>
-            <a:r>
-              <a:rPr lang="en" altLang="zh-CN" dirty="0"/>
-              <a:t>one thousand four hundred and forty</a:t>
-            </a:r>
-            <a:r>
-              <a:rPr lang="zh-CN" altLang="en-US" dirty="0"/>
-              <a:t> </a:t>
-            </a:r>
-            <a:r>
-              <a:rPr lang="en-US" altLang="zh-CN" dirty="0"/>
-              <a:t>(1440)</a:t>
-            </a:r>
-            <a:r>
-              <a:rPr kumimoji="1" lang="en" altLang="zh-CN" dirty="0"/>
-              <a:t> GPUs for only eight point two (8.22) days.</a:t>
-            </a:r>
-          </a:p>
-          <a:p>
-            <a:pPr marL="0" marR="0" indent="0" algn="l" defTabSz="914400" rtl="0" eaLnBrk="1" fontAlgn="auto" latinLnBrk="0" hangingPunct="1">
-              <a:lnSpc>
-                <a:spcPct val="100000"/>
-              </a:lnSpc>
-              <a:spcBef>
-                <a:spcPts val="0"/>
-              </a:spcBef>
-              <a:spcAft>
-                <a:spcPts val="0"/>
-              </a:spcAft>
-              <a:buClrTx/>
-              <a:buSzTx/>
-              <a:buFontTx/>
-              <a:buNone/>
-              <a:tabLst/>
-              <a:defRPr/>
-            </a:pPr>
-            <a:endParaRPr kumimoji="1" lang="en" altLang="zh-CN" dirty="0"/>
-          </a:p>
-          <a:p>
-            <a:pPr marL="0" marR="0" indent="0" algn="l" defTabSz="914400" rtl="0" eaLnBrk="1" fontAlgn="auto" latinLnBrk="0" hangingPunct="1">
-              <a:lnSpc>
-                <a:spcPct val="100000"/>
-              </a:lnSpc>
-              <a:spcBef>
-                <a:spcPts val="0"/>
-              </a:spcBef>
-              <a:spcAft>
-                <a:spcPts val="0"/>
-              </a:spcAft>
-              <a:buClrTx/>
-              <a:buSzTx/>
-              <a:buFontTx/>
-              <a:buNone/>
-              <a:tabLst/>
-              <a:defRPr/>
-            </a:pPr>
-            <a:r>
-              <a:rPr kumimoji="1" lang="en" altLang="zh-CN" dirty="0"/>
-              <a:t>[13:10]</a:t>
-            </a:r>
-            <a:endParaRPr kumimoji="1" lang="en-US" altLang="zh-CN" dirty="0"/>
-          </a:p>
-          <a:p>
-            <a:pPr marL="0" marR="0" indent="0" algn="l" defTabSz="914400" rtl="0" eaLnBrk="1" fontAlgn="auto" latinLnBrk="0" hangingPunct="1">
-              <a:lnSpc>
-                <a:spcPct val="100000"/>
-              </a:lnSpc>
-              <a:spcBef>
-                <a:spcPts val="0"/>
-              </a:spcBef>
-              <a:spcAft>
-                <a:spcPts val="0"/>
-              </a:spcAft>
-              <a:buClrTx/>
-              <a:buSzTx/>
-              <a:buFontTx/>
-              <a:buNone/>
-              <a:tabLst/>
-              <a:defRPr/>
-            </a:pPr>
-            <a:endParaRPr kumimoji="1" lang="en-US" altLang="zh-CN" dirty="0"/>
-          </a:p>
-        </p:txBody>
-      </p:sp>
-      <p:sp>
-        <p:nvSpPr>
-          <p:cNvPr id="4" name="灯片编号占位符 3"/>
-          <p:cNvSpPr>
-            <a:spLocks noGrp="1"/>
-          </p:cNvSpPr>
-          <p:nvPr>
-            <p:ph type="sldNum" sz="quarter" idx="5"/>
-          </p:nvPr>
-        </p:nvSpPr>
-        <p:spPr/>
-        <p:txBody>
-          <a:bodyPr/>
-          <a:lstStyle/>
-          <a:p>
-            <a:fld id="{BF4A37DF-3F3B-E649-8A1A-F4B332B15B36}" type="slidenum">
-              <a:rPr kumimoji="1" lang="zh-CN" altLang="en-US" smtClean="0"/>
-              <a:t>17</a:t>
-            </a:fld>
-            <a:endParaRPr kumimoji="1" lang="zh-CN" altLang="en-US"/>
-          </a:p>
-        </p:txBody>
-      </p:sp>
-    </p:spTree>
-    <p:extLst>
-      <p:ext uri="{BB962C8B-B14F-4D97-AF65-F5344CB8AC3E}">
-        <p14:creationId xmlns:p14="http://schemas.microsoft.com/office/powerpoint/2010/main" val="3190736564"/>
       </p:ext>
     </p:extLst>
   </p:cSld>
@@ -2180,21 +2192,7 @@
           <a:p>
             <a:r>
               <a:rPr lang="en" altLang="zh-CN" dirty="0"/>
-              <a:t>To better understand where the performance improvement comes from, we further break down the iteration time on different GPU platforms, including H800, A100, and H20. </a:t>
-            </a:r>
-          </a:p>
-          <a:p>
-            <a:r>
-              <a:rPr lang="en" altLang="zh-CN" dirty="0"/>
-              <a:t>The left subfigure shows the iteration time breakdown. Here, exposed communication means the communication time that is not hidden by computation. </a:t>
-            </a:r>
-            <a:r>
-              <a:rPr lang="en" altLang="zh-CN" dirty="0" err="1"/>
-              <a:t>FlashAttention</a:t>
-            </a:r>
-            <a:r>
-              <a:rPr lang="en" altLang="zh-CN" dirty="0"/>
-              <a:t> and GEMMs are the major computation kernels counted in Model FLOPs Utilization, or MFU. We can see that </a:t>
+              <a:t>We evaluate </a:t>
             </a:r>
             <a:r>
               <a:rPr lang="en" altLang="zh-CN" dirty="0" err="1"/>
@@ -2202,17 +2200,26 @@
             </a:r>
             <a:r>
               <a:rPr lang="en" altLang="zh-CN" dirty="0"/>
-              <a:t> significantly reduces the exposed communication time across different GPUs. </a:t>
-            </a:r>
-          </a:p>
-          <a:p>
-            <a:endParaRPr kumimoji="1" lang="en" altLang="zh-CN" dirty="0"/>
-          </a:p>
-          <a:p>
-            <a:r>
-              <a:rPr kumimoji="1" lang="en" altLang="zh-CN" dirty="0"/>
-              <a:t>[13:40]</a:t>
-            </a:r>
+              <a:t> from multiple perspectives. This includes end-to-end training performance, performance breakdown, and a set of ablation studies for each major optimization. </a:t>
+            </a:r>
+          </a:p>
+          <a:p>
+            <a:r>
+              <a:rPr lang="en" altLang="zh-CN" dirty="0"/>
+              <a:t>I will focus on two key results in this talk: the overall training performance and the performance breakdown. You can refer to our paper for more your interested part. </a:t>
+            </a:r>
+          </a:p>
+          <a:p>
+            <a:endParaRPr lang="en" altLang="zh-CN" dirty="0"/>
+          </a:p>
+          <a:p>
+            <a:r>
+              <a:rPr lang="en-US" altLang="zh-CN" dirty="0"/>
+              <a:t>[12:15]</a:t>
+            </a:r>
+            <a:endParaRPr lang="en" altLang="zh-CN" dirty="0"/>
+          </a:p>
+          <a:p>
             <a:endParaRPr kumimoji="1" lang="zh-CN" altLang="en-US" dirty="0"/>
           </a:p>
         </p:txBody>
@@ -2243,7 +2250,7 @@
     </p:spTree>
     <p:extLst>
       <p:ext uri="{BB962C8B-B14F-4D97-AF65-F5344CB8AC3E}">
-        <p14:creationId xmlns:p14="http://schemas.microsoft.com/office/powerpoint/2010/main" val="2834790993"/>
+        <p14:creationId xmlns:p14="http://schemas.microsoft.com/office/powerpoint/2010/main" val="1721587271"/>
       </p:ext>
     </p:extLst>
   </p:cSld>
@@ -2297,86 +2304,146 @@
           <a:bodyPr/>
           <a:lstStyle/>
           <a:p>
-            <a:r>
-              <a:rPr lang="en" altLang="zh-CN" dirty="0" err="1"/>
+            <a:pPr marL="0" marR="0" indent="0" algn="l" defTabSz="914400" rtl="0" eaLnBrk="1" fontAlgn="auto" latinLnBrk="0" hangingPunct="1">
+              <a:lnSpc>
+                <a:spcPct val="100000"/>
+              </a:lnSpc>
+              <a:spcBef>
+                <a:spcPts val="0"/>
+              </a:spcBef>
+              <a:spcAft>
+                <a:spcPts val="0"/>
+              </a:spcAft>
+              <a:buClrTx/>
+              <a:buSzTx/>
+              <a:buFontTx/>
+              <a:buNone/>
+              <a:tabLst/>
+              <a:defRPr/>
+            </a:pPr>
+            <a:r>
+              <a:rPr kumimoji="1" lang="en" altLang="zh-CN" dirty="0"/>
+              <a:t>We evaluate the strong-scaling training performance of Megatron-LM and </a:t>
+            </a:r>
+            <a:r>
+              <a:rPr kumimoji="1" lang="en" altLang="zh-CN" dirty="0" err="1"/>
               <a:t>MegaScale-MoE</a:t>
             </a:r>
             <a:r>
+              <a:rPr kumimoji="1" lang="en" altLang="zh-CN" dirty="0"/>
+              <a:t> on the there hundred and fifty two billion (352B) model with thirty two (32) experts each layer by increasing the number of GPUs and maintaining a constant batch size. This experimental setting is realistic, given that batch size is constrained by convergence effects and cannot be infinitely scaled with the number of GPUs. </a:t>
+            </a:r>
+          </a:p>
+          <a:p>
+            <a:pPr marL="0" marR="0" indent="0" algn="l" defTabSz="914400" rtl="0" eaLnBrk="1" fontAlgn="auto" latinLnBrk="0" hangingPunct="1">
+              <a:lnSpc>
+                <a:spcPct val="100000"/>
+              </a:lnSpc>
+              <a:spcBef>
+                <a:spcPts val="0"/>
+              </a:spcBef>
+              <a:spcAft>
+                <a:spcPts val="0"/>
+              </a:spcAft>
+              <a:buClrTx/>
+              <a:buSzTx/>
+              <a:buFontTx/>
+              <a:buNone/>
+              <a:tabLst/>
+              <a:defRPr/>
+            </a:pPr>
+            <a:r>
+              <a:rPr kumimoji="1" lang="en" altLang="zh-CN" dirty="0"/>
+              <a:t>From the table we can see that </a:t>
+            </a:r>
+            <a:r>
+              <a:rPr kumimoji="1" lang="en" altLang="zh-CN" dirty="0" err="1"/>
+              <a:t>MegaScale-MoE</a:t>
+            </a:r>
+            <a:r>
+              <a:rPr kumimoji="1" lang="en" altLang="zh-CN" dirty="0"/>
+              <a:t> achieves up to one point eight eight times (1.88x) speedups over Megatron-LM across all settings, enabling us to train the model over one trillion (1T) tokens on </a:t>
+            </a:r>
+            <a:r>
               <a:rPr lang="en" altLang="zh-CN" dirty="0"/>
-              <a:t> has been deployed in our production environment and is responsible for most of large-scale </a:t>
-            </a:r>
-            <a:r>
-              <a:rPr lang="en" altLang="zh-CN" dirty="0" err="1"/>
-              <a:t>MoE</a:t>
-            </a:r>
-            <a:r>
-              <a:rPr lang="en" altLang="zh-CN" dirty="0"/>
-              <a:t> training tasks.</a:t>
-            </a:r>
-          </a:p>
-          <a:p>
-            <a:r>
-              <a:rPr lang="en" altLang="zh-CN" dirty="0"/>
-              <a:t>It supports training models beyond ten thousand GPUs and run for several months. By reducing exposed communication and optimizing memory usage, </a:t>
-            </a:r>
-            <a:r>
-              <a:rPr lang="en" altLang="zh-CN" dirty="0" err="1"/>
-              <a:t>MegaScale-MoE</a:t>
-            </a:r>
-            <a:r>
-              <a:rPr lang="en" altLang="zh-CN" dirty="0"/>
-              <a:t> has saved millions of GPU hours in production.</a:t>
-            </a:r>
-          </a:p>
-          <a:p>
-            <a:r>
-              <a:rPr lang="en" altLang="zh-CN" dirty="0"/>
-              <a:t>This figure shows one real production run. It trains an </a:t>
-            </a:r>
-            <a:r>
-              <a:rPr lang="en" altLang="zh-CN" dirty="0" err="1"/>
-              <a:t>MoE</a:t>
-            </a:r>
-            <a:r>
-              <a:rPr lang="en" altLang="zh-CN" dirty="0"/>
-              <a:t> model with 200 billion parameters, and 20 billion activated parameters per token, on more than ten thousand GPUs. The training lasts for months, and the loss continues to converge stably.</a:t>
-            </a:r>
-          </a:p>
-          <a:p>
-            <a:endParaRPr lang="en" altLang="zh-CN" dirty="0"/>
-          </a:p>
-          <a:p>
-            <a:r>
-              <a:rPr lang="en" altLang="zh-CN" dirty="0"/>
-              <a:t>One lesson we learned is that </a:t>
-            </a:r>
-            <a:r>
-              <a:rPr lang="en" altLang="zh-CN" dirty="0" err="1"/>
-              <a:t>MoE</a:t>
-            </a:r>
-            <a:r>
-              <a:rPr lang="en" altLang="zh-CN" dirty="0"/>
-              <a:t> training is quite different from dense model training. In dense Transformers, performance optimization mainly focuses on attention and GEMMs. But in </a:t>
-            </a:r>
-            <a:r>
-              <a:rPr lang="en" altLang="zh-CN" dirty="0" err="1"/>
-              <a:t>MoE</a:t>
-            </a:r>
-            <a:r>
-              <a:rPr lang="en" altLang="zh-CN" dirty="0"/>
-              <a:t> models, many other components become important, including routing, communication,</a:t>
+              <a:t>one thousand four hundred and forty</a:t>
             </a:r>
             <a:r>
               <a:rPr lang="zh-CN" altLang="en-US" dirty="0"/>
               <a:t> </a:t>
             </a:r>
             <a:r>
-              <a:rPr lang="en" altLang="zh-CN" dirty="0"/>
-              <a:t>and dynamically shaped tensors. These components introduce non-trivial overhead and can become sources of stragglers.</a:t>
-            </a:r>
-          </a:p>
-          <a:p>
-            <a:endParaRPr kumimoji="1" lang="zh-CN" altLang="en-US" dirty="0"/>
+              <a:rPr lang="en-US" altLang="zh-CN" dirty="0"/>
+              <a:t>(1440)</a:t>
+            </a:r>
+            <a:r>
+              <a:rPr kumimoji="1" lang="en" altLang="zh-CN" dirty="0"/>
+              <a:t> GPUs for only eight point two (8.22) days.</a:t>
+            </a:r>
+          </a:p>
+          <a:p>
+            <a:pPr marL="0" marR="0" indent="0" algn="l" defTabSz="914400" rtl="0" eaLnBrk="1" fontAlgn="auto" latinLnBrk="0" hangingPunct="1">
+              <a:lnSpc>
+                <a:spcPct val="100000"/>
+              </a:lnSpc>
+              <a:spcBef>
+                <a:spcPts val="0"/>
+              </a:spcBef>
+              <a:spcAft>
+                <a:spcPts val="0"/>
+              </a:spcAft>
+              <a:buClrTx/>
+              <a:buSzTx/>
+              <a:buFontTx/>
+              <a:buNone/>
+              <a:tabLst/>
+              <a:defRPr/>
+            </a:pPr>
+            <a:endParaRPr kumimoji="1" lang="en" altLang="zh-CN" dirty="0"/>
+          </a:p>
+          <a:p>
+            <a:pPr marL="0" marR="0" indent="0" algn="l" defTabSz="914400" rtl="0" eaLnBrk="1" fontAlgn="auto" latinLnBrk="0" hangingPunct="1">
+              <a:lnSpc>
+                <a:spcPct val="100000"/>
+              </a:lnSpc>
+              <a:spcBef>
+                <a:spcPts val="0"/>
+              </a:spcBef>
+              <a:spcAft>
+                <a:spcPts val="0"/>
+              </a:spcAft>
+              <a:buClrTx/>
+              <a:buSzTx/>
+              <a:buFontTx/>
+              <a:buNone/>
+              <a:tabLst/>
+              <a:defRPr/>
+            </a:pPr>
+            <a:r>
+              <a:rPr kumimoji="1" lang="en" altLang="zh-CN" dirty="0"/>
+              <a:t>[13:10]</a:t>
+            </a:r>
+            <a:endParaRPr kumimoji="1" lang="en-US" altLang="zh-CN" dirty="0"/>
+          </a:p>
+          <a:p>
+            <a:pPr marL="0" marR="0" indent="0" algn="l" defTabSz="914400" rtl="0" eaLnBrk="1" fontAlgn="auto" latinLnBrk="0" hangingPunct="1">
+              <a:lnSpc>
+                <a:spcPct val="100000"/>
+              </a:lnSpc>
+              <a:spcBef>
+                <a:spcPts val="0"/>
+              </a:spcBef>
+              <a:spcAft>
+                <a:spcPts val="0"/>
+              </a:spcAft>
+              <a:buClrTx/>
+              <a:buSzTx/>
+              <a:buFontTx/>
+              <a:buNone/>
+              <a:tabLst/>
+              <a:defRPr/>
+            </a:pPr>
+            <a:endParaRPr kumimoji="1" lang="en-US" altLang="zh-CN" dirty="0"/>
           </a:p>
         </p:txBody>
       </p:sp>
@@ -2406,7 +2473,7 @@
     </p:spTree>
     <p:extLst>
       <p:ext uri="{BB962C8B-B14F-4D97-AF65-F5344CB8AC3E}">
-        <p14:creationId xmlns:p14="http://schemas.microsoft.com/office/powerpoint/2010/main" val="629932994"/>
+        <p14:creationId xmlns:p14="http://schemas.microsoft.com/office/powerpoint/2010/main" val="3190736564"/>
       </p:ext>
     </p:extLst>
   </p:cSld>
@@ -2600,6 +2667,288 @@
           <a:bodyPr/>
           <a:lstStyle/>
           <a:p>
+            <a:r>
+              <a:rPr lang="en" altLang="zh-CN" dirty="0"/>
+              <a:t>To better understand where the performance improvement comes from, we further break down the iteration time on different GPU platforms, including H800, A100, and H20. </a:t>
+            </a:r>
+          </a:p>
+          <a:p>
+            <a:r>
+              <a:rPr lang="en" altLang="zh-CN" dirty="0"/>
+              <a:t>The left subfigure shows the iteration time breakdown. Here, exposed communication means the communication time that is not hidden by computation. </a:t>
+            </a:r>
+            <a:r>
+              <a:rPr lang="en" altLang="zh-CN" dirty="0" err="1"/>
+              <a:t>FlashAttention</a:t>
+            </a:r>
+            <a:r>
+              <a:rPr lang="en" altLang="zh-CN" dirty="0"/>
+              <a:t> and GEMMs are the major computation kernels counted in Model FLOPs Utilization, or MFU. We can see that </a:t>
+            </a:r>
+            <a:r>
+              <a:rPr lang="en" altLang="zh-CN" dirty="0" err="1"/>
+              <a:t>MegaScale-MoE</a:t>
+            </a:r>
+            <a:r>
+              <a:rPr lang="en" altLang="zh-CN" dirty="0"/>
+              <a:t> significantly reduces the exposed communication time across different GPUs. </a:t>
+            </a:r>
+          </a:p>
+          <a:p>
+            <a:endParaRPr kumimoji="1" lang="en" altLang="zh-CN" dirty="0"/>
+          </a:p>
+          <a:p>
+            <a:r>
+              <a:rPr kumimoji="1" lang="en" altLang="zh-CN" dirty="0"/>
+              <a:t>[13:40]</a:t>
+            </a:r>
+            <a:endParaRPr kumimoji="1" lang="zh-CN" altLang="en-US" dirty="0"/>
+          </a:p>
+        </p:txBody>
+      </p:sp>
+      <p:sp>
+        <p:nvSpPr>
+          <p:cNvPr id="4" name="灯片编号占位符 3"/>
+          <p:cNvSpPr>
+            <a:spLocks noGrp="1"/>
+          </p:cNvSpPr>
+          <p:nvPr>
+            <p:ph type="sldNum" sz="quarter" idx="5"/>
+          </p:nvPr>
+        </p:nvSpPr>
+        <p:spPr/>
+        <p:txBody>
+          <a:bodyPr/>
+          <a:lstStyle/>
+          <a:p>
+            <a:fld id="{BF4A37DF-3F3B-E649-8A1A-F4B332B15B36}" type="slidenum">
+              <a:rPr kumimoji="1" lang="zh-CN" altLang="en-US" smtClean="0"/>
+              <a:t>20</a:t>
+            </a:fld>
+            <a:endParaRPr kumimoji="1" lang="zh-CN" altLang="en-US"/>
+          </a:p>
+        </p:txBody>
+      </p:sp>
+    </p:spTree>
+    <p:extLst>
+      <p:ext uri="{BB962C8B-B14F-4D97-AF65-F5344CB8AC3E}">
+        <p14:creationId xmlns:p14="http://schemas.microsoft.com/office/powerpoint/2010/main" val="2834790993"/>
+      </p:ext>
+    </p:extLst>
+  </p:cSld>
+  <p:clrMapOvr>
+    <a:masterClrMapping/>
+  </p:clrMapOvr>
+</p:notes>
+</file>
+
+<file path=ppt/notesSlides/notesSlide21.xml><?xml version="1.0" encoding="utf-8"?>
+<p:notes xmlns:a="http://schemas.openxmlformats.org/drawingml/2006/main" xmlns:r="http://schemas.openxmlformats.org/officeDocument/2006/relationships" xmlns:p="http://schemas.openxmlformats.org/presentationml/2006/main">
+  <p:cSld>
+    <p:spTree>
+      <p:nvGrpSpPr>
+        <p:cNvPr id="1" name=""/>
+        <p:cNvGrpSpPr/>
+        <p:nvPr/>
+      </p:nvGrpSpPr>
+      <p:grpSpPr>
+        <a:xfrm>
+          <a:off x="0" y="0"/>
+          <a:ext cx="0" cy="0"/>
+          <a:chOff x="0" y="0"/>
+          <a:chExt cx="0" cy="0"/>
+        </a:xfrm>
+      </p:grpSpPr>
+      <p:sp>
+        <p:nvSpPr>
+          <p:cNvPr id="2" name="幻灯片图像占位符 1"/>
+          <p:cNvSpPr>
+            <a:spLocks noGrp="1" noRot="1" noChangeAspect="1"/>
+          </p:cNvSpPr>
+          <p:nvPr>
+            <p:ph type="sldImg"/>
+          </p:nvPr>
+        </p:nvSpPr>
+        <p:spPr/>
+      </p:sp>
+      <p:sp>
+        <p:nvSpPr>
+          <p:cNvPr id="3" name="备注占位符 2"/>
+          <p:cNvSpPr>
+            <a:spLocks noGrp="1"/>
+          </p:cNvSpPr>
+          <p:nvPr>
+            <p:ph type="body" idx="1"/>
+          </p:nvPr>
+        </p:nvSpPr>
+        <p:spPr/>
+        <p:txBody>
+          <a:bodyPr/>
+          <a:lstStyle/>
+          <a:p>
+            <a:r>
+              <a:rPr lang="en" altLang="zh-CN" dirty="0" err="1"/>
+              <a:t>MegaScale-MoE</a:t>
+            </a:r>
+            <a:r>
+              <a:rPr lang="en" altLang="zh-CN" dirty="0"/>
+              <a:t> has been deployed in our production environment and is responsible for most of large-scale </a:t>
+            </a:r>
+            <a:r>
+              <a:rPr lang="en" altLang="zh-CN" dirty="0" err="1"/>
+              <a:t>MoE</a:t>
+            </a:r>
+            <a:r>
+              <a:rPr lang="en" altLang="zh-CN" dirty="0"/>
+              <a:t> training tasks.</a:t>
+            </a:r>
+          </a:p>
+          <a:p>
+            <a:r>
+              <a:rPr lang="en" altLang="zh-CN" dirty="0"/>
+              <a:t>It supports training models beyond ten thousand GPUs and run for several months. By reducing exposed communication and optimizing memory usage, </a:t>
+            </a:r>
+            <a:r>
+              <a:rPr lang="en" altLang="zh-CN" dirty="0" err="1"/>
+              <a:t>MegaScale-MoE</a:t>
+            </a:r>
+            <a:r>
+              <a:rPr lang="en" altLang="zh-CN" dirty="0"/>
+              <a:t> has saved millions of GPU hours in production.</a:t>
+            </a:r>
+          </a:p>
+          <a:p>
+            <a:r>
+              <a:rPr lang="en" altLang="zh-CN" dirty="0"/>
+              <a:t>This figure shows one real production run. It trains an </a:t>
+            </a:r>
+            <a:r>
+              <a:rPr lang="en" altLang="zh-CN" dirty="0" err="1"/>
+              <a:t>MoE</a:t>
+            </a:r>
+            <a:r>
+              <a:rPr lang="en" altLang="zh-CN" dirty="0"/>
+              <a:t> model with 200 billion parameters, and 20 billion activated parameters per token, on more than ten thousand GPUs. The training lasts for months, and the loss continues to converge stably.</a:t>
+            </a:r>
+          </a:p>
+          <a:p>
+            <a:endParaRPr lang="en" altLang="zh-CN" dirty="0"/>
+          </a:p>
+          <a:p>
+            <a:r>
+              <a:rPr lang="en" altLang="zh-CN" dirty="0"/>
+              <a:t>One lesson we learned is that </a:t>
+            </a:r>
+            <a:r>
+              <a:rPr lang="en" altLang="zh-CN" dirty="0" err="1"/>
+              <a:t>MoE</a:t>
+            </a:r>
+            <a:r>
+              <a:rPr lang="en" altLang="zh-CN" dirty="0"/>
+              <a:t> training is quite different from dense model training. In dense Transformers, performance optimization mainly focuses on attention and GEMMs. But in </a:t>
+            </a:r>
+            <a:r>
+              <a:rPr lang="en" altLang="zh-CN" dirty="0" err="1"/>
+              <a:t>MoE</a:t>
+            </a:r>
+            <a:r>
+              <a:rPr lang="en" altLang="zh-CN" dirty="0"/>
+              <a:t> models, many other components become important, including routing, communication,</a:t>
+            </a:r>
+            <a:r>
+              <a:rPr lang="zh-CN" altLang="en-US" dirty="0"/>
+              <a:t> </a:t>
+            </a:r>
+            <a:r>
+              <a:rPr lang="en" altLang="zh-CN" dirty="0"/>
+              <a:t>and dynamically shaped tensors. These components introduce non-trivial overhead and can become sources of stragglers.</a:t>
+            </a:r>
+          </a:p>
+          <a:p>
+            <a:endParaRPr kumimoji="1" lang="zh-CN" altLang="en-US" dirty="0"/>
+          </a:p>
+        </p:txBody>
+      </p:sp>
+      <p:sp>
+        <p:nvSpPr>
+          <p:cNvPr id="4" name="灯片编号占位符 3"/>
+          <p:cNvSpPr>
+            <a:spLocks noGrp="1"/>
+          </p:cNvSpPr>
+          <p:nvPr>
+            <p:ph type="sldNum" sz="quarter" idx="5"/>
+          </p:nvPr>
+        </p:nvSpPr>
+        <p:spPr/>
+        <p:txBody>
+          <a:bodyPr/>
+          <a:lstStyle/>
+          <a:p>
+            <a:fld id="{BF4A37DF-3F3B-E649-8A1A-F4B332B15B36}" type="slidenum">
+              <a:rPr kumimoji="1" lang="zh-CN" altLang="en-US" smtClean="0"/>
+              <a:t>21</a:t>
+            </a:fld>
+            <a:endParaRPr kumimoji="1" lang="zh-CN" altLang="en-US"/>
+          </a:p>
+        </p:txBody>
+      </p:sp>
+    </p:spTree>
+    <p:extLst>
+      <p:ext uri="{BB962C8B-B14F-4D97-AF65-F5344CB8AC3E}">
+        <p14:creationId xmlns:p14="http://schemas.microsoft.com/office/powerpoint/2010/main" val="629932994"/>
+      </p:ext>
+    </p:extLst>
+  </p:cSld>
+  <p:clrMapOvr>
+    <a:masterClrMapping/>
+  </p:clrMapOvr>
+</p:notes>
+</file>
+
+<file path=ppt/notesSlides/notesSlide22.xml><?xml version="1.0" encoding="utf-8"?>
+<p:notes xmlns:a="http://schemas.openxmlformats.org/drawingml/2006/main" xmlns:r="http://schemas.openxmlformats.org/officeDocument/2006/relationships" xmlns:p="http://schemas.openxmlformats.org/presentationml/2006/main">
+  <p:cSld>
+    <p:spTree>
+      <p:nvGrpSpPr>
+        <p:cNvPr id="1" name=""/>
+        <p:cNvGrpSpPr/>
+        <p:nvPr/>
+      </p:nvGrpSpPr>
+      <p:grpSpPr>
+        <a:xfrm>
+          <a:off x="0" y="0"/>
+          <a:ext cx="0" cy="0"/>
+          <a:chOff x="0" y="0"/>
+          <a:chExt cx="0" cy="0"/>
+        </a:xfrm>
+      </p:grpSpPr>
+      <p:sp>
+        <p:nvSpPr>
+          <p:cNvPr id="2" name="幻灯片图像占位符 1"/>
+          <p:cNvSpPr>
+            <a:spLocks noGrp="1" noRot="1" noChangeAspect="1"/>
+          </p:cNvSpPr>
+          <p:nvPr>
+            <p:ph type="sldImg"/>
+          </p:nvPr>
+        </p:nvSpPr>
+        <p:spPr/>
+      </p:sp>
+      <p:sp>
+        <p:nvSpPr>
+          <p:cNvPr id="3" name="备注占位符 2"/>
+          <p:cNvSpPr>
+            <a:spLocks noGrp="1"/>
+          </p:cNvSpPr>
+          <p:nvPr>
+            <p:ph type="body" idx="1"/>
+          </p:nvPr>
+        </p:nvSpPr>
+        <p:spPr/>
+        <p:txBody>
+          <a:bodyPr/>
+          <a:lstStyle/>
+          <a:p>
             <a:pPr marL="0" marR="0" lvl="0" indent="0" algn="l" defTabSz="914400" rtl="0" eaLnBrk="1" fontAlgn="auto" latinLnBrk="0" hangingPunct="1">
               <a:lnSpc>
                 <a:spcPct val="100000"/>
@@ -2697,7 +3046,7 @@
           <a:p>
             <a:fld id="{BF4A37DF-3F3B-E649-8A1A-F4B332B15B36}" type="slidenum">
               <a:rPr kumimoji="1" lang="zh-CN" altLang="en-US" smtClean="0"/>
-              <a:t>20</a:t>
+              <a:t>22</a:t>
             </a:fld>
             <a:endParaRPr kumimoji="1" lang="zh-CN" altLang="en-US"/>
           </a:p>
@@ -3094,6 +3443,149 @@
         <p:cNvPr id="1" name="">
           <a:extLst>
             <a:ext uri="{FF2B5EF4-FFF2-40B4-BE49-F238E27FC236}">
+              <a16:creationId xmlns:a16="http://schemas.microsoft.com/office/drawing/2014/main" id="{C25E42B7-3B48-E98B-D09F-D3272B5872D9}"/>
+            </a:ext>
+          </a:extLst>
+        </p:cNvPr>
+        <p:cNvGrpSpPr/>
+        <p:nvPr/>
+      </p:nvGrpSpPr>
+      <p:grpSpPr>
+        <a:xfrm>
+          <a:off x="0" y="0"/>
+          <a:ext cx="0" cy="0"/>
+          <a:chOff x="0" y="0"/>
+          <a:chExt cx="0" cy="0"/>
+        </a:xfrm>
+      </p:grpSpPr>
+      <p:sp>
+        <p:nvSpPr>
+          <p:cNvPr id="2" name="幻灯片图像占位符 1">
+            <a:extLst>
+              <a:ext uri="{FF2B5EF4-FFF2-40B4-BE49-F238E27FC236}">
+                <a16:creationId xmlns:a16="http://schemas.microsoft.com/office/drawing/2014/main" id="{8302B0C4-35C4-D75D-F3F2-1C7A8FC632D9}"/>
+              </a:ext>
+            </a:extLst>
+          </p:cNvPr>
+          <p:cNvSpPr>
+            <a:spLocks noGrp="1" noRot="1" noChangeAspect="1"/>
+          </p:cNvSpPr>
+          <p:nvPr>
+            <p:ph type="sldImg"/>
+          </p:nvPr>
+        </p:nvSpPr>
+        <p:spPr/>
+      </p:sp>
+      <p:sp>
+        <p:nvSpPr>
+          <p:cNvPr id="3" name="备注占位符 2">
+            <a:extLst>
+              <a:ext uri="{FF2B5EF4-FFF2-40B4-BE49-F238E27FC236}">
+                <a16:creationId xmlns:a16="http://schemas.microsoft.com/office/drawing/2014/main" id="{877CBD96-F666-15FD-D739-FD09FB147D3E}"/>
+              </a:ext>
+            </a:extLst>
+          </p:cNvPr>
+          <p:cNvSpPr>
+            <a:spLocks noGrp="1"/>
+          </p:cNvSpPr>
+          <p:nvPr>
+            <p:ph type="body" idx="1"/>
+          </p:nvPr>
+        </p:nvSpPr>
+        <p:spPr/>
+        <p:txBody>
+          <a:bodyPr/>
+          <a:lstStyle/>
+          <a:p>
+            <a:r>
+              <a:rPr lang="en" altLang="zh-CN" dirty="0"/>
+              <a:t>Second, hardware trends make the communication problem more important. GPU compute capability keeps improving rapidly, and lower-precision training such as FP8 further reduces computation time. However, communication bandwidth does not improve at the same rate. As a result, the relative cost of communication keeps increasing, and communication becomes the dominant bottleneck in large-scale </a:t>
+            </a:r>
+            <a:r>
+              <a:rPr lang="en" altLang="zh-CN" dirty="0" err="1"/>
+              <a:t>MoE</a:t>
+            </a:r>
+            <a:r>
+              <a:rPr lang="en" altLang="zh-CN" dirty="0"/>
+              <a:t> training. [click]</a:t>
+            </a:r>
+          </a:p>
+          <a:p>
+            <a:r>
+              <a:rPr lang="en" altLang="zh-CN" b="0" dirty="0"/>
+              <a:t>In our production training, this overhead is already significant: for one internal </a:t>
+            </a:r>
+            <a:r>
+              <a:rPr lang="en" altLang="zh-CN" b="0" dirty="0" err="1"/>
+              <a:t>MoE</a:t>
+            </a:r>
+            <a:r>
+              <a:rPr lang="en" altLang="zh-CN" b="0" dirty="0"/>
+              <a:t> model on NVIDIA Hopper GPUs, communication takes 43.6% of the forward pass time and 32% of the entire training time.</a:t>
+            </a:r>
+            <a:br>
+              <a:rPr lang="en" altLang="zh-CN" dirty="0"/>
+            </a:br>
+            <a:br>
+              <a:rPr lang="en" altLang="zh-CN" dirty="0"/>
+            </a:br>
+            <a:r>
+              <a:rPr lang="en" altLang="zh-CN" dirty="0"/>
+              <a:t>[3:50]</a:t>
+            </a:r>
+          </a:p>
+        </p:txBody>
+      </p:sp>
+      <p:sp>
+        <p:nvSpPr>
+          <p:cNvPr id="4" name="灯片编号占位符 3">
+            <a:extLst>
+              <a:ext uri="{FF2B5EF4-FFF2-40B4-BE49-F238E27FC236}">
+                <a16:creationId xmlns:a16="http://schemas.microsoft.com/office/drawing/2014/main" id="{D6217EFB-7AE3-F546-7158-A8EFA3C03E7D}"/>
+              </a:ext>
+            </a:extLst>
+          </p:cNvPr>
+          <p:cNvSpPr>
+            <a:spLocks noGrp="1"/>
+          </p:cNvSpPr>
+          <p:nvPr>
+            <p:ph type="sldNum" sz="quarter" idx="5"/>
+          </p:nvPr>
+        </p:nvSpPr>
+        <p:spPr/>
+        <p:txBody>
+          <a:bodyPr/>
+          <a:lstStyle/>
+          <a:p>
+            <a:fld id="{BF4A37DF-3F3B-E649-8A1A-F4B332B15B36}" type="slidenum">
+              <a:rPr kumimoji="1" lang="zh-CN" altLang="en-US" smtClean="0"/>
+              <a:t>5</a:t>
+            </a:fld>
+            <a:endParaRPr kumimoji="1" lang="zh-CN" altLang="en-US"/>
+          </a:p>
+        </p:txBody>
+      </p:sp>
+    </p:spTree>
+    <p:extLst>
+      <p:ext uri="{BB962C8B-B14F-4D97-AF65-F5344CB8AC3E}">
+        <p14:creationId xmlns:p14="http://schemas.microsoft.com/office/powerpoint/2010/main" val="1183803401"/>
+      </p:ext>
+    </p:extLst>
+  </p:cSld>
+  <p:clrMapOvr>
+    <a:masterClrMapping/>
+  </p:clrMapOvr>
+</p:notes>
+</file>
+
+<file path=ppt/notesSlides/notesSlide6.xml><?xml version="1.0" encoding="utf-8"?>
+<p:notes xmlns:a="http://schemas.openxmlformats.org/drawingml/2006/main" xmlns:r="http://schemas.openxmlformats.org/officeDocument/2006/relationships" xmlns:p="http://schemas.openxmlformats.org/presentationml/2006/main">
+  <p:cSld>
+    <p:spTree>
+      <p:nvGrpSpPr>
+        <p:cNvPr id="1" name="">
+          <a:extLst>
+            <a:ext uri="{FF2B5EF4-FFF2-40B4-BE49-F238E27FC236}">
               <a16:creationId xmlns:a16="http://schemas.microsoft.com/office/drawing/2014/main" id="{FA438477-FD7B-4B33-9EE4-13F2275EAC78}"/>
             </a:ext>
           </a:extLst>
@@ -3210,7 +3702,7 @@
           <a:p>
             <a:fld id="{BF4A37DF-3F3B-E649-8A1A-F4B332B15B36}" type="slidenum">
               <a:rPr kumimoji="1" lang="zh-CN" altLang="en-US" smtClean="0"/>
-              <a:t>5</a:t>
+              <a:t>6</a:t>
             </a:fld>
             <a:endParaRPr kumimoji="1" lang="zh-CN" altLang="en-US"/>
           </a:p>
@@ -3229,7 +3721,7 @@
 </p:notes>
 </file>
 
-<file path=ppt/notesSlides/notesSlide6.xml><?xml version="1.0" encoding="utf-8"?>
+<file path=ppt/notesSlides/notesSlide7.xml><?xml version="1.0" encoding="utf-8"?>
 <p:notes xmlns:a="http://schemas.openxmlformats.org/drawingml/2006/main" xmlns:r="http://schemas.openxmlformats.org/officeDocument/2006/relationships" xmlns:p="http://schemas.openxmlformats.org/presentationml/2006/main">
   <p:cSld>
     <p:spTree>
@@ -3415,7 +3907,7 @@
           <a:p>
             <a:fld id="{BF4A37DF-3F3B-E649-8A1A-F4B332B15B36}" type="slidenum">
               <a:rPr kumimoji="1" lang="zh-CN" altLang="en-US" smtClean="0"/>
-              <a:t>6</a:t>
+              <a:t>7</a:t>
             </a:fld>
             <a:endParaRPr kumimoji="1" lang="zh-CN" altLang="en-US"/>
           </a:p>
@@ -3434,7 +3926,7 @@
 </p:notes>
 </file>
 
-<file path=ppt/notesSlides/notesSlide7.xml><?xml version="1.0" encoding="utf-8"?>
+<file path=ppt/notesSlides/notesSlide8.xml><?xml version="1.0" encoding="utf-8"?>
 <p:notes xmlns:a="http://schemas.openxmlformats.org/drawingml/2006/main" xmlns:r="http://schemas.openxmlformats.org/officeDocument/2006/relationships" xmlns:p="http://schemas.openxmlformats.org/presentationml/2006/main">
   <p:cSld>
     <p:spTree>
@@ -3538,7 +4030,7 @@
           <a:p>
             <a:fld id="{BF4A37DF-3F3B-E649-8A1A-F4B332B15B36}" type="slidenum">
               <a:rPr kumimoji="1" lang="zh-CN" altLang="en-US" smtClean="0"/>
-              <a:t>7</a:t>
+              <a:t>8</a:t>
             </a:fld>
             <a:endParaRPr kumimoji="1" lang="zh-CN" altLang="en-US"/>
           </a:p>
@@ -3557,7 +4049,7 @@
 </p:notes>
 </file>
 
-<file path=ppt/notesSlides/notesSlide8.xml><?xml version="1.0" encoding="utf-8"?>
+<file path=ppt/notesSlides/notesSlide9.xml><?xml version="1.0" encoding="utf-8"?>
 <p:notes xmlns:a="http://schemas.openxmlformats.org/drawingml/2006/main" xmlns:r="http://schemas.openxmlformats.org/officeDocument/2006/relationships" xmlns:p="http://schemas.openxmlformats.org/presentationml/2006/main">
   <p:cSld>
     <p:spTree>
@@ -3711,7 +4203,7 @@
           <a:p>
             <a:fld id="{BF4A37DF-3F3B-E649-8A1A-F4B332B15B36}" type="slidenum">
               <a:rPr kumimoji="1" lang="zh-CN" altLang="en-US" smtClean="0"/>
-              <a:t>8</a:t>
+              <a:t>9</a:t>
             </a:fld>
             <a:endParaRPr kumimoji="1" lang="zh-CN" altLang="en-US"/>
           </a:p>
@@ -3721,181 +4213,6 @@
     <p:extLst>
       <p:ext uri="{BB962C8B-B14F-4D97-AF65-F5344CB8AC3E}">
         <p14:creationId xmlns:p14="http://schemas.microsoft.com/office/powerpoint/2010/main" val="75711949"/>
-      </p:ext>
-    </p:extLst>
-  </p:cSld>
-  <p:clrMapOvr>
-    <a:masterClrMapping/>
-  </p:clrMapOvr>
-</p:notes>
-</file>
-
-<file path=ppt/notesSlides/notesSlide9.xml><?xml version="1.0" encoding="utf-8"?>
-<p:notes xmlns:a="http://schemas.openxmlformats.org/drawingml/2006/main" xmlns:r="http://schemas.openxmlformats.org/officeDocument/2006/relationships" xmlns:p="http://schemas.openxmlformats.org/presentationml/2006/main">
-  <p:cSld>
-    <p:spTree>
-      <p:nvGrpSpPr>
-        <p:cNvPr id="1" name="">
-          <a:extLst>
-            <a:ext uri="{FF2B5EF4-FFF2-40B4-BE49-F238E27FC236}">
-              <a16:creationId xmlns:a16="http://schemas.microsoft.com/office/drawing/2014/main" id="{B82E3B9F-F8F7-1AA0-0C83-E3D2B3535CE8}"/>
-            </a:ext>
-          </a:extLst>
-        </p:cNvPr>
-        <p:cNvGrpSpPr/>
-        <p:nvPr/>
-      </p:nvGrpSpPr>
-      <p:grpSpPr>
-        <a:xfrm>
-          <a:off x="0" y="0"/>
-          <a:ext cx="0" cy="0"/>
-          <a:chOff x="0" y="0"/>
-          <a:chExt cx="0" cy="0"/>
-        </a:xfrm>
-      </p:grpSpPr>
-      <p:sp>
-        <p:nvSpPr>
-          <p:cNvPr id="2" name="幻灯片图像占位符 1">
-            <a:extLst>
-              <a:ext uri="{FF2B5EF4-FFF2-40B4-BE49-F238E27FC236}">
-                <a16:creationId xmlns:a16="http://schemas.microsoft.com/office/drawing/2014/main" id="{E455D180-1132-5EBE-F0D3-80F7921E3D74}"/>
-              </a:ext>
-            </a:extLst>
-          </p:cNvPr>
-          <p:cNvSpPr>
-            <a:spLocks noGrp="1" noRot="1" noChangeAspect="1"/>
-          </p:cNvSpPr>
-          <p:nvPr>
-            <p:ph type="sldImg"/>
-          </p:nvPr>
-        </p:nvSpPr>
-        <p:spPr/>
-      </p:sp>
-      <p:sp>
-        <p:nvSpPr>
-          <p:cNvPr id="3" name="备注占位符 2">
-            <a:extLst>
-              <a:ext uri="{FF2B5EF4-FFF2-40B4-BE49-F238E27FC236}">
-                <a16:creationId xmlns:a16="http://schemas.microsoft.com/office/drawing/2014/main" id="{99977C20-B051-2CE3-4B50-7C32E1521185}"/>
-              </a:ext>
-            </a:extLst>
-          </p:cNvPr>
-          <p:cNvSpPr>
-            <a:spLocks noGrp="1"/>
-          </p:cNvSpPr>
-          <p:nvPr>
-            <p:ph type="body" idx="1"/>
-          </p:nvPr>
-        </p:nvSpPr>
-        <p:spPr/>
-        <p:txBody>
-          <a:bodyPr/>
-          <a:lstStyle/>
-          <a:p>
-            <a:r>
-              <a:rPr lang="en" altLang="zh-CN" dirty="0"/>
-              <a:t>Let’s first look at the attention module. A common approach is tensor parallelism, which partitions all attention operators along the hidden dimension. However, TP introduces all-gather and reduce-scatter communication for the entire hidden state on the critical path.</a:t>
-            </a:r>
-            <a:r>
-              <a:rPr kumimoji="1" lang="en-US" altLang="zh-CN" dirty="0"/>
-              <a:t> </a:t>
-            </a:r>
-            <a:br>
-              <a:rPr kumimoji="1" lang="en-US" altLang="zh-CN" dirty="0"/>
-            </a:br>
-            <a:r>
-              <a:rPr lang="en" altLang="zh-CN" dirty="0" err="1"/>
-              <a:t>MegaScale-MoE</a:t>
-            </a:r>
-            <a:r>
-              <a:rPr lang="en" altLang="zh-CN" dirty="0"/>
-              <a:t> instead adopts sequence parallelism for attention. [click] The reason is closely related to grouped-query attention, or GQA, which is widely used in recent LLMs to reduce the number of key-value heads and improve attention efficiency. With GQA, the size of key and value tensors is much smaller than the query tensor. [click] Sequence parallelism takes advantage of this property: instead of communicating the whole hidden state, it mainly exchanges the query, key, and value tensors needed by attention.</a:t>
-            </a:r>
-          </a:p>
-          <a:p>
-            <a:r>
-              <a:rPr lang="en" altLang="zh-CN" dirty="0"/>
-              <a:t>As a result, compared with tensor parallelism, the communication volume is reduced by about three times in practice.</a:t>
-            </a:r>
-          </a:p>
-          <a:p>
-            <a:pPr marL="0" marR="0" lvl="0" indent="0" algn="l" defTabSz="914400" rtl="0" eaLnBrk="1" fontAlgn="auto" latinLnBrk="0" hangingPunct="1">
-              <a:lnSpc>
-                <a:spcPct val="100000"/>
-              </a:lnSpc>
-              <a:spcBef>
-                <a:spcPts val="0"/>
-              </a:spcBef>
-              <a:spcAft>
-                <a:spcPts val="0"/>
-              </a:spcAft>
-              <a:buClrTx/>
-              <a:buSzTx/>
-              <a:buFontTx/>
-              <a:buNone/>
-              <a:tabLst/>
-              <a:defRPr/>
-            </a:pPr>
-            <a:endParaRPr lang="en" altLang="zh-CN" dirty="0"/>
-          </a:p>
-          <a:p>
-            <a:pPr marL="0" marR="0" lvl="0" indent="0" algn="l" defTabSz="914400" rtl="0" eaLnBrk="1" fontAlgn="auto" latinLnBrk="0" hangingPunct="1">
-              <a:lnSpc>
-                <a:spcPct val="100000"/>
-              </a:lnSpc>
-              <a:spcBef>
-                <a:spcPts val="0"/>
-              </a:spcBef>
-              <a:spcAft>
-                <a:spcPts val="0"/>
-              </a:spcAft>
-              <a:buClrTx/>
-              <a:buSzTx/>
-              <a:buFontTx/>
-              <a:buNone/>
-              <a:tabLst/>
-              <a:defRPr/>
-            </a:pPr>
-            <a:r>
-              <a:rPr lang="en" altLang="zh-CN" dirty="0"/>
-              <a:t>[7:15]</a:t>
-            </a:r>
-          </a:p>
-        </p:txBody>
-      </p:sp>
-      <p:sp>
-        <p:nvSpPr>
-          <p:cNvPr id="4" name="灯片编号占位符 3">
-            <a:extLst>
-              <a:ext uri="{FF2B5EF4-FFF2-40B4-BE49-F238E27FC236}">
-                <a16:creationId xmlns:a16="http://schemas.microsoft.com/office/drawing/2014/main" id="{9BC88C4C-D80D-310A-C87C-950687F4E065}"/>
-              </a:ext>
-            </a:extLst>
-          </p:cNvPr>
-          <p:cNvSpPr>
-            <a:spLocks noGrp="1"/>
-          </p:cNvSpPr>
-          <p:nvPr>
-            <p:ph type="sldNum" sz="quarter" idx="5"/>
-          </p:nvPr>
-        </p:nvSpPr>
-        <p:spPr/>
-        <p:txBody>
-          <a:bodyPr/>
-          <a:lstStyle/>
-          <a:p>
-            <a:fld id="{BF4A37DF-3F3B-E649-8A1A-F4B332B15B36}" type="slidenum">
-              <a:rPr kumimoji="1" lang="zh-CN" altLang="en-US" smtClean="0"/>
-              <a:t>9</a:t>
-            </a:fld>
-            <a:endParaRPr kumimoji="1" lang="zh-CN" altLang="en-US"/>
-          </a:p>
-        </p:txBody>
-      </p:sp>
-    </p:spTree>
-    <p:extLst>
-      <p:ext uri="{BB962C8B-B14F-4D97-AF65-F5344CB8AC3E}">
-        <p14:creationId xmlns:p14="http://schemas.microsoft.com/office/powerpoint/2010/main" val="1554702800"/>
       </p:ext>
     </p:extLst>
   </p:cSld>
@@ -8151,6 +8468,1201 @@
         <p:cNvPr id="1" name="">
           <a:extLst>
             <a:ext uri="{FF2B5EF4-FFF2-40B4-BE49-F238E27FC236}">
+              <a16:creationId xmlns:a16="http://schemas.microsoft.com/office/drawing/2014/main" id="{C3C13E68-073E-5951-8D4B-C8AC07D3B47D}"/>
+            </a:ext>
+          </a:extLst>
+        </p:cNvPr>
+        <p:cNvGrpSpPr/>
+        <p:nvPr/>
+      </p:nvGrpSpPr>
+      <p:grpSpPr>
+        <a:xfrm>
+          <a:off x="0" y="0"/>
+          <a:ext cx="0" cy="0"/>
+          <a:chOff x="0" y="0"/>
+          <a:chExt cx="0" cy="0"/>
+        </a:xfrm>
+      </p:grpSpPr>
+      <p:sp>
+        <p:nvSpPr>
+          <p:cNvPr id="2" name="标题 1">
+            <a:extLst>
+              <a:ext uri="{FF2B5EF4-FFF2-40B4-BE49-F238E27FC236}">
+                <a16:creationId xmlns:a16="http://schemas.microsoft.com/office/drawing/2014/main" id="{E79D43EB-6F5A-3260-06B0-FBF948DDBE09}"/>
+              </a:ext>
+            </a:extLst>
+          </p:cNvPr>
+          <p:cNvSpPr>
+            <a:spLocks noGrp="1"/>
+          </p:cNvSpPr>
+          <p:nvPr>
+            <p:ph type="ctrTitle"/>
+          </p:nvPr>
+        </p:nvSpPr>
+        <p:spPr>
+          <a:xfrm>
+            <a:off x="149629" y="182880"/>
+            <a:ext cx="11006051" cy="650972"/>
+          </a:xfrm>
+        </p:spPr>
+        <p:txBody>
+          <a:bodyPr>
+            <a:noAutofit/>
+          </a:bodyPr>
+          <a:lstStyle/>
+          <a:p>
+            <a:pPr algn="l">
+              <a:lnSpc>
+                <a:spcPct val="130000"/>
+              </a:lnSpc>
+            </a:pPr>
+            <a:r>
+              <a:rPr lang="en-US" altLang="zh-CN" sz="3600" b="1" dirty="0">
+                <a:latin typeface="Calibri" panose="020F0502020204030204" pitchFamily="34" charset="0"/>
+                <a:ea typeface="SimHei" charset="-122"/>
+                <a:cs typeface="Calibri" panose="020F0502020204030204" pitchFamily="34" charset="0"/>
+              </a:rPr>
+              <a:t>Sequence Parallelism for Attention</a:t>
+            </a:r>
+            <a:endParaRPr lang="en" altLang="zh-CN" sz="3600" b="1" dirty="0">
+              <a:latin typeface="Calibri" panose="020F0502020204030204" pitchFamily="34" charset="0"/>
+              <a:ea typeface="SimHei" charset="-122"/>
+              <a:cs typeface="Calibri" panose="020F0502020204030204" pitchFamily="34" charset="0"/>
+            </a:endParaRPr>
+          </a:p>
+        </p:txBody>
+      </p:sp>
+      <p:sp>
+        <p:nvSpPr>
+          <p:cNvPr id="7" name="灯片编号占位符 6">
+            <a:extLst>
+              <a:ext uri="{FF2B5EF4-FFF2-40B4-BE49-F238E27FC236}">
+                <a16:creationId xmlns:a16="http://schemas.microsoft.com/office/drawing/2014/main" id="{D1EA0651-6C47-7C5C-254D-7540209B9A8A}"/>
+              </a:ext>
+            </a:extLst>
+          </p:cNvPr>
+          <p:cNvSpPr>
+            <a:spLocks noGrp="1"/>
+          </p:cNvSpPr>
+          <p:nvPr>
+            <p:ph type="sldNum" sz="quarter" idx="12"/>
+          </p:nvPr>
+        </p:nvSpPr>
+        <p:spPr/>
+        <p:txBody>
+          <a:bodyPr/>
+          <a:lstStyle/>
+          <a:p>
+            <a:fld id="{24910F54-69FC-A944-93E9-EFB57972FC5C}" type="slidenum">
+              <a:rPr kumimoji="1" lang="zh-CN" altLang="en-US" smtClean="0"/>
+              <a:t>10</a:t>
+            </a:fld>
+            <a:endParaRPr kumimoji="1" lang="zh-CN" altLang="en-US" dirty="0"/>
+          </a:p>
+        </p:txBody>
+      </p:sp>
+      <p:pic>
+        <p:nvPicPr>
+          <p:cNvPr id="5" name="图片 4">
+            <a:extLst>
+              <a:ext uri="{FF2B5EF4-FFF2-40B4-BE49-F238E27FC236}">
+                <a16:creationId xmlns:a16="http://schemas.microsoft.com/office/drawing/2014/main" id="{00F345E9-7C08-DFD4-F6FC-BD9D5B219A7D}"/>
+              </a:ext>
+            </a:extLst>
+          </p:cNvPr>
+          <p:cNvPicPr>
+            <a:picLocks noChangeAspect="1"/>
+          </p:cNvPicPr>
+          <p:nvPr/>
+        </p:nvPicPr>
+        <p:blipFill>
+          <a:blip r:embed="rId3"/>
+          <a:srcRect r="67164"/>
+          <a:stretch>
+            <a:fillRect/>
+          </a:stretch>
+        </p:blipFill>
+        <p:spPr>
+          <a:xfrm>
+            <a:off x="392182" y="971335"/>
+            <a:ext cx="2500647" cy="4634333"/>
+          </a:xfrm>
+          <a:prstGeom prst="rect">
+            <a:avLst/>
+          </a:prstGeom>
+        </p:spPr>
+      </p:pic>
+      <p:pic>
+        <p:nvPicPr>
+          <p:cNvPr id="8" name="图片 7">
+            <a:extLst>
+              <a:ext uri="{FF2B5EF4-FFF2-40B4-BE49-F238E27FC236}">
+                <a16:creationId xmlns:a16="http://schemas.microsoft.com/office/drawing/2014/main" id="{AF4FE24E-CA8C-B218-AE2E-2EB237769EA9}"/>
+              </a:ext>
+            </a:extLst>
+          </p:cNvPr>
+          <p:cNvPicPr>
+            <a:picLocks noChangeAspect="1"/>
+          </p:cNvPicPr>
+          <p:nvPr/>
+        </p:nvPicPr>
+        <p:blipFill>
+          <a:blip r:embed="rId4"/>
+          <a:srcRect l="29214" t="74712" r="51334" b="8469"/>
+          <a:stretch>
+            <a:fillRect/>
+          </a:stretch>
+        </p:blipFill>
+        <p:spPr>
+          <a:xfrm>
+            <a:off x="667550" y="5737088"/>
+            <a:ext cx="1781930" cy="849085"/>
+          </a:xfrm>
+          <a:prstGeom prst="rect">
+            <a:avLst/>
+          </a:prstGeom>
+        </p:spPr>
+      </p:pic>
+      <p:pic>
+        <p:nvPicPr>
+          <p:cNvPr id="10" name="图片 9">
+            <a:extLst>
+              <a:ext uri="{FF2B5EF4-FFF2-40B4-BE49-F238E27FC236}">
+                <a16:creationId xmlns:a16="http://schemas.microsoft.com/office/drawing/2014/main" id="{E08ACDC6-CE99-B56E-5DA1-FCC4326BA8E1}"/>
+              </a:ext>
+            </a:extLst>
+          </p:cNvPr>
+          <p:cNvPicPr>
+            <a:picLocks noChangeAspect="1"/>
+          </p:cNvPicPr>
+          <p:nvPr/>
+        </p:nvPicPr>
+        <p:blipFill>
+          <a:blip r:embed="rId4"/>
+          <a:srcRect l="51435" t="81585" r="30892"/>
+          <a:stretch>
+            <a:fillRect/>
+          </a:stretch>
+        </p:blipFill>
+        <p:spPr>
+          <a:xfrm>
+            <a:off x="9046603" y="5731301"/>
+            <a:ext cx="1618942" cy="929670"/>
+          </a:xfrm>
+          <a:prstGeom prst="rect">
+            <a:avLst/>
+          </a:prstGeom>
+        </p:spPr>
+      </p:pic>
+      <p:pic>
+        <p:nvPicPr>
+          <p:cNvPr id="12" name="图片 11">
+            <a:extLst>
+              <a:ext uri="{FF2B5EF4-FFF2-40B4-BE49-F238E27FC236}">
+                <a16:creationId xmlns:a16="http://schemas.microsoft.com/office/drawing/2014/main" id="{45BC695A-5C9F-1FA1-B0A4-2CF93F51C680}"/>
+              </a:ext>
+            </a:extLst>
+          </p:cNvPr>
+          <p:cNvPicPr>
+            <a:picLocks noChangeAspect="1"/>
+          </p:cNvPicPr>
+          <p:nvPr/>
+        </p:nvPicPr>
+        <p:blipFill>
+          <a:blip r:embed="rId3"/>
+          <a:srcRect l="33357" r="33285"/>
+          <a:stretch>
+            <a:fillRect/>
+          </a:stretch>
+        </p:blipFill>
+        <p:spPr>
+          <a:xfrm>
+            <a:off x="8610600" y="965410"/>
+            <a:ext cx="2540385" cy="4634333"/>
+          </a:xfrm>
+          <a:prstGeom prst="rect">
+            <a:avLst/>
+          </a:prstGeom>
+        </p:spPr>
+      </p:pic>
+      <p:pic>
+        <p:nvPicPr>
+          <p:cNvPr id="14" name="图片 13">
+            <a:extLst>
+              <a:ext uri="{FF2B5EF4-FFF2-40B4-BE49-F238E27FC236}">
+                <a16:creationId xmlns:a16="http://schemas.microsoft.com/office/drawing/2014/main" id="{D4353A2B-C458-5E1E-6348-1D507DA45BEE}"/>
+              </a:ext>
+            </a:extLst>
+          </p:cNvPr>
+          <p:cNvPicPr>
+            <a:picLocks noChangeAspect="1"/>
+          </p:cNvPicPr>
+          <p:nvPr/>
+        </p:nvPicPr>
+        <p:blipFill>
+          <a:blip r:embed="rId5"/>
+          <a:stretch>
+            <a:fillRect/>
+          </a:stretch>
+        </p:blipFill>
+        <p:spPr>
+          <a:xfrm>
+            <a:off x="4105029" y="2194169"/>
+            <a:ext cx="3269208" cy="2094101"/>
+          </a:xfrm>
+          <a:prstGeom prst="rect">
+            <a:avLst/>
+          </a:prstGeom>
+        </p:spPr>
+      </p:pic>
+      <p:sp>
+        <p:nvSpPr>
+          <p:cNvPr id="15" name="标题 1">
+            <a:extLst>
+              <a:ext uri="{FF2B5EF4-FFF2-40B4-BE49-F238E27FC236}">
+                <a16:creationId xmlns:a16="http://schemas.microsoft.com/office/drawing/2014/main" id="{3F5EED58-1D79-A01A-4364-747C9B46ED5F}"/>
+              </a:ext>
+            </a:extLst>
+          </p:cNvPr>
+          <p:cNvSpPr txBox="1">
+            <a:spLocks/>
+          </p:cNvSpPr>
+          <p:nvPr/>
+        </p:nvSpPr>
+        <p:spPr>
+          <a:xfrm>
+            <a:off x="3612081" y="1604902"/>
+            <a:ext cx="4255103" cy="461750"/>
+          </a:xfrm>
+          <a:prstGeom prst="rect">
+            <a:avLst/>
+          </a:prstGeom>
+        </p:spPr>
+        <p:txBody>
+          <a:bodyPr vert="horz" lIns="91440" tIns="45720" rIns="91440" bIns="45720" rtlCol="0" anchor="b">
+            <a:noAutofit/>
+          </a:bodyPr>
+          <a:lstStyle>
+            <a:lvl1pPr algn="ctr" defTabSz="914400" rtl="0" eaLnBrk="1" latinLnBrk="0" hangingPunct="1">
+              <a:lnSpc>
+                <a:spcPct val="90000"/>
+              </a:lnSpc>
+              <a:spcBef>
+                <a:spcPct val="0"/>
+              </a:spcBef>
+              <a:buNone/>
+              <a:defRPr sz="6000" kern="1200">
+                <a:solidFill>
+                  <a:schemeClr val="tx1"/>
+                </a:solidFill>
+                <a:latin typeface="+mj-lt"/>
+                <a:ea typeface="+mj-ea"/>
+                <a:cs typeface="+mj-cs"/>
+              </a:defRPr>
+            </a:lvl1pPr>
+          </a:lstStyle>
+          <a:p>
+            <a:pPr algn="l">
+              <a:lnSpc>
+                <a:spcPct val="130000"/>
+              </a:lnSpc>
+            </a:pPr>
+            <a:r>
+              <a:rPr lang="en-US" altLang="zh-CN" sz="2400" b="1" dirty="0">
+                <a:latin typeface="Calibri" panose="020F0502020204030204" pitchFamily="34" charset="0"/>
+                <a:ea typeface="SimHei" charset="-122"/>
+                <a:cs typeface="Calibri" panose="020F0502020204030204" pitchFamily="34" charset="0"/>
+              </a:rPr>
+              <a:t>Grouped-Query Attention (GQA)</a:t>
+            </a:r>
+            <a:endParaRPr lang="en" altLang="zh-CN" sz="2400" b="1" dirty="0">
+              <a:latin typeface="Calibri" panose="020F0502020204030204" pitchFamily="34" charset="0"/>
+              <a:ea typeface="SimHei" charset="-122"/>
+              <a:cs typeface="Calibri" panose="020F0502020204030204" pitchFamily="34" charset="0"/>
+            </a:endParaRPr>
+          </a:p>
+        </p:txBody>
+      </p:sp>
+      <p:sp>
+        <p:nvSpPr>
+          <p:cNvPr id="16" name="右箭头 15">
+            <a:extLst>
+              <a:ext uri="{FF2B5EF4-FFF2-40B4-BE49-F238E27FC236}">
+                <a16:creationId xmlns:a16="http://schemas.microsoft.com/office/drawing/2014/main" id="{34EC9712-F1A1-2A25-ABCA-8CA20A057C93}"/>
+              </a:ext>
+            </a:extLst>
+          </p:cNvPr>
+          <p:cNvSpPr/>
+          <p:nvPr/>
+        </p:nvSpPr>
+        <p:spPr>
+          <a:xfrm>
+            <a:off x="2892829" y="3053443"/>
+            <a:ext cx="921855" cy="375557"/>
+          </a:xfrm>
+          <a:prstGeom prst="rightArrow">
+            <a:avLst/>
+          </a:prstGeom>
+          <a:solidFill>
+            <a:schemeClr val="accent2">
+              <a:lumMod val="60000"/>
+              <a:lumOff val="40000"/>
+            </a:schemeClr>
+          </a:solidFill>
+          <a:ln>
+            <a:solidFill>
+              <a:schemeClr val="accent2">
+                <a:lumMod val="60000"/>
+                <a:lumOff val="40000"/>
+              </a:schemeClr>
+            </a:solidFill>
+          </a:ln>
+        </p:spPr>
+        <p:style>
+          <a:lnRef idx="2">
+            <a:schemeClr val="accent1">
+              <a:shade val="15000"/>
+            </a:schemeClr>
+          </a:lnRef>
+          <a:fillRef idx="1">
+            <a:schemeClr val="accent1"/>
+          </a:fillRef>
+          <a:effectRef idx="0">
+            <a:schemeClr val="accent1"/>
+          </a:effectRef>
+          <a:fontRef idx="minor">
+            <a:schemeClr val="lt1"/>
+          </a:fontRef>
+        </p:style>
+        <p:txBody>
+          <a:bodyPr rtlCol="0" anchor="ctr"/>
+          <a:lstStyle/>
+          <a:p>
+            <a:pPr algn="ctr"/>
+            <a:endParaRPr kumimoji="1" lang="zh-CN" altLang="en-US"/>
+          </a:p>
+        </p:txBody>
+      </p:sp>
+      <p:sp>
+        <p:nvSpPr>
+          <p:cNvPr id="17" name="右箭头 16">
+            <a:extLst>
+              <a:ext uri="{FF2B5EF4-FFF2-40B4-BE49-F238E27FC236}">
+                <a16:creationId xmlns:a16="http://schemas.microsoft.com/office/drawing/2014/main" id="{2445222F-9AA7-0012-3AB3-C5F9723E5F0E}"/>
+              </a:ext>
+            </a:extLst>
+          </p:cNvPr>
+          <p:cNvSpPr/>
+          <p:nvPr/>
+        </p:nvSpPr>
+        <p:spPr>
+          <a:xfrm>
+            <a:off x="7664582" y="3053443"/>
+            <a:ext cx="957592" cy="375557"/>
+          </a:xfrm>
+          <a:prstGeom prst="rightArrow">
+            <a:avLst/>
+          </a:prstGeom>
+          <a:solidFill>
+            <a:schemeClr val="accent2">
+              <a:lumMod val="60000"/>
+              <a:lumOff val="40000"/>
+            </a:schemeClr>
+          </a:solidFill>
+          <a:ln>
+            <a:solidFill>
+              <a:schemeClr val="accent2">
+                <a:lumMod val="60000"/>
+                <a:lumOff val="40000"/>
+              </a:schemeClr>
+            </a:solidFill>
+          </a:ln>
+        </p:spPr>
+        <p:style>
+          <a:lnRef idx="2">
+            <a:schemeClr val="accent1">
+              <a:shade val="15000"/>
+            </a:schemeClr>
+          </a:lnRef>
+          <a:fillRef idx="1">
+            <a:schemeClr val="accent1"/>
+          </a:fillRef>
+          <a:effectRef idx="0">
+            <a:schemeClr val="accent1"/>
+          </a:effectRef>
+          <a:fontRef idx="minor">
+            <a:schemeClr val="lt1"/>
+          </a:fontRef>
+        </p:style>
+        <p:txBody>
+          <a:bodyPr rtlCol="0" anchor="ctr"/>
+          <a:lstStyle/>
+          <a:p>
+            <a:pPr algn="ctr"/>
+            <a:endParaRPr kumimoji="1" lang="zh-CN" altLang="en-US"/>
+          </a:p>
+        </p:txBody>
+      </p:sp>
+      <p:pic>
+        <p:nvPicPr>
+          <p:cNvPr id="4" name="图片 3">
+            <a:extLst>
+              <a:ext uri="{FF2B5EF4-FFF2-40B4-BE49-F238E27FC236}">
+                <a16:creationId xmlns:a16="http://schemas.microsoft.com/office/drawing/2014/main" id="{FEE863A9-5AA1-E770-42A6-7589C2396EA8}"/>
+              </a:ext>
+            </a:extLst>
+          </p:cNvPr>
+          <p:cNvPicPr>
+            <a:picLocks noChangeAspect="1"/>
+          </p:cNvPicPr>
+          <p:nvPr/>
+        </p:nvPicPr>
+        <p:blipFill>
+          <a:blip r:embed="rId6"/>
+          <a:stretch>
+            <a:fillRect/>
+          </a:stretch>
+        </p:blipFill>
+        <p:spPr>
+          <a:xfrm>
+            <a:off x="9433687" y="331968"/>
+            <a:ext cx="2743200" cy="387856"/>
+          </a:xfrm>
+          <a:prstGeom prst="rect">
+            <a:avLst/>
+          </a:prstGeom>
+        </p:spPr>
+      </p:pic>
+      <p:pic>
+        <p:nvPicPr>
+          <p:cNvPr id="9" name="图片 8">
+            <a:extLst>
+              <a:ext uri="{FF2B5EF4-FFF2-40B4-BE49-F238E27FC236}">
+                <a16:creationId xmlns:a16="http://schemas.microsoft.com/office/drawing/2014/main" id="{7C3CC6A3-B987-40BB-70D4-212D84F1A9C9}"/>
+              </a:ext>
+            </a:extLst>
+          </p:cNvPr>
+          <p:cNvPicPr>
+            <a:picLocks noChangeAspect="1"/>
+          </p:cNvPicPr>
+          <p:nvPr/>
+        </p:nvPicPr>
+        <p:blipFill>
+          <a:blip r:embed="rId7" cstate="print">
+            <a:extLst>
+              <a:ext uri="{28A0092B-C50C-407E-A947-70E740481C1C}">
+                <a14:useLocalDpi xmlns:a14="http://schemas.microsoft.com/office/drawing/2010/main" val="0"/>
+              </a:ext>
+            </a:extLst>
+          </a:blip>
+          <a:stretch>
+            <a:fillRect/>
+          </a:stretch>
+        </p:blipFill>
+        <p:spPr>
+          <a:xfrm>
+            <a:off x="7927450" y="335419"/>
+            <a:ext cx="1366300" cy="384405"/>
+          </a:xfrm>
+          <a:prstGeom prst="rect">
+            <a:avLst/>
+          </a:prstGeom>
+        </p:spPr>
+      </p:pic>
+    </p:spTree>
+    <p:extLst>
+      <p:ext uri="{BB962C8B-B14F-4D97-AF65-F5344CB8AC3E}">
+        <p14:creationId xmlns:p14="http://schemas.microsoft.com/office/powerpoint/2010/main" val="1152347291"/>
+      </p:ext>
+    </p:extLst>
+  </p:cSld>
+  <p:clrMapOvr>
+    <a:masterClrMapping/>
+  </p:clrMapOvr>
+  <p:timing>
+    <p:tnLst>
+      <p:par>
+        <p:cTn id="1" dur="indefinite" restart="never" nodeType="tmRoot">
+          <p:childTnLst>
+            <p:seq concurrent="1" nextAc="seek">
+              <p:cTn id="2" dur="indefinite" nodeType="mainSeq">
+                <p:childTnLst>
+                  <p:par>
+                    <p:cTn id="3" fill="hold">
+                      <p:stCondLst>
+                        <p:cond delay="indefinite"/>
+                      </p:stCondLst>
+                      <p:childTnLst>
+                        <p:par>
+                          <p:cTn id="4" fill="hold">
+                            <p:stCondLst>
+                              <p:cond delay="0"/>
+                            </p:stCondLst>
+                            <p:childTnLst>
+                              <p:par>
+                                <p:cTn id="5" presetID="3" presetClass="entr" presetSubtype="10" fill="hold" grpId="0" nodeType="clickEffect">
+                                  <p:stCondLst>
+                                    <p:cond delay="0"/>
+                                  </p:stCondLst>
+                                  <p:childTnLst>
+                                    <p:set>
+                                      <p:cBhvr>
+                                        <p:cTn id="6" dur="1" fill="hold">
+                                          <p:stCondLst>
+                                            <p:cond delay="0"/>
+                                          </p:stCondLst>
+                                        </p:cTn>
+                                        <p:tgtEl>
+                                          <p:spTgt spid="16"/>
+                                        </p:tgtEl>
+                                        <p:attrNameLst>
+                                          <p:attrName>style.visibility</p:attrName>
+                                        </p:attrNameLst>
+                                      </p:cBhvr>
+                                      <p:to>
+                                        <p:strVal val="visible"/>
+                                      </p:to>
+                                    </p:set>
+                                    <p:animEffect transition="in" filter="blinds(horizontal)">
+                                      <p:cBhvr>
+                                        <p:cTn id="7" dur="500"/>
+                                        <p:tgtEl>
+                                          <p:spTgt spid="16"/>
+                                        </p:tgtEl>
+                                      </p:cBhvr>
+                                    </p:animEffect>
+                                  </p:childTnLst>
+                                </p:cTn>
+                              </p:par>
+                              <p:par>
+                                <p:cTn id="8" presetID="3" presetClass="entr" presetSubtype="10" fill="hold" nodeType="withEffect">
+                                  <p:stCondLst>
+                                    <p:cond delay="0"/>
+                                  </p:stCondLst>
+                                  <p:childTnLst>
+                                    <p:set>
+                                      <p:cBhvr>
+                                        <p:cTn id="9" dur="1" fill="hold">
+                                          <p:stCondLst>
+                                            <p:cond delay="0"/>
+                                          </p:stCondLst>
+                                        </p:cTn>
+                                        <p:tgtEl>
+                                          <p:spTgt spid="14"/>
+                                        </p:tgtEl>
+                                        <p:attrNameLst>
+                                          <p:attrName>style.visibility</p:attrName>
+                                        </p:attrNameLst>
+                                      </p:cBhvr>
+                                      <p:to>
+                                        <p:strVal val="visible"/>
+                                      </p:to>
+                                    </p:set>
+                                    <p:animEffect transition="in" filter="blinds(horizontal)">
+                                      <p:cBhvr>
+                                        <p:cTn id="10" dur="500"/>
+                                        <p:tgtEl>
+                                          <p:spTgt spid="14"/>
+                                        </p:tgtEl>
+                                      </p:cBhvr>
+                                    </p:animEffect>
+                                  </p:childTnLst>
+                                </p:cTn>
+                              </p:par>
+                              <p:par>
+                                <p:cTn id="11" presetID="3" presetClass="entr" presetSubtype="10" fill="hold" grpId="0" nodeType="withEffect">
+                                  <p:stCondLst>
+                                    <p:cond delay="0"/>
+                                  </p:stCondLst>
+                                  <p:childTnLst>
+                                    <p:set>
+                                      <p:cBhvr>
+                                        <p:cTn id="12" dur="1" fill="hold">
+                                          <p:stCondLst>
+                                            <p:cond delay="0"/>
+                                          </p:stCondLst>
+                                        </p:cTn>
+                                        <p:tgtEl>
+                                          <p:spTgt spid="15"/>
+                                        </p:tgtEl>
+                                        <p:attrNameLst>
+                                          <p:attrName>style.visibility</p:attrName>
+                                        </p:attrNameLst>
+                                      </p:cBhvr>
+                                      <p:to>
+                                        <p:strVal val="visible"/>
+                                      </p:to>
+                                    </p:set>
+                                    <p:animEffect transition="in" filter="blinds(horizontal)">
+                                      <p:cBhvr>
+                                        <p:cTn id="13" dur="500"/>
+                                        <p:tgtEl>
+                                          <p:spTgt spid="15"/>
+                                        </p:tgtEl>
+                                      </p:cBhvr>
+                                    </p:animEffect>
+                                  </p:childTnLst>
+                                </p:cTn>
+                              </p:par>
+                            </p:childTnLst>
+                          </p:cTn>
+                        </p:par>
+                      </p:childTnLst>
+                    </p:cTn>
+                  </p:par>
+                  <p:par>
+                    <p:cTn id="14" fill="hold">
+                      <p:stCondLst>
+                        <p:cond delay="indefinite"/>
+                      </p:stCondLst>
+                      <p:childTnLst>
+                        <p:par>
+                          <p:cTn id="15" fill="hold">
+                            <p:stCondLst>
+                              <p:cond delay="0"/>
+                            </p:stCondLst>
+                            <p:childTnLst>
+                              <p:par>
+                                <p:cTn id="16" presetID="3" presetClass="entr" presetSubtype="10" fill="hold" grpId="0" nodeType="clickEffect">
+                                  <p:stCondLst>
+                                    <p:cond delay="0"/>
+                                  </p:stCondLst>
+                                  <p:childTnLst>
+                                    <p:set>
+                                      <p:cBhvr>
+                                        <p:cTn id="17" dur="1" fill="hold">
+                                          <p:stCondLst>
+                                            <p:cond delay="0"/>
+                                          </p:stCondLst>
+                                        </p:cTn>
+                                        <p:tgtEl>
+                                          <p:spTgt spid="17"/>
+                                        </p:tgtEl>
+                                        <p:attrNameLst>
+                                          <p:attrName>style.visibility</p:attrName>
+                                        </p:attrNameLst>
+                                      </p:cBhvr>
+                                      <p:to>
+                                        <p:strVal val="visible"/>
+                                      </p:to>
+                                    </p:set>
+                                    <p:animEffect transition="in" filter="blinds(horizontal)">
+                                      <p:cBhvr>
+                                        <p:cTn id="18" dur="500"/>
+                                        <p:tgtEl>
+                                          <p:spTgt spid="17"/>
+                                        </p:tgtEl>
+                                      </p:cBhvr>
+                                    </p:animEffect>
+                                  </p:childTnLst>
+                                </p:cTn>
+                              </p:par>
+                              <p:par>
+                                <p:cTn id="19" presetID="3" presetClass="entr" presetSubtype="10" fill="hold" nodeType="withEffect">
+                                  <p:stCondLst>
+                                    <p:cond delay="0"/>
+                                  </p:stCondLst>
+                                  <p:childTnLst>
+                                    <p:set>
+                                      <p:cBhvr>
+                                        <p:cTn id="20" dur="1" fill="hold">
+                                          <p:stCondLst>
+                                            <p:cond delay="0"/>
+                                          </p:stCondLst>
+                                        </p:cTn>
+                                        <p:tgtEl>
+                                          <p:spTgt spid="12"/>
+                                        </p:tgtEl>
+                                        <p:attrNameLst>
+                                          <p:attrName>style.visibility</p:attrName>
+                                        </p:attrNameLst>
+                                      </p:cBhvr>
+                                      <p:to>
+                                        <p:strVal val="visible"/>
+                                      </p:to>
+                                    </p:set>
+                                    <p:animEffect transition="in" filter="blinds(horizontal)">
+                                      <p:cBhvr>
+                                        <p:cTn id="21" dur="500"/>
+                                        <p:tgtEl>
+                                          <p:spTgt spid="12"/>
+                                        </p:tgtEl>
+                                      </p:cBhvr>
+                                    </p:animEffect>
+                                  </p:childTnLst>
+                                </p:cTn>
+                              </p:par>
+                              <p:par>
+                                <p:cTn id="22" presetID="3" presetClass="entr" presetSubtype="10" fill="hold" nodeType="withEffect">
+                                  <p:stCondLst>
+                                    <p:cond delay="0"/>
+                                  </p:stCondLst>
+                                  <p:childTnLst>
+                                    <p:set>
+                                      <p:cBhvr>
+                                        <p:cTn id="23" dur="1" fill="hold">
+                                          <p:stCondLst>
+                                            <p:cond delay="0"/>
+                                          </p:stCondLst>
+                                        </p:cTn>
+                                        <p:tgtEl>
+                                          <p:spTgt spid="10"/>
+                                        </p:tgtEl>
+                                        <p:attrNameLst>
+                                          <p:attrName>style.visibility</p:attrName>
+                                        </p:attrNameLst>
+                                      </p:cBhvr>
+                                      <p:to>
+                                        <p:strVal val="visible"/>
+                                      </p:to>
+                                    </p:set>
+                                    <p:animEffect transition="in" filter="blinds(horizontal)">
+                                      <p:cBhvr>
+                                        <p:cTn id="24" dur="500"/>
+                                        <p:tgtEl>
+                                          <p:spTgt spid="10"/>
+                                        </p:tgtEl>
+                                      </p:cBhvr>
+                                    </p:animEffect>
+                                  </p:childTnLst>
+                                </p:cTn>
+                              </p:par>
+                            </p:childTnLst>
+                          </p:cTn>
+                        </p:par>
+                      </p:childTnLst>
+                    </p:cTn>
+                  </p:par>
+                </p:childTnLst>
+              </p:cTn>
+              <p:prevCondLst>
+                <p:cond evt="onPrev" delay="0">
+                  <p:tgtEl>
+                    <p:sldTgt/>
+                  </p:tgtEl>
+                </p:cond>
+              </p:prevCondLst>
+              <p:nextCondLst>
+                <p:cond evt="onNext" delay="0">
+                  <p:tgtEl>
+                    <p:sldTgt/>
+                  </p:tgtEl>
+                </p:cond>
+              </p:nextCondLst>
+            </p:seq>
+          </p:childTnLst>
+        </p:cTn>
+      </p:par>
+    </p:tnLst>
+    <p:bldLst>
+      <p:bldP spid="15" grpId="0"/>
+      <p:bldP spid="16" grpId="0" animBg="1"/>
+      <p:bldP spid="17" grpId="0" animBg="1"/>
+    </p:bldLst>
+  </p:timing>
+</p:sld>
+</file>
+
+<file path=ppt/slides/slide11.xml><?xml version="1.0" encoding="utf-8"?>
+<p:sld xmlns:a="http://schemas.openxmlformats.org/drawingml/2006/main" xmlns:r="http://schemas.openxmlformats.org/officeDocument/2006/relationships" xmlns:p="http://schemas.openxmlformats.org/presentationml/2006/main">
+  <p:cSld>
+    <p:spTree>
+      <p:nvGrpSpPr>
+        <p:cNvPr id="1" name="">
+          <a:extLst>
+            <a:ext uri="{FF2B5EF4-FFF2-40B4-BE49-F238E27FC236}">
+              <a16:creationId xmlns:a16="http://schemas.microsoft.com/office/drawing/2014/main" id="{E134973D-22A8-68F2-63D9-1A11531BCAA9}"/>
+            </a:ext>
+          </a:extLst>
+        </p:cNvPr>
+        <p:cNvGrpSpPr/>
+        <p:nvPr/>
+      </p:nvGrpSpPr>
+      <p:grpSpPr>
+        <a:xfrm>
+          <a:off x="0" y="0"/>
+          <a:ext cx="0" cy="0"/>
+          <a:chOff x="0" y="0"/>
+          <a:chExt cx="0" cy="0"/>
+        </a:xfrm>
+      </p:grpSpPr>
+      <p:sp>
+        <p:nvSpPr>
+          <p:cNvPr id="2" name="标题 1">
+            <a:extLst>
+              <a:ext uri="{FF2B5EF4-FFF2-40B4-BE49-F238E27FC236}">
+                <a16:creationId xmlns:a16="http://schemas.microsoft.com/office/drawing/2014/main" id="{C750EA39-1D00-F1AA-3E5E-F022053B0071}"/>
+              </a:ext>
+            </a:extLst>
+          </p:cNvPr>
+          <p:cNvSpPr>
+            <a:spLocks noGrp="1"/>
+          </p:cNvSpPr>
+          <p:nvPr>
+            <p:ph type="ctrTitle"/>
+          </p:nvPr>
+        </p:nvSpPr>
+        <p:spPr>
+          <a:xfrm>
+            <a:off x="149629" y="182880"/>
+            <a:ext cx="11006051" cy="650972"/>
+          </a:xfrm>
+        </p:spPr>
+        <p:txBody>
+          <a:bodyPr>
+            <a:noAutofit/>
+          </a:bodyPr>
+          <a:lstStyle/>
+          <a:p>
+            <a:pPr algn="l">
+              <a:lnSpc>
+                <a:spcPct val="130000"/>
+              </a:lnSpc>
+            </a:pPr>
+            <a:r>
+              <a:rPr lang="en-US" altLang="zh-CN" sz="3600" b="1" dirty="0">
+                <a:latin typeface="Calibri" panose="020F0502020204030204" pitchFamily="34" charset="0"/>
+                <a:ea typeface="SimHei" charset="-122"/>
+                <a:cs typeface="Calibri" panose="020F0502020204030204" pitchFamily="34" charset="0"/>
+              </a:rPr>
+              <a:t>Expert Parallelism for FFNs</a:t>
+            </a:r>
+            <a:endParaRPr lang="en" altLang="zh-CN" sz="3600" b="1" dirty="0">
+              <a:latin typeface="Calibri" panose="020F0502020204030204" pitchFamily="34" charset="0"/>
+              <a:ea typeface="SimHei" charset="-122"/>
+              <a:cs typeface="Calibri" panose="020F0502020204030204" pitchFamily="34" charset="0"/>
+            </a:endParaRPr>
+          </a:p>
+        </p:txBody>
+      </p:sp>
+      <p:sp>
+        <p:nvSpPr>
+          <p:cNvPr id="7" name="灯片编号占位符 6">
+            <a:extLst>
+              <a:ext uri="{FF2B5EF4-FFF2-40B4-BE49-F238E27FC236}">
+                <a16:creationId xmlns:a16="http://schemas.microsoft.com/office/drawing/2014/main" id="{9193F30B-6157-BEC9-19CA-3D8EA5D8C354}"/>
+              </a:ext>
+            </a:extLst>
+          </p:cNvPr>
+          <p:cNvSpPr>
+            <a:spLocks noGrp="1"/>
+          </p:cNvSpPr>
+          <p:nvPr>
+            <p:ph type="sldNum" sz="quarter" idx="12"/>
+          </p:nvPr>
+        </p:nvSpPr>
+        <p:spPr/>
+        <p:txBody>
+          <a:bodyPr/>
+          <a:lstStyle/>
+          <a:p>
+            <a:fld id="{24910F54-69FC-A944-93E9-EFB57972FC5C}" type="slidenum">
+              <a:rPr kumimoji="1" lang="zh-CN" altLang="en-US" smtClean="0"/>
+              <a:t>11</a:t>
+            </a:fld>
+            <a:endParaRPr kumimoji="1" lang="zh-CN" altLang="en-US" dirty="0"/>
+          </a:p>
+        </p:txBody>
+      </p:sp>
+      <p:pic>
+        <p:nvPicPr>
+          <p:cNvPr id="4" name="图片 3">
+            <a:extLst>
+              <a:ext uri="{FF2B5EF4-FFF2-40B4-BE49-F238E27FC236}">
+                <a16:creationId xmlns:a16="http://schemas.microsoft.com/office/drawing/2014/main" id="{D67A08AC-A62D-6B43-96FD-46383D442F30}"/>
+              </a:ext>
+            </a:extLst>
+          </p:cNvPr>
+          <p:cNvPicPr>
+            <a:picLocks noChangeAspect="1"/>
+          </p:cNvPicPr>
+          <p:nvPr/>
+        </p:nvPicPr>
+        <p:blipFill>
+          <a:blip r:embed="rId3"/>
+          <a:srcRect b="54656"/>
+          <a:stretch>
+            <a:fillRect/>
+          </a:stretch>
+        </p:blipFill>
+        <p:spPr>
+          <a:xfrm>
+            <a:off x="1474906" y="2560994"/>
+            <a:ext cx="8355495" cy="1084522"/>
+          </a:xfrm>
+          <a:prstGeom prst="rect">
+            <a:avLst/>
+          </a:prstGeom>
+        </p:spPr>
+      </p:pic>
+      <p:sp>
+        <p:nvSpPr>
+          <p:cNvPr id="9" name="文本框 8">
+            <a:extLst>
+              <a:ext uri="{FF2B5EF4-FFF2-40B4-BE49-F238E27FC236}">
+                <a16:creationId xmlns:a16="http://schemas.microsoft.com/office/drawing/2014/main" id="{7E543E23-6B71-7538-1A8B-48DAA21A6FAC}"/>
+              </a:ext>
+            </a:extLst>
+          </p:cNvPr>
+          <p:cNvSpPr txBox="1"/>
+          <p:nvPr/>
+        </p:nvSpPr>
+        <p:spPr>
+          <a:xfrm>
+            <a:off x="255937" y="1110669"/>
+            <a:ext cx="11680125" cy="523220"/>
+          </a:xfrm>
+          <a:prstGeom prst="rect">
+            <a:avLst/>
+          </a:prstGeom>
+          <a:noFill/>
+        </p:spPr>
+        <p:txBody>
+          <a:bodyPr wrap="square">
+            <a:spAutoFit/>
+          </a:bodyPr>
+          <a:lstStyle/>
+          <a:p>
+            <a:r>
+              <a:rPr lang="en-US" altLang="zh-CN" sz="2800" dirty="0">
+                <a:latin typeface="Calibri" panose="020F0502020204030204" pitchFamily="34" charset="0"/>
+                <a:cs typeface="Calibri" panose="020F0502020204030204" pitchFamily="34" charset="0"/>
+              </a:rPr>
+              <a:t>Communication volume: </a:t>
+            </a:r>
+            <a:r>
+              <a:rPr lang="en-US" altLang="zh-CN" sz="2400" dirty="0">
+                <a:latin typeface="Calibri" panose="020F0502020204030204" pitchFamily="34" charset="0"/>
+                <a:cs typeface="Calibri" panose="020F0502020204030204" pitchFamily="34" charset="0"/>
+              </a:rPr>
+              <a:t>2𝑘/𝑛×𝑏𝑠</a:t>
+            </a:r>
+            <a:r>
+              <a:rPr lang="en-US" altLang="zh-CN" sz="2400" dirty="0" err="1">
+                <a:latin typeface="Calibri" panose="020F0502020204030204" pitchFamily="34" charset="0"/>
+                <a:cs typeface="Calibri" panose="020F0502020204030204" pitchFamily="34" charset="0"/>
+              </a:rPr>
+              <a:t>ℎ</a:t>
+            </a:r>
+            <a:r>
+              <a:rPr lang="en-US" altLang="zh-CN" sz="2400" dirty="0">
+                <a:latin typeface="Calibri" panose="020F0502020204030204" pitchFamily="34" charset="0"/>
+                <a:cs typeface="Calibri" panose="020F0502020204030204" pitchFamily="34" charset="0"/>
+              </a:rPr>
+              <a:t>(𝑛−1)/𝑛 </a:t>
+            </a:r>
+            <a:r>
+              <a:rPr lang="en-US" altLang="zh-CN" sz="2800" dirty="0">
+                <a:latin typeface="Calibri" panose="020F0502020204030204" pitchFamily="34" charset="0"/>
+                <a:cs typeface="Calibri" panose="020F0502020204030204" pitchFamily="34" charset="0"/>
+              </a:rPr>
+              <a:t>for EP vs.</a:t>
+            </a:r>
+            <a:r>
+              <a:rPr lang="en-US" altLang="zh-CN" sz="2400" dirty="0">
+                <a:latin typeface="Calibri" panose="020F0502020204030204" pitchFamily="34" charset="0"/>
+                <a:cs typeface="Calibri" panose="020F0502020204030204" pitchFamily="34" charset="0"/>
+              </a:rPr>
+              <a:t> 2𝑏𝑠</a:t>
+            </a:r>
+            <a:r>
+              <a:rPr lang="en-US" altLang="zh-CN" sz="2400" dirty="0" err="1">
+                <a:latin typeface="Calibri" panose="020F0502020204030204" pitchFamily="34" charset="0"/>
+                <a:cs typeface="Calibri" panose="020F0502020204030204" pitchFamily="34" charset="0"/>
+              </a:rPr>
+              <a:t>ℎ</a:t>
+            </a:r>
+            <a:r>
+              <a:rPr lang="en-US" altLang="zh-CN" sz="2400" dirty="0">
+                <a:latin typeface="Calibri" panose="020F0502020204030204" pitchFamily="34" charset="0"/>
+                <a:cs typeface="Calibri" panose="020F0502020204030204" pitchFamily="34" charset="0"/>
+              </a:rPr>
+              <a:t>(𝑛−1)/𝑛 </a:t>
+            </a:r>
+            <a:r>
+              <a:rPr lang="en-US" altLang="zh-CN" sz="2800" dirty="0">
+                <a:latin typeface="Calibri" panose="020F0502020204030204" pitchFamily="34" charset="0"/>
+                <a:cs typeface="Calibri" panose="020F0502020204030204" pitchFamily="34" charset="0"/>
+              </a:rPr>
+              <a:t>for TP</a:t>
+            </a:r>
+            <a:endParaRPr lang="en-US" altLang="zh-CN" dirty="0">
+              <a:latin typeface="Calibri" panose="020F0502020204030204" pitchFamily="34" charset="0"/>
+              <a:cs typeface="Calibri" panose="020F0502020204030204" pitchFamily="34" charset="0"/>
+            </a:endParaRPr>
+          </a:p>
+        </p:txBody>
+      </p:sp>
+      <p:pic>
+        <p:nvPicPr>
+          <p:cNvPr id="5" name="图片 4">
+            <a:extLst>
+              <a:ext uri="{FF2B5EF4-FFF2-40B4-BE49-F238E27FC236}">
+                <a16:creationId xmlns:a16="http://schemas.microsoft.com/office/drawing/2014/main" id="{ACA0031E-A7FD-3F69-3C95-2CEBA84A0CAB}"/>
+              </a:ext>
+            </a:extLst>
+          </p:cNvPr>
+          <p:cNvPicPr>
+            <a:picLocks noChangeAspect="1"/>
+          </p:cNvPicPr>
+          <p:nvPr/>
+        </p:nvPicPr>
+        <p:blipFill>
+          <a:blip r:embed="rId4"/>
+          <a:stretch>
+            <a:fillRect/>
+          </a:stretch>
+        </p:blipFill>
+        <p:spPr>
+          <a:xfrm>
+            <a:off x="9433687" y="331968"/>
+            <a:ext cx="2743200" cy="387856"/>
+          </a:xfrm>
+          <a:prstGeom prst="rect">
+            <a:avLst/>
+          </a:prstGeom>
+        </p:spPr>
+      </p:pic>
+      <p:pic>
+        <p:nvPicPr>
+          <p:cNvPr id="8" name="图片 7">
+            <a:extLst>
+              <a:ext uri="{FF2B5EF4-FFF2-40B4-BE49-F238E27FC236}">
+                <a16:creationId xmlns:a16="http://schemas.microsoft.com/office/drawing/2014/main" id="{6353EBC0-A805-22D1-3DAD-37D7AC673413}"/>
+              </a:ext>
+            </a:extLst>
+          </p:cNvPr>
+          <p:cNvPicPr>
+            <a:picLocks noChangeAspect="1"/>
+          </p:cNvPicPr>
+          <p:nvPr/>
+        </p:nvPicPr>
+        <p:blipFill>
+          <a:blip r:embed="rId5" cstate="print">
+            <a:extLst>
+              <a:ext uri="{28A0092B-C50C-407E-A947-70E740481C1C}">
+                <a14:useLocalDpi xmlns:a14="http://schemas.microsoft.com/office/drawing/2010/main" val="0"/>
+              </a:ext>
+            </a:extLst>
+          </a:blip>
+          <a:stretch>
+            <a:fillRect/>
+          </a:stretch>
+        </p:blipFill>
+        <p:spPr>
+          <a:xfrm>
+            <a:off x="7927450" y="335419"/>
+            <a:ext cx="1366300" cy="384405"/>
+          </a:xfrm>
+          <a:prstGeom prst="rect">
+            <a:avLst/>
+          </a:prstGeom>
+        </p:spPr>
+      </p:pic>
+    </p:spTree>
+    <p:extLst>
+      <p:ext uri="{BB962C8B-B14F-4D97-AF65-F5344CB8AC3E}">
+        <p14:creationId xmlns:p14="http://schemas.microsoft.com/office/powerpoint/2010/main" val="810201867"/>
+      </p:ext>
+    </p:extLst>
+  </p:cSld>
+  <p:clrMapOvr>
+    <a:masterClrMapping/>
+  </p:clrMapOvr>
+  <p:timing>
+    <p:tnLst>
+      <p:par>
+        <p:cTn id="1" dur="indefinite" restart="never" nodeType="tmRoot">
+          <p:childTnLst>
+            <p:seq concurrent="1" nextAc="seek">
+              <p:cTn id="2" dur="indefinite" nodeType="mainSeq">
+                <p:childTnLst>
+                  <p:par>
+                    <p:cTn id="3" fill="hold">
+                      <p:stCondLst>
+                        <p:cond delay="indefinite"/>
+                      </p:stCondLst>
+                      <p:childTnLst>
+                        <p:par>
+                          <p:cTn id="4" fill="hold">
+                            <p:stCondLst>
+                              <p:cond delay="0"/>
+                            </p:stCondLst>
+                            <p:childTnLst>
+                              <p:par>
+                                <p:cTn id="5" presetID="3" presetClass="entr" presetSubtype="10" fill="hold" nodeType="clickEffect">
+                                  <p:stCondLst>
+                                    <p:cond delay="0"/>
+                                  </p:stCondLst>
+                                  <p:childTnLst>
+                                    <p:set>
+                                      <p:cBhvr>
+                                        <p:cTn id="6" dur="1" fill="hold">
+                                          <p:stCondLst>
+                                            <p:cond delay="0"/>
+                                          </p:stCondLst>
+                                        </p:cTn>
+                                        <p:tgtEl>
+                                          <p:spTgt spid="4"/>
+                                        </p:tgtEl>
+                                        <p:attrNameLst>
+                                          <p:attrName>style.visibility</p:attrName>
+                                        </p:attrNameLst>
+                                      </p:cBhvr>
+                                      <p:to>
+                                        <p:strVal val="visible"/>
+                                      </p:to>
+                                    </p:set>
+                                    <p:animEffect transition="in" filter="blinds(horizontal)">
+                                      <p:cBhvr>
+                                        <p:cTn id="7" dur="500"/>
+                                        <p:tgtEl>
+                                          <p:spTgt spid="4"/>
+                                        </p:tgtEl>
+                                      </p:cBhvr>
+                                    </p:animEffect>
+                                  </p:childTnLst>
+                                </p:cTn>
+                              </p:par>
+                            </p:childTnLst>
+                          </p:cTn>
+                        </p:par>
+                      </p:childTnLst>
+                    </p:cTn>
+                  </p:par>
+                </p:childTnLst>
+              </p:cTn>
+              <p:prevCondLst>
+                <p:cond evt="onPrev" delay="0">
+                  <p:tgtEl>
+                    <p:sldTgt/>
+                  </p:tgtEl>
+                </p:cond>
+              </p:prevCondLst>
+              <p:nextCondLst>
+                <p:cond evt="onNext" delay="0">
+                  <p:tgtEl>
+                    <p:sldTgt/>
+                  </p:tgtEl>
+                </p:cond>
+              </p:nextCondLst>
+            </p:seq>
+          </p:childTnLst>
+        </p:cTn>
+      </p:par>
+    </p:tnLst>
+  </p:timing>
+</p:sld>
+</file>
+
+<file path=ppt/slides/slide12.xml><?xml version="1.0" encoding="utf-8"?>
+<p:sld xmlns:a="http://schemas.openxmlformats.org/drawingml/2006/main" xmlns:r="http://schemas.openxmlformats.org/officeDocument/2006/relationships" xmlns:p="http://schemas.openxmlformats.org/presentationml/2006/main">
+  <p:cSld>
+    <p:spTree>
+      <p:nvGrpSpPr>
+        <p:cNvPr id="1" name="">
+          <a:extLst>
+            <a:ext uri="{FF2B5EF4-FFF2-40B4-BE49-F238E27FC236}">
               <a16:creationId xmlns:a16="http://schemas.microsoft.com/office/drawing/2014/main" id="{852723D5-CDF8-80CC-1DC7-DFF7376BEA5F}"/>
             </a:ext>
           </a:extLst>
@@ -8238,7 +9750,7 @@
           <a:p>
             <a:fld id="{24910F54-69FC-A944-93E9-EFB57972FC5C}" type="slidenum">
               <a:rPr kumimoji="1" lang="zh-CN" altLang="en-US" smtClean="0"/>
-              <a:t>10</a:t>
+              <a:t>12</a:t>
             </a:fld>
             <a:endParaRPr kumimoji="1" lang="zh-CN" altLang="en-US" dirty="0"/>
           </a:p>
@@ -8702,7 +10214,7 @@
 </p:sld>
 </file>
 
-<file path=ppt/slides/slide11.xml><?xml version="1.0" encoding="utf-8"?>
+<file path=ppt/slides/slide13.xml><?xml version="1.0" encoding="utf-8"?>
 <p:sld xmlns:a="http://schemas.openxmlformats.org/drawingml/2006/main" xmlns:r="http://schemas.openxmlformats.org/officeDocument/2006/relationships" xmlns:p="http://schemas.openxmlformats.org/presentationml/2006/main">
   <p:cSld>
     <p:spTree>
@@ -8805,7 +10317,7 @@
           <a:p>
             <a:fld id="{24910F54-69FC-A944-93E9-EFB57972FC5C}" type="slidenum">
               <a:rPr kumimoji="1" lang="zh-CN" altLang="en-US" smtClean="0"/>
-              <a:t>11</a:t>
+              <a:t>13</a:t>
             </a:fld>
             <a:endParaRPr kumimoji="1" lang="zh-CN" altLang="en-US" dirty="0"/>
           </a:p>
@@ -9184,7 +10696,7 @@
 </p:sld>
 </file>
 
-<file path=ppt/slides/slide12.xml><?xml version="1.0" encoding="utf-8"?>
+<file path=ppt/slides/slide14.xml><?xml version="1.0" encoding="utf-8"?>
 <p:sld xmlns:a="http://schemas.openxmlformats.org/drawingml/2006/main" xmlns:r="http://schemas.openxmlformats.org/officeDocument/2006/relationships" xmlns:p="http://schemas.openxmlformats.org/presentationml/2006/main">
   <p:cSld>
     <p:spTree>
@@ -9230,7 +10742,7 @@
           <a:p>
             <a:fld id="{24910F54-69FC-A944-93E9-EFB57972FC5C}" type="slidenum">
               <a:rPr kumimoji="1" lang="zh-CN" altLang="en-US" smtClean="0"/>
-              <a:t>12</a:t>
+              <a:t>14</a:t>
             </a:fld>
             <a:endParaRPr kumimoji="1" lang="zh-CN" altLang="en-US" dirty="0"/>
           </a:p>
@@ -10608,7 +12120,7 @@
 </p:sld>
 </file>
 
-<file path=ppt/slides/slide13.xml><?xml version="1.0" encoding="utf-8"?>
+<file path=ppt/slides/slide15.xml><?xml version="1.0" encoding="utf-8"?>
 <p:sld xmlns:a="http://schemas.openxmlformats.org/drawingml/2006/main" xmlns:r="http://schemas.openxmlformats.org/officeDocument/2006/relationships" xmlns:p="http://schemas.openxmlformats.org/presentationml/2006/main">
   <p:cSld>
     <p:spTree>
@@ -10654,7 +12166,7 @@
           <a:p>
             <a:fld id="{24910F54-69FC-A944-93E9-EFB57972FC5C}" type="slidenum">
               <a:rPr kumimoji="1" lang="zh-CN" altLang="en-US" smtClean="0"/>
-              <a:t>13</a:t>
+              <a:t>15</a:t>
             </a:fld>
             <a:endParaRPr kumimoji="1" lang="zh-CN" altLang="en-US" dirty="0"/>
           </a:p>
@@ -11061,7 +12573,7 @@
 </p:sld>
 </file>
 
-<file path=ppt/slides/slide14.xml><?xml version="1.0" encoding="utf-8"?>
+<file path=ppt/slides/slide16.xml><?xml version="1.0" encoding="utf-8"?>
 <p:sld xmlns:a="http://schemas.openxmlformats.org/drawingml/2006/main" xmlns:r="http://schemas.openxmlformats.org/officeDocument/2006/relationships" xmlns:p="http://schemas.openxmlformats.org/presentationml/2006/main">
   <p:cSld>
     <p:spTree>
@@ -11107,7 +12619,7 @@
           <a:p>
             <a:fld id="{24910F54-69FC-A944-93E9-EFB57972FC5C}" type="slidenum">
               <a:rPr kumimoji="1" lang="zh-CN" altLang="en-US" smtClean="0"/>
-              <a:t>14</a:t>
+              <a:t>16</a:t>
             </a:fld>
             <a:endParaRPr kumimoji="1" lang="zh-CN" altLang="en-US" dirty="0"/>
           </a:p>
@@ -11498,7 +13010,7 @@
 </p:sld>
 </file>
 
-<file path=ppt/slides/slide15.xml><?xml version="1.0" encoding="utf-8"?>
+<file path=ppt/slides/slide17.xml><?xml version="1.0" encoding="utf-8"?>
 <p:sld xmlns:a="http://schemas.openxmlformats.org/drawingml/2006/main" xmlns:r="http://schemas.openxmlformats.org/officeDocument/2006/relationships" xmlns:p="http://schemas.openxmlformats.org/presentationml/2006/main">
   <p:cSld>
     <p:spTree>
@@ -11601,7 +13113,7 @@
           <a:p>
             <a:fld id="{24910F54-69FC-A944-93E9-EFB57972FC5C}" type="slidenum">
               <a:rPr kumimoji="1" lang="zh-CN" altLang="en-US" smtClean="0"/>
-              <a:t>15</a:t>
+              <a:t>17</a:t>
             </a:fld>
             <a:endParaRPr kumimoji="1" lang="zh-CN" altLang="en-US" dirty="0"/>
           </a:p>
@@ -11980,7 +13492,7 @@
 </p:sld>
 </file>
 
-<file path=ppt/slides/slide16.xml><?xml version="1.0" encoding="utf-8"?>
+<file path=ppt/slides/slide18.xml><?xml version="1.0" encoding="utf-8"?>
 <p:sld xmlns:a="http://schemas.openxmlformats.org/drawingml/2006/main" xmlns:r="http://schemas.openxmlformats.org/officeDocument/2006/relationships" xmlns:p="http://schemas.openxmlformats.org/presentationml/2006/main">
   <p:cSld>
     <p:spTree>
@@ -12075,7 +13587,7 @@
           <a:p>
             <a:fld id="{24910F54-69FC-A944-93E9-EFB57972FC5C}" type="slidenum">
               <a:rPr kumimoji="1" lang="zh-CN" altLang="en-US" smtClean="0"/>
-              <a:t>16</a:t>
+              <a:t>18</a:t>
             </a:fld>
             <a:endParaRPr kumimoji="1" lang="zh-CN" altLang="en-US" dirty="0"/>
           </a:p>
@@ -12287,7 +13799,7 @@
 </p:sld>
 </file>
 
-<file path=ppt/slides/slide17.xml><?xml version="1.0" encoding="utf-8"?>
+<file path=ppt/slides/slide19.xml><?xml version="1.0" encoding="utf-8"?>
 <p:sld xmlns:a="http://schemas.openxmlformats.org/drawingml/2006/main" xmlns:r="http://schemas.openxmlformats.org/officeDocument/2006/relationships" xmlns:p="http://schemas.openxmlformats.org/presentationml/2006/main">
   <p:cSld>
     <p:spTree>
@@ -12382,7 +13894,7 @@
           <a:p>
             <a:fld id="{24910F54-69FC-A944-93E9-EFB57972FC5C}" type="slidenum">
               <a:rPr kumimoji="1" lang="zh-CN" altLang="en-US" smtClean="0"/>
-              <a:t>17</a:t>
+              <a:t>19</a:t>
             </a:fld>
             <a:endParaRPr kumimoji="1" lang="zh-CN" altLang="en-US" dirty="0"/>
           </a:p>
@@ -12609,691 +14121,6 @@
     <p:extLst>
       <p:ext uri="{BB962C8B-B14F-4D97-AF65-F5344CB8AC3E}">
         <p14:creationId xmlns:p14="http://schemas.microsoft.com/office/powerpoint/2010/main" val="406009183"/>
-      </p:ext>
-    </p:extLst>
-  </p:cSld>
-  <p:clrMapOvr>
-    <a:masterClrMapping/>
-  </p:clrMapOvr>
-</p:sld>
-</file>
-
-<file path=ppt/slides/slide18.xml><?xml version="1.0" encoding="utf-8"?>
-<p:sld xmlns:a="http://schemas.openxmlformats.org/drawingml/2006/main" xmlns:r="http://schemas.openxmlformats.org/officeDocument/2006/relationships" xmlns:p="http://schemas.openxmlformats.org/presentationml/2006/main">
-  <p:cSld>
-    <p:spTree>
-      <p:nvGrpSpPr>
-        <p:cNvPr id="1" name="">
-          <a:extLst>
-            <a:ext uri="{FF2B5EF4-FFF2-40B4-BE49-F238E27FC236}">
-              <a16:creationId xmlns:a16="http://schemas.microsoft.com/office/drawing/2014/main" id="{5821C5CC-6653-FB41-EB48-13DFFC47FF01}"/>
-            </a:ext>
-          </a:extLst>
-        </p:cNvPr>
-        <p:cNvGrpSpPr/>
-        <p:nvPr/>
-      </p:nvGrpSpPr>
-      <p:grpSpPr>
-        <a:xfrm>
-          <a:off x="0" y="0"/>
-          <a:ext cx="0" cy="0"/>
-          <a:chOff x="0" y="0"/>
-          <a:chExt cx="0" cy="0"/>
-        </a:xfrm>
-      </p:grpSpPr>
-      <p:sp>
-        <p:nvSpPr>
-          <p:cNvPr id="2" name="标题 1">
-            <a:extLst>
-              <a:ext uri="{FF2B5EF4-FFF2-40B4-BE49-F238E27FC236}">
-                <a16:creationId xmlns:a16="http://schemas.microsoft.com/office/drawing/2014/main" id="{C66DAFB4-AB93-2730-C8F8-C7D5C623B005}"/>
-              </a:ext>
-            </a:extLst>
-          </p:cNvPr>
-          <p:cNvSpPr>
-            <a:spLocks noGrp="1"/>
-          </p:cNvSpPr>
-          <p:nvPr>
-            <p:ph type="ctrTitle"/>
-          </p:nvPr>
-        </p:nvSpPr>
-        <p:spPr>
-          <a:xfrm>
-            <a:off x="149629" y="182880"/>
-            <a:ext cx="11006051" cy="650972"/>
-          </a:xfrm>
-        </p:spPr>
-        <p:txBody>
-          <a:bodyPr>
-            <a:noAutofit/>
-          </a:bodyPr>
-          <a:lstStyle/>
-          <a:p>
-            <a:pPr algn="l">
-              <a:lnSpc>
-                <a:spcPct val="130000"/>
-              </a:lnSpc>
-            </a:pPr>
-            <a:r>
-              <a:rPr lang="en-US" altLang="zh-CN" sz="3600" b="1" dirty="0">
-                <a:latin typeface="Calibri" panose="020F0502020204030204" pitchFamily="34" charset="0"/>
-                <a:ea typeface="SimHei" charset="-122"/>
-                <a:cs typeface="Calibri" panose="020F0502020204030204" pitchFamily="34" charset="0"/>
-              </a:rPr>
-              <a:t>Performance breakdown</a:t>
-            </a:r>
-            <a:endParaRPr lang="en" altLang="zh-CN" sz="3600" b="1" dirty="0">
-              <a:latin typeface="Calibri" panose="020F0502020204030204" pitchFamily="34" charset="0"/>
-              <a:ea typeface="SimHei" charset="-122"/>
-              <a:cs typeface="Calibri" panose="020F0502020204030204" pitchFamily="34" charset="0"/>
-            </a:endParaRPr>
-          </a:p>
-        </p:txBody>
-      </p:sp>
-      <p:sp>
-        <p:nvSpPr>
-          <p:cNvPr id="7" name="灯片编号占位符 6">
-            <a:extLst>
-              <a:ext uri="{FF2B5EF4-FFF2-40B4-BE49-F238E27FC236}">
-                <a16:creationId xmlns:a16="http://schemas.microsoft.com/office/drawing/2014/main" id="{1DB04374-9C03-7460-7B6F-B620C346453B}"/>
-              </a:ext>
-            </a:extLst>
-          </p:cNvPr>
-          <p:cNvSpPr>
-            <a:spLocks noGrp="1"/>
-          </p:cNvSpPr>
-          <p:nvPr>
-            <p:ph type="sldNum" sz="quarter" idx="12"/>
-          </p:nvPr>
-        </p:nvSpPr>
-        <p:spPr/>
-        <p:txBody>
-          <a:bodyPr/>
-          <a:lstStyle/>
-          <a:p>
-            <a:fld id="{24910F54-69FC-A944-93E9-EFB57972FC5C}" type="slidenum">
-              <a:rPr kumimoji="1" lang="zh-CN" altLang="en-US" smtClean="0"/>
-              <a:t>18</a:t>
-            </a:fld>
-            <a:endParaRPr kumimoji="1" lang="zh-CN" altLang="en-US" dirty="0"/>
-          </a:p>
-        </p:txBody>
-      </p:sp>
-      <p:pic>
-        <p:nvPicPr>
-          <p:cNvPr id="6" name="图片 5">
-            <a:extLst>
-              <a:ext uri="{FF2B5EF4-FFF2-40B4-BE49-F238E27FC236}">
-                <a16:creationId xmlns:a16="http://schemas.microsoft.com/office/drawing/2014/main" id="{FFC6ADAE-224F-750D-70D5-40AE9E971635}"/>
-              </a:ext>
-            </a:extLst>
-          </p:cNvPr>
-          <p:cNvPicPr>
-            <a:picLocks noChangeAspect="1"/>
-          </p:cNvPicPr>
-          <p:nvPr/>
-        </p:nvPicPr>
-        <p:blipFill>
-          <a:blip r:embed="rId3"/>
-          <a:stretch>
-            <a:fillRect/>
-          </a:stretch>
-        </p:blipFill>
-        <p:spPr>
-          <a:xfrm>
-            <a:off x="870857" y="2276048"/>
-            <a:ext cx="10450286" cy="3578135"/>
-          </a:xfrm>
-          <a:prstGeom prst="rect">
-            <a:avLst/>
-          </a:prstGeom>
-        </p:spPr>
-      </p:pic>
-      <p:sp>
-        <p:nvSpPr>
-          <p:cNvPr id="10" name="Google Shape;90;p1">
-            <a:extLst>
-              <a:ext uri="{FF2B5EF4-FFF2-40B4-BE49-F238E27FC236}">
-                <a16:creationId xmlns:a16="http://schemas.microsoft.com/office/drawing/2014/main" id="{01F1B687-27CC-F523-B1DA-500CCDD7C9D4}"/>
-              </a:ext>
-            </a:extLst>
-          </p:cNvPr>
-          <p:cNvSpPr txBox="1"/>
-          <p:nvPr/>
-        </p:nvSpPr>
-        <p:spPr>
-          <a:xfrm>
-            <a:off x="427511" y="1125461"/>
-            <a:ext cx="10450286" cy="899504"/>
-          </a:xfrm>
-          <a:prstGeom prst="rect">
-            <a:avLst/>
-          </a:prstGeom>
-          <a:noFill/>
-          <a:ln>
-            <a:noFill/>
-          </a:ln>
-        </p:spPr>
-        <p:txBody>
-          <a:bodyPr spcFirstLastPara="1" wrap="square" lIns="91425" tIns="45700" rIns="91425" bIns="45700" anchor="b" anchorCtr="0">
-            <a:noAutofit/>
-          </a:bodyPr>
-          <a:lstStyle/>
-          <a:p>
-            <a:pPr algn="ctr">
-              <a:buClr>
-                <a:schemeClr val="dk1"/>
-              </a:buClr>
-              <a:buSzPts val="2200"/>
-            </a:pPr>
-            <a:r>
-              <a:rPr lang="en-US" altLang="zh-CN" sz="2800" b="0" i="0" u="none" strike="noStrike" cap="none" dirty="0" err="1">
-                <a:solidFill>
-                  <a:schemeClr val="tx1"/>
-                </a:solidFill>
-                <a:latin typeface="Calibri" panose="020F0502020204030204" pitchFamily="34" charset="0"/>
-                <a:cs typeface="Calibri" panose="020F0502020204030204" pitchFamily="34" charset="0"/>
-                <a:sym typeface="Microsoft YaHei"/>
-              </a:rPr>
-              <a:t>MegaScale-MoE</a:t>
-            </a:r>
-            <a:r>
-              <a:rPr lang="en-US" altLang="zh-CN" sz="2800" b="0" i="0" u="none" strike="noStrike" cap="none" dirty="0">
-                <a:solidFill>
-                  <a:schemeClr val="tx1"/>
-                </a:solidFill>
-                <a:latin typeface="Calibri" panose="020F0502020204030204" pitchFamily="34" charset="0"/>
-                <a:cs typeface="Calibri" panose="020F0502020204030204" pitchFamily="34" charset="0"/>
-                <a:sym typeface="Microsoft YaHei"/>
-              </a:rPr>
-              <a:t> consistently improves MFU by </a:t>
-            </a:r>
-            <a:r>
-              <a:rPr lang="en-US" altLang="zh-CN" sz="2800" b="1" i="0" u="none" strike="noStrike" cap="none" dirty="0">
-                <a:solidFill>
-                  <a:schemeClr val="tx2">
-                    <a:lumMod val="75000"/>
-                    <a:lumOff val="25000"/>
-                  </a:schemeClr>
-                </a:solidFill>
-                <a:latin typeface="Calibri" panose="020F0502020204030204" pitchFamily="34" charset="0"/>
-                <a:cs typeface="Calibri" panose="020F0502020204030204" pitchFamily="34" charset="0"/>
-                <a:sym typeface="Microsoft YaHei"/>
-              </a:rPr>
-              <a:t>nearly eliminating exposed communication</a:t>
-            </a:r>
-            <a:r>
-              <a:rPr lang="en-US" altLang="zh-CN" sz="2800" b="0" i="0" u="none" strike="noStrike" cap="none" dirty="0">
-                <a:solidFill>
-                  <a:schemeClr val="tx1"/>
-                </a:solidFill>
-                <a:latin typeface="Calibri" panose="020F0502020204030204" pitchFamily="34" charset="0"/>
-                <a:cs typeface="Calibri" panose="020F0502020204030204" pitchFamily="34" charset="0"/>
-                <a:sym typeface="Microsoft YaHei"/>
-              </a:rPr>
-              <a:t> across </a:t>
-            </a:r>
-            <a:r>
-              <a:rPr lang="en-US" altLang="zh-CN" sz="2800" b="1" i="0" u="none" strike="noStrike" cap="none" dirty="0">
-                <a:solidFill>
-                  <a:schemeClr val="tx2">
-                    <a:lumMod val="75000"/>
-                    <a:lumOff val="25000"/>
-                  </a:schemeClr>
-                </a:solidFill>
-                <a:latin typeface="Calibri" panose="020F0502020204030204" pitchFamily="34" charset="0"/>
-                <a:cs typeface="Calibri" panose="020F0502020204030204" pitchFamily="34" charset="0"/>
-                <a:sym typeface="Microsoft YaHei"/>
-              </a:rPr>
-              <a:t>different GPU platforms</a:t>
-            </a:r>
-          </a:p>
-        </p:txBody>
-      </p:sp>
-      <p:pic>
-        <p:nvPicPr>
-          <p:cNvPr id="3" name="图片 2">
-            <a:extLst>
-              <a:ext uri="{FF2B5EF4-FFF2-40B4-BE49-F238E27FC236}">
-                <a16:creationId xmlns:a16="http://schemas.microsoft.com/office/drawing/2014/main" id="{07E7E7EF-523C-5EB0-CE34-75F45EF6C324}"/>
-              </a:ext>
-            </a:extLst>
-          </p:cNvPr>
-          <p:cNvPicPr>
-            <a:picLocks noChangeAspect="1"/>
-          </p:cNvPicPr>
-          <p:nvPr/>
-        </p:nvPicPr>
-        <p:blipFill>
-          <a:blip r:embed="rId4"/>
-          <a:stretch>
-            <a:fillRect/>
-          </a:stretch>
-        </p:blipFill>
-        <p:spPr>
-          <a:xfrm>
-            <a:off x="9433687" y="331968"/>
-            <a:ext cx="2743200" cy="387856"/>
-          </a:xfrm>
-          <a:prstGeom prst="rect">
-            <a:avLst/>
-          </a:prstGeom>
-        </p:spPr>
-      </p:pic>
-      <p:pic>
-        <p:nvPicPr>
-          <p:cNvPr id="4" name="图片 3">
-            <a:extLst>
-              <a:ext uri="{FF2B5EF4-FFF2-40B4-BE49-F238E27FC236}">
-                <a16:creationId xmlns:a16="http://schemas.microsoft.com/office/drawing/2014/main" id="{53ABBF1B-B92D-6304-B729-38AA4E219BEB}"/>
-              </a:ext>
-            </a:extLst>
-          </p:cNvPr>
-          <p:cNvPicPr>
-            <a:picLocks noChangeAspect="1"/>
-          </p:cNvPicPr>
-          <p:nvPr/>
-        </p:nvPicPr>
-        <p:blipFill>
-          <a:blip r:embed="rId5" cstate="print">
-            <a:extLst>
-              <a:ext uri="{28A0092B-C50C-407E-A947-70E740481C1C}">
-                <a14:useLocalDpi xmlns:a14="http://schemas.microsoft.com/office/drawing/2010/main" val="0"/>
-              </a:ext>
-            </a:extLst>
-          </a:blip>
-          <a:stretch>
-            <a:fillRect/>
-          </a:stretch>
-        </p:blipFill>
-        <p:spPr>
-          <a:xfrm>
-            <a:off x="7927450" y="335419"/>
-            <a:ext cx="1366300" cy="384405"/>
-          </a:xfrm>
-          <a:prstGeom prst="rect">
-            <a:avLst/>
-          </a:prstGeom>
-        </p:spPr>
-      </p:pic>
-    </p:spTree>
-    <p:extLst>
-      <p:ext uri="{BB962C8B-B14F-4D97-AF65-F5344CB8AC3E}">
-        <p14:creationId xmlns:p14="http://schemas.microsoft.com/office/powerpoint/2010/main" val="2554953368"/>
-      </p:ext>
-    </p:extLst>
-  </p:cSld>
-  <p:clrMapOvr>
-    <a:masterClrMapping/>
-  </p:clrMapOvr>
-</p:sld>
-</file>
-
-<file path=ppt/slides/slide19.xml><?xml version="1.0" encoding="utf-8"?>
-<p:sld xmlns:a="http://schemas.openxmlformats.org/drawingml/2006/main" xmlns:r="http://schemas.openxmlformats.org/officeDocument/2006/relationships" xmlns:p="http://schemas.openxmlformats.org/presentationml/2006/main">
-  <p:cSld>
-    <p:spTree>
-      <p:nvGrpSpPr>
-        <p:cNvPr id="1" name="">
-          <a:extLst>
-            <a:ext uri="{FF2B5EF4-FFF2-40B4-BE49-F238E27FC236}">
-              <a16:creationId xmlns:a16="http://schemas.microsoft.com/office/drawing/2014/main" id="{6E78D171-9002-F5B0-8670-29EC1BF68898}"/>
-            </a:ext>
-          </a:extLst>
-        </p:cNvPr>
-        <p:cNvGrpSpPr/>
-        <p:nvPr/>
-      </p:nvGrpSpPr>
-      <p:grpSpPr>
-        <a:xfrm>
-          <a:off x="0" y="0"/>
-          <a:ext cx="0" cy="0"/>
-          <a:chOff x="0" y="0"/>
-          <a:chExt cx="0" cy="0"/>
-        </a:xfrm>
-      </p:grpSpPr>
-      <p:sp>
-        <p:nvSpPr>
-          <p:cNvPr id="2" name="标题 1">
-            <a:extLst>
-              <a:ext uri="{FF2B5EF4-FFF2-40B4-BE49-F238E27FC236}">
-                <a16:creationId xmlns:a16="http://schemas.microsoft.com/office/drawing/2014/main" id="{6E5E94B3-D9AC-F245-C055-39D010446041}"/>
-              </a:ext>
-            </a:extLst>
-          </p:cNvPr>
-          <p:cNvSpPr>
-            <a:spLocks noGrp="1"/>
-          </p:cNvSpPr>
-          <p:nvPr>
-            <p:ph type="ctrTitle"/>
-          </p:nvPr>
-        </p:nvSpPr>
-        <p:spPr>
-          <a:xfrm>
-            <a:off x="149629" y="182880"/>
-            <a:ext cx="11006051" cy="650972"/>
-          </a:xfrm>
-        </p:spPr>
-        <p:txBody>
-          <a:bodyPr>
-            <a:noAutofit/>
-          </a:bodyPr>
-          <a:lstStyle/>
-          <a:p>
-            <a:pPr algn="l">
-              <a:lnSpc>
-                <a:spcPct val="130000"/>
-              </a:lnSpc>
-            </a:pPr>
-            <a:r>
-              <a:rPr lang="en-US" altLang="zh-CN" sz="3600" b="1" dirty="0">
-                <a:latin typeface="Calibri" panose="020F0502020204030204" pitchFamily="34" charset="0"/>
-                <a:ea typeface="SimHei" charset="-122"/>
-                <a:cs typeface="Calibri" panose="020F0502020204030204" pitchFamily="34" charset="0"/>
-              </a:rPr>
-              <a:t>Deployment Experience</a:t>
-            </a:r>
-            <a:endParaRPr lang="en" altLang="zh-CN" sz="3600" b="1" dirty="0">
-              <a:latin typeface="Calibri" panose="020F0502020204030204" pitchFamily="34" charset="0"/>
-              <a:ea typeface="SimHei" charset="-122"/>
-              <a:cs typeface="Calibri" panose="020F0502020204030204" pitchFamily="34" charset="0"/>
-            </a:endParaRPr>
-          </a:p>
-        </p:txBody>
-      </p:sp>
-      <p:sp>
-        <p:nvSpPr>
-          <p:cNvPr id="7" name="灯片编号占位符 6">
-            <a:extLst>
-              <a:ext uri="{FF2B5EF4-FFF2-40B4-BE49-F238E27FC236}">
-                <a16:creationId xmlns:a16="http://schemas.microsoft.com/office/drawing/2014/main" id="{805D5BA8-73D9-4B1F-1D78-2957FC25313A}"/>
-              </a:ext>
-            </a:extLst>
-          </p:cNvPr>
-          <p:cNvSpPr>
-            <a:spLocks noGrp="1"/>
-          </p:cNvSpPr>
-          <p:nvPr>
-            <p:ph type="sldNum" sz="quarter" idx="12"/>
-          </p:nvPr>
-        </p:nvSpPr>
-        <p:spPr/>
-        <p:txBody>
-          <a:bodyPr/>
-          <a:lstStyle/>
-          <a:p>
-            <a:fld id="{24910F54-69FC-A944-93E9-EFB57972FC5C}" type="slidenum">
-              <a:rPr kumimoji="1" lang="zh-CN" altLang="en-US" smtClean="0"/>
-              <a:t>19</a:t>
-            </a:fld>
-            <a:endParaRPr kumimoji="1" lang="zh-CN" altLang="en-US" dirty="0"/>
-          </a:p>
-        </p:txBody>
-      </p:sp>
-      <p:pic>
-        <p:nvPicPr>
-          <p:cNvPr id="6" name="图片 5">
-            <a:extLst>
-              <a:ext uri="{FF2B5EF4-FFF2-40B4-BE49-F238E27FC236}">
-                <a16:creationId xmlns:a16="http://schemas.microsoft.com/office/drawing/2014/main" id="{089EBEFD-54D7-5F70-D464-D915696EA167}"/>
-              </a:ext>
-            </a:extLst>
-          </p:cNvPr>
-          <p:cNvPicPr>
-            <a:picLocks noChangeAspect="1"/>
-          </p:cNvPicPr>
-          <p:nvPr/>
-        </p:nvPicPr>
-        <p:blipFill>
-          <a:blip r:embed="rId3"/>
-          <a:stretch>
-            <a:fillRect/>
-          </a:stretch>
-        </p:blipFill>
-        <p:spPr>
-          <a:xfrm>
-            <a:off x="1974302" y="1484824"/>
-            <a:ext cx="8243396" cy="3143004"/>
-          </a:xfrm>
-          <a:prstGeom prst="rect">
-            <a:avLst/>
-          </a:prstGeom>
-        </p:spPr>
-      </p:pic>
-      <p:sp>
-        <p:nvSpPr>
-          <p:cNvPr id="8" name="Google Shape;90;p1">
-            <a:extLst>
-              <a:ext uri="{FF2B5EF4-FFF2-40B4-BE49-F238E27FC236}">
-                <a16:creationId xmlns:a16="http://schemas.microsoft.com/office/drawing/2014/main" id="{7329CA24-9B1F-94F6-1E67-4887EBCC285F}"/>
-              </a:ext>
-            </a:extLst>
-          </p:cNvPr>
-          <p:cNvSpPr txBox="1"/>
-          <p:nvPr/>
-        </p:nvSpPr>
-        <p:spPr>
-          <a:xfrm>
-            <a:off x="202064" y="833852"/>
-            <a:ext cx="11840307" cy="524896"/>
-          </a:xfrm>
-          <a:prstGeom prst="rect">
-            <a:avLst/>
-          </a:prstGeom>
-          <a:noFill/>
-          <a:ln>
-            <a:noFill/>
-          </a:ln>
-        </p:spPr>
-        <p:txBody>
-          <a:bodyPr spcFirstLastPara="1" wrap="square" lIns="91425" tIns="45700" rIns="91425" bIns="45700" anchor="b" anchorCtr="0">
-            <a:noAutofit/>
-          </a:bodyPr>
-          <a:lstStyle/>
-          <a:p>
-            <a:pPr marL="457200" indent="-457200">
-              <a:buClr>
-                <a:schemeClr val="dk1"/>
-              </a:buClr>
-              <a:buSzPts val="2200"/>
-              <a:buFont typeface="Arial" panose="020B0604020202020204" pitchFamily="34" charset="0"/>
-              <a:buChar char="•"/>
-            </a:pPr>
-            <a:r>
-              <a:rPr lang="en-US" altLang="zh-CN" sz="2800" b="0" i="0" u="none" strike="noStrike" cap="none" dirty="0">
-                <a:solidFill>
-                  <a:schemeClr val="tx1"/>
-                </a:solidFill>
-                <a:latin typeface="Calibri" panose="020F0502020204030204" pitchFamily="34" charset="0"/>
-                <a:cs typeface="Calibri" panose="020F0502020204030204" pitchFamily="34" charset="0"/>
-                <a:sym typeface="Microsoft YaHei"/>
-              </a:rPr>
-              <a:t>Training loss curve on </a:t>
-            </a:r>
-            <a:r>
-              <a:rPr lang="en-US" altLang="zh-CN" sz="2800" b="1" i="0" u="none" strike="noStrike" cap="none" dirty="0">
-                <a:solidFill>
-                  <a:schemeClr val="tx2">
-                    <a:lumMod val="75000"/>
-                    <a:lumOff val="25000"/>
-                  </a:schemeClr>
-                </a:solidFill>
-                <a:latin typeface="Calibri" panose="020F0502020204030204" pitchFamily="34" charset="0"/>
-                <a:cs typeface="Calibri" panose="020F0502020204030204" pitchFamily="34" charset="0"/>
-                <a:sym typeface="Microsoft YaHei"/>
-              </a:rPr>
-              <a:t>&gt;10,000</a:t>
-            </a:r>
-            <a:r>
-              <a:rPr lang="en-US" altLang="zh-CN" sz="2800" b="0" i="0" u="none" strike="noStrike" cap="none" dirty="0">
-                <a:solidFill>
-                  <a:schemeClr val="tx1"/>
-                </a:solidFill>
-                <a:latin typeface="Calibri" panose="020F0502020204030204" pitchFamily="34" charset="0"/>
-                <a:cs typeface="Calibri" panose="020F0502020204030204" pitchFamily="34" charset="0"/>
-                <a:sym typeface="Microsoft YaHei"/>
-              </a:rPr>
-              <a:t> GPUs for training a 200B-A20B </a:t>
-            </a:r>
-            <a:r>
-              <a:rPr lang="en-US" altLang="zh-CN" sz="2800" b="0" i="0" u="none" strike="noStrike" cap="none" dirty="0" err="1">
-                <a:solidFill>
-                  <a:schemeClr val="tx1"/>
-                </a:solidFill>
-                <a:latin typeface="Calibri" panose="020F0502020204030204" pitchFamily="34" charset="0"/>
-                <a:cs typeface="Calibri" panose="020F0502020204030204" pitchFamily="34" charset="0"/>
-                <a:sym typeface="Microsoft YaHei"/>
-              </a:rPr>
-              <a:t>MoE</a:t>
-            </a:r>
-            <a:r>
-              <a:rPr lang="en-US" altLang="zh-CN" sz="2800" b="0" i="0" u="none" strike="noStrike" cap="none" dirty="0">
-                <a:solidFill>
-                  <a:schemeClr val="tx1"/>
-                </a:solidFill>
-                <a:latin typeface="Calibri" panose="020F0502020204030204" pitchFamily="34" charset="0"/>
-                <a:cs typeface="Calibri" panose="020F0502020204030204" pitchFamily="34" charset="0"/>
-                <a:sym typeface="Microsoft YaHei"/>
-              </a:rPr>
-              <a:t> model</a:t>
-            </a:r>
-          </a:p>
-        </p:txBody>
-      </p:sp>
-      <p:sp>
-        <p:nvSpPr>
-          <p:cNvPr id="4" name="Google Shape;90;p1">
-            <a:extLst>
-              <a:ext uri="{FF2B5EF4-FFF2-40B4-BE49-F238E27FC236}">
-                <a16:creationId xmlns:a16="http://schemas.microsoft.com/office/drawing/2014/main" id="{2E8202D9-2CFB-FB92-C100-24FB72A7E6E1}"/>
-              </a:ext>
-            </a:extLst>
-          </p:cNvPr>
-          <p:cNvSpPr txBox="1"/>
-          <p:nvPr/>
-        </p:nvSpPr>
-        <p:spPr>
-          <a:xfrm>
-            <a:off x="149629" y="4753904"/>
-            <a:ext cx="11840307" cy="945992"/>
-          </a:xfrm>
-          <a:prstGeom prst="rect">
-            <a:avLst/>
-          </a:prstGeom>
-          <a:noFill/>
-          <a:ln>
-            <a:noFill/>
-          </a:ln>
-        </p:spPr>
-        <p:txBody>
-          <a:bodyPr spcFirstLastPara="1" wrap="square" lIns="91425" tIns="45700" rIns="91425" bIns="45700" anchor="b" anchorCtr="0">
-            <a:noAutofit/>
-          </a:bodyPr>
-          <a:lstStyle/>
-          <a:p>
-            <a:pPr marL="457200" indent="-457200">
-              <a:buClr>
-                <a:schemeClr val="dk1"/>
-              </a:buClr>
-              <a:buSzPts val="2200"/>
-              <a:buFont typeface="Arial" panose="020B0604020202020204" pitchFamily="34" charset="0"/>
-              <a:buChar char="•"/>
-            </a:pPr>
-            <a:r>
-              <a:rPr lang="en-US" altLang="zh-CN" sz="2800" b="0" i="0" u="none" strike="noStrike" cap="none" dirty="0" err="1">
-                <a:solidFill>
-                  <a:schemeClr val="tx1"/>
-                </a:solidFill>
-                <a:latin typeface="Calibri" panose="020F0502020204030204" pitchFamily="34" charset="0"/>
-                <a:cs typeface="Calibri" panose="020F0502020204030204" pitchFamily="34" charset="0"/>
-                <a:sym typeface="Microsoft YaHei"/>
-              </a:rPr>
-              <a:t>MoE</a:t>
-            </a:r>
-            <a:r>
-              <a:rPr lang="en-US" altLang="zh-CN" sz="2800" b="0" i="0" u="none" strike="noStrike" cap="none" dirty="0">
-                <a:solidFill>
-                  <a:schemeClr val="tx1"/>
-                </a:solidFill>
-                <a:latin typeface="Calibri" panose="020F0502020204030204" pitchFamily="34" charset="0"/>
-                <a:cs typeface="Calibri" panose="020F0502020204030204" pitchFamily="34" charset="0"/>
-                <a:sym typeface="Microsoft YaHei"/>
-              </a:rPr>
-              <a:t> training requires holistic optimization beyond attention and GEMMs, including routing, dispatch/combine, and operators with dynamic shapes.</a:t>
-            </a:r>
-          </a:p>
-        </p:txBody>
-      </p:sp>
-      <p:pic>
-        <p:nvPicPr>
-          <p:cNvPr id="3" name="图片 2">
-            <a:extLst>
-              <a:ext uri="{FF2B5EF4-FFF2-40B4-BE49-F238E27FC236}">
-                <a16:creationId xmlns:a16="http://schemas.microsoft.com/office/drawing/2014/main" id="{ACBC91FC-E2DD-8D0A-3875-A9F38B4C4C65}"/>
-              </a:ext>
-            </a:extLst>
-          </p:cNvPr>
-          <p:cNvPicPr>
-            <a:picLocks noChangeAspect="1"/>
-          </p:cNvPicPr>
-          <p:nvPr/>
-        </p:nvPicPr>
-        <p:blipFill>
-          <a:blip r:embed="rId4"/>
-          <a:stretch>
-            <a:fillRect/>
-          </a:stretch>
-        </p:blipFill>
-        <p:spPr>
-          <a:xfrm>
-            <a:off x="9433687" y="331968"/>
-            <a:ext cx="2743200" cy="387856"/>
-          </a:xfrm>
-          <a:prstGeom prst="rect">
-            <a:avLst/>
-          </a:prstGeom>
-        </p:spPr>
-      </p:pic>
-      <p:pic>
-        <p:nvPicPr>
-          <p:cNvPr id="5" name="图片 4">
-            <a:extLst>
-              <a:ext uri="{FF2B5EF4-FFF2-40B4-BE49-F238E27FC236}">
-                <a16:creationId xmlns:a16="http://schemas.microsoft.com/office/drawing/2014/main" id="{94537802-3367-6762-4675-8189B62C39B6}"/>
-              </a:ext>
-            </a:extLst>
-          </p:cNvPr>
-          <p:cNvPicPr>
-            <a:picLocks noChangeAspect="1"/>
-          </p:cNvPicPr>
-          <p:nvPr/>
-        </p:nvPicPr>
-        <p:blipFill>
-          <a:blip r:embed="rId5" cstate="print">
-            <a:extLst>
-              <a:ext uri="{28A0092B-C50C-407E-A947-70E740481C1C}">
-                <a14:useLocalDpi xmlns:a14="http://schemas.microsoft.com/office/drawing/2010/main" val="0"/>
-              </a:ext>
-            </a:extLst>
-          </a:blip>
-          <a:stretch>
-            <a:fillRect/>
-          </a:stretch>
-        </p:blipFill>
-        <p:spPr>
-          <a:xfrm>
-            <a:off x="7927450" y="335419"/>
-            <a:ext cx="1366300" cy="384405"/>
-          </a:xfrm>
-          <a:prstGeom prst="rect">
-            <a:avLst/>
-          </a:prstGeom>
-        </p:spPr>
-      </p:pic>
-    </p:spTree>
-    <p:extLst>
-      <p:ext uri="{BB962C8B-B14F-4D97-AF65-F5344CB8AC3E}">
-        <p14:creationId xmlns:p14="http://schemas.microsoft.com/office/powerpoint/2010/main" val="1181696688"/>
       </p:ext>
     </p:extLst>
   </p:cSld>
@@ -15727,6 +16554,691 @@
         <p:cNvPr id="1" name="">
           <a:extLst>
             <a:ext uri="{FF2B5EF4-FFF2-40B4-BE49-F238E27FC236}">
+              <a16:creationId xmlns:a16="http://schemas.microsoft.com/office/drawing/2014/main" id="{5821C5CC-6653-FB41-EB48-13DFFC47FF01}"/>
+            </a:ext>
+          </a:extLst>
+        </p:cNvPr>
+        <p:cNvGrpSpPr/>
+        <p:nvPr/>
+      </p:nvGrpSpPr>
+      <p:grpSpPr>
+        <a:xfrm>
+          <a:off x="0" y="0"/>
+          <a:ext cx="0" cy="0"/>
+          <a:chOff x="0" y="0"/>
+          <a:chExt cx="0" cy="0"/>
+        </a:xfrm>
+      </p:grpSpPr>
+      <p:sp>
+        <p:nvSpPr>
+          <p:cNvPr id="2" name="标题 1">
+            <a:extLst>
+              <a:ext uri="{FF2B5EF4-FFF2-40B4-BE49-F238E27FC236}">
+                <a16:creationId xmlns:a16="http://schemas.microsoft.com/office/drawing/2014/main" id="{C66DAFB4-AB93-2730-C8F8-C7D5C623B005}"/>
+              </a:ext>
+            </a:extLst>
+          </p:cNvPr>
+          <p:cNvSpPr>
+            <a:spLocks noGrp="1"/>
+          </p:cNvSpPr>
+          <p:nvPr>
+            <p:ph type="ctrTitle"/>
+          </p:nvPr>
+        </p:nvSpPr>
+        <p:spPr>
+          <a:xfrm>
+            <a:off x="149629" y="182880"/>
+            <a:ext cx="11006051" cy="650972"/>
+          </a:xfrm>
+        </p:spPr>
+        <p:txBody>
+          <a:bodyPr>
+            <a:noAutofit/>
+          </a:bodyPr>
+          <a:lstStyle/>
+          <a:p>
+            <a:pPr algn="l">
+              <a:lnSpc>
+                <a:spcPct val="130000"/>
+              </a:lnSpc>
+            </a:pPr>
+            <a:r>
+              <a:rPr lang="en-US" altLang="zh-CN" sz="3600" b="1" dirty="0">
+                <a:latin typeface="Calibri" panose="020F0502020204030204" pitchFamily="34" charset="0"/>
+                <a:ea typeface="SimHei" charset="-122"/>
+                <a:cs typeface="Calibri" panose="020F0502020204030204" pitchFamily="34" charset="0"/>
+              </a:rPr>
+              <a:t>Performance breakdown</a:t>
+            </a:r>
+            <a:endParaRPr lang="en" altLang="zh-CN" sz="3600" b="1" dirty="0">
+              <a:latin typeface="Calibri" panose="020F0502020204030204" pitchFamily="34" charset="0"/>
+              <a:ea typeface="SimHei" charset="-122"/>
+              <a:cs typeface="Calibri" panose="020F0502020204030204" pitchFamily="34" charset="0"/>
+            </a:endParaRPr>
+          </a:p>
+        </p:txBody>
+      </p:sp>
+      <p:sp>
+        <p:nvSpPr>
+          <p:cNvPr id="7" name="灯片编号占位符 6">
+            <a:extLst>
+              <a:ext uri="{FF2B5EF4-FFF2-40B4-BE49-F238E27FC236}">
+                <a16:creationId xmlns:a16="http://schemas.microsoft.com/office/drawing/2014/main" id="{1DB04374-9C03-7460-7B6F-B620C346453B}"/>
+              </a:ext>
+            </a:extLst>
+          </p:cNvPr>
+          <p:cNvSpPr>
+            <a:spLocks noGrp="1"/>
+          </p:cNvSpPr>
+          <p:nvPr>
+            <p:ph type="sldNum" sz="quarter" idx="12"/>
+          </p:nvPr>
+        </p:nvSpPr>
+        <p:spPr/>
+        <p:txBody>
+          <a:bodyPr/>
+          <a:lstStyle/>
+          <a:p>
+            <a:fld id="{24910F54-69FC-A944-93E9-EFB57972FC5C}" type="slidenum">
+              <a:rPr kumimoji="1" lang="zh-CN" altLang="en-US" smtClean="0"/>
+              <a:t>20</a:t>
+            </a:fld>
+            <a:endParaRPr kumimoji="1" lang="zh-CN" altLang="en-US" dirty="0"/>
+          </a:p>
+        </p:txBody>
+      </p:sp>
+      <p:pic>
+        <p:nvPicPr>
+          <p:cNvPr id="6" name="图片 5">
+            <a:extLst>
+              <a:ext uri="{FF2B5EF4-FFF2-40B4-BE49-F238E27FC236}">
+                <a16:creationId xmlns:a16="http://schemas.microsoft.com/office/drawing/2014/main" id="{FFC6ADAE-224F-750D-70D5-40AE9E971635}"/>
+              </a:ext>
+            </a:extLst>
+          </p:cNvPr>
+          <p:cNvPicPr>
+            <a:picLocks noChangeAspect="1"/>
+          </p:cNvPicPr>
+          <p:nvPr/>
+        </p:nvPicPr>
+        <p:blipFill>
+          <a:blip r:embed="rId3"/>
+          <a:stretch>
+            <a:fillRect/>
+          </a:stretch>
+        </p:blipFill>
+        <p:spPr>
+          <a:xfrm>
+            <a:off x="870857" y="2276048"/>
+            <a:ext cx="10450286" cy="3578135"/>
+          </a:xfrm>
+          <a:prstGeom prst="rect">
+            <a:avLst/>
+          </a:prstGeom>
+        </p:spPr>
+      </p:pic>
+      <p:sp>
+        <p:nvSpPr>
+          <p:cNvPr id="10" name="Google Shape;90;p1">
+            <a:extLst>
+              <a:ext uri="{FF2B5EF4-FFF2-40B4-BE49-F238E27FC236}">
+                <a16:creationId xmlns:a16="http://schemas.microsoft.com/office/drawing/2014/main" id="{01F1B687-27CC-F523-B1DA-500CCDD7C9D4}"/>
+              </a:ext>
+            </a:extLst>
+          </p:cNvPr>
+          <p:cNvSpPr txBox="1"/>
+          <p:nvPr/>
+        </p:nvSpPr>
+        <p:spPr>
+          <a:xfrm>
+            <a:off x="427511" y="1125461"/>
+            <a:ext cx="10450286" cy="899504"/>
+          </a:xfrm>
+          <a:prstGeom prst="rect">
+            <a:avLst/>
+          </a:prstGeom>
+          <a:noFill/>
+          <a:ln>
+            <a:noFill/>
+          </a:ln>
+        </p:spPr>
+        <p:txBody>
+          <a:bodyPr spcFirstLastPara="1" wrap="square" lIns="91425" tIns="45700" rIns="91425" bIns="45700" anchor="b" anchorCtr="0">
+            <a:noAutofit/>
+          </a:bodyPr>
+          <a:lstStyle/>
+          <a:p>
+            <a:pPr algn="ctr">
+              <a:buClr>
+                <a:schemeClr val="dk1"/>
+              </a:buClr>
+              <a:buSzPts val="2200"/>
+            </a:pPr>
+            <a:r>
+              <a:rPr lang="en-US" altLang="zh-CN" sz="2800" b="0" i="0" u="none" strike="noStrike" cap="none" dirty="0" err="1">
+                <a:solidFill>
+                  <a:schemeClr val="tx1"/>
+                </a:solidFill>
+                <a:latin typeface="Calibri" panose="020F0502020204030204" pitchFamily="34" charset="0"/>
+                <a:cs typeface="Calibri" panose="020F0502020204030204" pitchFamily="34" charset="0"/>
+                <a:sym typeface="Microsoft YaHei"/>
+              </a:rPr>
+              <a:t>MegaScale-MoE</a:t>
+            </a:r>
+            <a:r>
+              <a:rPr lang="en-US" altLang="zh-CN" sz="2800" b="0" i="0" u="none" strike="noStrike" cap="none" dirty="0">
+                <a:solidFill>
+                  <a:schemeClr val="tx1"/>
+                </a:solidFill>
+                <a:latin typeface="Calibri" panose="020F0502020204030204" pitchFamily="34" charset="0"/>
+                <a:cs typeface="Calibri" panose="020F0502020204030204" pitchFamily="34" charset="0"/>
+                <a:sym typeface="Microsoft YaHei"/>
+              </a:rPr>
+              <a:t> consistently improves MFU by </a:t>
+            </a:r>
+            <a:r>
+              <a:rPr lang="en-US" altLang="zh-CN" sz="2800" b="1" i="0" u="none" strike="noStrike" cap="none" dirty="0">
+                <a:solidFill>
+                  <a:schemeClr val="tx2">
+                    <a:lumMod val="75000"/>
+                    <a:lumOff val="25000"/>
+                  </a:schemeClr>
+                </a:solidFill>
+                <a:latin typeface="Calibri" panose="020F0502020204030204" pitchFamily="34" charset="0"/>
+                <a:cs typeface="Calibri" panose="020F0502020204030204" pitchFamily="34" charset="0"/>
+                <a:sym typeface="Microsoft YaHei"/>
+              </a:rPr>
+              <a:t>nearly eliminating exposed communication</a:t>
+            </a:r>
+            <a:r>
+              <a:rPr lang="en-US" altLang="zh-CN" sz="2800" b="0" i="0" u="none" strike="noStrike" cap="none" dirty="0">
+                <a:solidFill>
+                  <a:schemeClr val="tx1"/>
+                </a:solidFill>
+                <a:latin typeface="Calibri" panose="020F0502020204030204" pitchFamily="34" charset="0"/>
+                <a:cs typeface="Calibri" panose="020F0502020204030204" pitchFamily="34" charset="0"/>
+                <a:sym typeface="Microsoft YaHei"/>
+              </a:rPr>
+              <a:t> across </a:t>
+            </a:r>
+            <a:r>
+              <a:rPr lang="en-US" altLang="zh-CN" sz="2800" b="1" i="0" u="none" strike="noStrike" cap="none" dirty="0">
+                <a:solidFill>
+                  <a:schemeClr val="tx2">
+                    <a:lumMod val="75000"/>
+                    <a:lumOff val="25000"/>
+                  </a:schemeClr>
+                </a:solidFill>
+                <a:latin typeface="Calibri" panose="020F0502020204030204" pitchFamily="34" charset="0"/>
+                <a:cs typeface="Calibri" panose="020F0502020204030204" pitchFamily="34" charset="0"/>
+                <a:sym typeface="Microsoft YaHei"/>
+              </a:rPr>
+              <a:t>different GPU platforms</a:t>
+            </a:r>
+          </a:p>
+        </p:txBody>
+      </p:sp>
+      <p:pic>
+        <p:nvPicPr>
+          <p:cNvPr id="3" name="图片 2">
+            <a:extLst>
+              <a:ext uri="{FF2B5EF4-FFF2-40B4-BE49-F238E27FC236}">
+                <a16:creationId xmlns:a16="http://schemas.microsoft.com/office/drawing/2014/main" id="{07E7E7EF-523C-5EB0-CE34-75F45EF6C324}"/>
+              </a:ext>
+            </a:extLst>
+          </p:cNvPr>
+          <p:cNvPicPr>
+            <a:picLocks noChangeAspect="1"/>
+          </p:cNvPicPr>
+          <p:nvPr/>
+        </p:nvPicPr>
+        <p:blipFill>
+          <a:blip r:embed="rId4"/>
+          <a:stretch>
+            <a:fillRect/>
+          </a:stretch>
+        </p:blipFill>
+        <p:spPr>
+          <a:xfrm>
+            <a:off x="9433687" y="331968"/>
+            <a:ext cx="2743200" cy="387856"/>
+          </a:xfrm>
+          <a:prstGeom prst="rect">
+            <a:avLst/>
+          </a:prstGeom>
+        </p:spPr>
+      </p:pic>
+      <p:pic>
+        <p:nvPicPr>
+          <p:cNvPr id="4" name="图片 3">
+            <a:extLst>
+              <a:ext uri="{FF2B5EF4-FFF2-40B4-BE49-F238E27FC236}">
+                <a16:creationId xmlns:a16="http://schemas.microsoft.com/office/drawing/2014/main" id="{53ABBF1B-B92D-6304-B729-38AA4E219BEB}"/>
+              </a:ext>
+            </a:extLst>
+          </p:cNvPr>
+          <p:cNvPicPr>
+            <a:picLocks noChangeAspect="1"/>
+          </p:cNvPicPr>
+          <p:nvPr/>
+        </p:nvPicPr>
+        <p:blipFill>
+          <a:blip r:embed="rId5" cstate="print">
+            <a:extLst>
+              <a:ext uri="{28A0092B-C50C-407E-A947-70E740481C1C}">
+                <a14:useLocalDpi xmlns:a14="http://schemas.microsoft.com/office/drawing/2010/main" val="0"/>
+              </a:ext>
+            </a:extLst>
+          </a:blip>
+          <a:stretch>
+            <a:fillRect/>
+          </a:stretch>
+        </p:blipFill>
+        <p:spPr>
+          <a:xfrm>
+            <a:off x="7927450" y="335419"/>
+            <a:ext cx="1366300" cy="384405"/>
+          </a:xfrm>
+          <a:prstGeom prst="rect">
+            <a:avLst/>
+          </a:prstGeom>
+        </p:spPr>
+      </p:pic>
+    </p:spTree>
+    <p:extLst>
+      <p:ext uri="{BB962C8B-B14F-4D97-AF65-F5344CB8AC3E}">
+        <p14:creationId xmlns:p14="http://schemas.microsoft.com/office/powerpoint/2010/main" val="2554953368"/>
+      </p:ext>
+    </p:extLst>
+  </p:cSld>
+  <p:clrMapOvr>
+    <a:masterClrMapping/>
+  </p:clrMapOvr>
+</p:sld>
+</file>
+
+<file path=ppt/slides/slide21.xml><?xml version="1.0" encoding="utf-8"?>
+<p:sld xmlns:a="http://schemas.openxmlformats.org/drawingml/2006/main" xmlns:r="http://schemas.openxmlformats.org/officeDocument/2006/relationships" xmlns:p="http://schemas.openxmlformats.org/presentationml/2006/main">
+  <p:cSld>
+    <p:spTree>
+      <p:nvGrpSpPr>
+        <p:cNvPr id="1" name="">
+          <a:extLst>
+            <a:ext uri="{FF2B5EF4-FFF2-40B4-BE49-F238E27FC236}">
+              <a16:creationId xmlns:a16="http://schemas.microsoft.com/office/drawing/2014/main" id="{6E78D171-9002-F5B0-8670-29EC1BF68898}"/>
+            </a:ext>
+          </a:extLst>
+        </p:cNvPr>
+        <p:cNvGrpSpPr/>
+        <p:nvPr/>
+      </p:nvGrpSpPr>
+      <p:grpSpPr>
+        <a:xfrm>
+          <a:off x="0" y="0"/>
+          <a:ext cx="0" cy="0"/>
+          <a:chOff x="0" y="0"/>
+          <a:chExt cx="0" cy="0"/>
+        </a:xfrm>
+      </p:grpSpPr>
+      <p:sp>
+        <p:nvSpPr>
+          <p:cNvPr id="2" name="标题 1">
+            <a:extLst>
+              <a:ext uri="{FF2B5EF4-FFF2-40B4-BE49-F238E27FC236}">
+                <a16:creationId xmlns:a16="http://schemas.microsoft.com/office/drawing/2014/main" id="{6E5E94B3-D9AC-F245-C055-39D010446041}"/>
+              </a:ext>
+            </a:extLst>
+          </p:cNvPr>
+          <p:cNvSpPr>
+            <a:spLocks noGrp="1"/>
+          </p:cNvSpPr>
+          <p:nvPr>
+            <p:ph type="ctrTitle"/>
+          </p:nvPr>
+        </p:nvSpPr>
+        <p:spPr>
+          <a:xfrm>
+            <a:off x="149629" y="182880"/>
+            <a:ext cx="11006051" cy="650972"/>
+          </a:xfrm>
+        </p:spPr>
+        <p:txBody>
+          <a:bodyPr>
+            <a:noAutofit/>
+          </a:bodyPr>
+          <a:lstStyle/>
+          <a:p>
+            <a:pPr algn="l">
+              <a:lnSpc>
+                <a:spcPct val="130000"/>
+              </a:lnSpc>
+            </a:pPr>
+            <a:r>
+              <a:rPr lang="en-US" altLang="zh-CN" sz="3600" b="1" dirty="0">
+                <a:latin typeface="Calibri" panose="020F0502020204030204" pitchFamily="34" charset="0"/>
+                <a:ea typeface="SimHei" charset="-122"/>
+                <a:cs typeface="Calibri" panose="020F0502020204030204" pitchFamily="34" charset="0"/>
+              </a:rPr>
+              <a:t>Deployment Experience</a:t>
+            </a:r>
+            <a:endParaRPr lang="en" altLang="zh-CN" sz="3600" b="1" dirty="0">
+              <a:latin typeface="Calibri" panose="020F0502020204030204" pitchFamily="34" charset="0"/>
+              <a:ea typeface="SimHei" charset="-122"/>
+              <a:cs typeface="Calibri" panose="020F0502020204030204" pitchFamily="34" charset="0"/>
+            </a:endParaRPr>
+          </a:p>
+        </p:txBody>
+      </p:sp>
+      <p:sp>
+        <p:nvSpPr>
+          <p:cNvPr id="7" name="灯片编号占位符 6">
+            <a:extLst>
+              <a:ext uri="{FF2B5EF4-FFF2-40B4-BE49-F238E27FC236}">
+                <a16:creationId xmlns:a16="http://schemas.microsoft.com/office/drawing/2014/main" id="{805D5BA8-73D9-4B1F-1D78-2957FC25313A}"/>
+              </a:ext>
+            </a:extLst>
+          </p:cNvPr>
+          <p:cNvSpPr>
+            <a:spLocks noGrp="1"/>
+          </p:cNvSpPr>
+          <p:nvPr>
+            <p:ph type="sldNum" sz="quarter" idx="12"/>
+          </p:nvPr>
+        </p:nvSpPr>
+        <p:spPr/>
+        <p:txBody>
+          <a:bodyPr/>
+          <a:lstStyle/>
+          <a:p>
+            <a:fld id="{24910F54-69FC-A944-93E9-EFB57972FC5C}" type="slidenum">
+              <a:rPr kumimoji="1" lang="zh-CN" altLang="en-US" smtClean="0"/>
+              <a:t>21</a:t>
+            </a:fld>
+            <a:endParaRPr kumimoji="1" lang="zh-CN" altLang="en-US" dirty="0"/>
+          </a:p>
+        </p:txBody>
+      </p:sp>
+      <p:pic>
+        <p:nvPicPr>
+          <p:cNvPr id="6" name="图片 5">
+            <a:extLst>
+              <a:ext uri="{FF2B5EF4-FFF2-40B4-BE49-F238E27FC236}">
+                <a16:creationId xmlns:a16="http://schemas.microsoft.com/office/drawing/2014/main" id="{089EBEFD-54D7-5F70-D464-D915696EA167}"/>
+              </a:ext>
+            </a:extLst>
+          </p:cNvPr>
+          <p:cNvPicPr>
+            <a:picLocks noChangeAspect="1"/>
+          </p:cNvPicPr>
+          <p:nvPr/>
+        </p:nvPicPr>
+        <p:blipFill>
+          <a:blip r:embed="rId3"/>
+          <a:stretch>
+            <a:fillRect/>
+          </a:stretch>
+        </p:blipFill>
+        <p:spPr>
+          <a:xfrm>
+            <a:off x="1974302" y="1484824"/>
+            <a:ext cx="8243396" cy="3143004"/>
+          </a:xfrm>
+          <a:prstGeom prst="rect">
+            <a:avLst/>
+          </a:prstGeom>
+        </p:spPr>
+      </p:pic>
+      <p:sp>
+        <p:nvSpPr>
+          <p:cNvPr id="8" name="Google Shape;90;p1">
+            <a:extLst>
+              <a:ext uri="{FF2B5EF4-FFF2-40B4-BE49-F238E27FC236}">
+                <a16:creationId xmlns:a16="http://schemas.microsoft.com/office/drawing/2014/main" id="{7329CA24-9B1F-94F6-1E67-4887EBCC285F}"/>
+              </a:ext>
+            </a:extLst>
+          </p:cNvPr>
+          <p:cNvSpPr txBox="1"/>
+          <p:nvPr/>
+        </p:nvSpPr>
+        <p:spPr>
+          <a:xfrm>
+            <a:off x="202064" y="833852"/>
+            <a:ext cx="11840307" cy="524896"/>
+          </a:xfrm>
+          <a:prstGeom prst="rect">
+            <a:avLst/>
+          </a:prstGeom>
+          <a:noFill/>
+          <a:ln>
+            <a:noFill/>
+          </a:ln>
+        </p:spPr>
+        <p:txBody>
+          <a:bodyPr spcFirstLastPara="1" wrap="square" lIns="91425" tIns="45700" rIns="91425" bIns="45700" anchor="b" anchorCtr="0">
+            <a:noAutofit/>
+          </a:bodyPr>
+          <a:lstStyle/>
+          <a:p>
+            <a:pPr marL="457200" indent="-457200">
+              <a:buClr>
+                <a:schemeClr val="dk1"/>
+              </a:buClr>
+              <a:buSzPts val="2200"/>
+              <a:buFont typeface="Arial" panose="020B0604020202020204" pitchFamily="34" charset="0"/>
+              <a:buChar char="•"/>
+            </a:pPr>
+            <a:r>
+              <a:rPr lang="en-US" altLang="zh-CN" sz="2800" b="0" i="0" u="none" strike="noStrike" cap="none" dirty="0">
+                <a:solidFill>
+                  <a:schemeClr val="tx1"/>
+                </a:solidFill>
+                <a:latin typeface="Calibri" panose="020F0502020204030204" pitchFamily="34" charset="0"/>
+                <a:cs typeface="Calibri" panose="020F0502020204030204" pitchFamily="34" charset="0"/>
+                <a:sym typeface="Microsoft YaHei"/>
+              </a:rPr>
+              <a:t>Training loss curve on </a:t>
+            </a:r>
+            <a:r>
+              <a:rPr lang="en-US" altLang="zh-CN" sz="2800" b="1" i="0" u="none" strike="noStrike" cap="none" dirty="0">
+                <a:solidFill>
+                  <a:schemeClr val="tx2">
+                    <a:lumMod val="75000"/>
+                    <a:lumOff val="25000"/>
+                  </a:schemeClr>
+                </a:solidFill>
+                <a:latin typeface="Calibri" panose="020F0502020204030204" pitchFamily="34" charset="0"/>
+                <a:cs typeface="Calibri" panose="020F0502020204030204" pitchFamily="34" charset="0"/>
+                <a:sym typeface="Microsoft YaHei"/>
+              </a:rPr>
+              <a:t>&gt;10,000</a:t>
+            </a:r>
+            <a:r>
+              <a:rPr lang="en-US" altLang="zh-CN" sz="2800" b="0" i="0" u="none" strike="noStrike" cap="none" dirty="0">
+                <a:solidFill>
+                  <a:schemeClr val="tx1"/>
+                </a:solidFill>
+                <a:latin typeface="Calibri" panose="020F0502020204030204" pitchFamily="34" charset="0"/>
+                <a:cs typeface="Calibri" panose="020F0502020204030204" pitchFamily="34" charset="0"/>
+                <a:sym typeface="Microsoft YaHei"/>
+              </a:rPr>
+              <a:t> GPUs for training a 200B-A20B </a:t>
+            </a:r>
+            <a:r>
+              <a:rPr lang="en-US" altLang="zh-CN" sz="2800" b="0" i="0" u="none" strike="noStrike" cap="none" dirty="0" err="1">
+                <a:solidFill>
+                  <a:schemeClr val="tx1"/>
+                </a:solidFill>
+                <a:latin typeface="Calibri" panose="020F0502020204030204" pitchFamily="34" charset="0"/>
+                <a:cs typeface="Calibri" panose="020F0502020204030204" pitchFamily="34" charset="0"/>
+                <a:sym typeface="Microsoft YaHei"/>
+              </a:rPr>
+              <a:t>MoE</a:t>
+            </a:r>
+            <a:r>
+              <a:rPr lang="en-US" altLang="zh-CN" sz="2800" b="0" i="0" u="none" strike="noStrike" cap="none" dirty="0">
+                <a:solidFill>
+                  <a:schemeClr val="tx1"/>
+                </a:solidFill>
+                <a:latin typeface="Calibri" panose="020F0502020204030204" pitchFamily="34" charset="0"/>
+                <a:cs typeface="Calibri" panose="020F0502020204030204" pitchFamily="34" charset="0"/>
+                <a:sym typeface="Microsoft YaHei"/>
+              </a:rPr>
+              <a:t> model</a:t>
+            </a:r>
+          </a:p>
+        </p:txBody>
+      </p:sp>
+      <p:sp>
+        <p:nvSpPr>
+          <p:cNvPr id="4" name="Google Shape;90;p1">
+            <a:extLst>
+              <a:ext uri="{FF2B5EF4-FFF2-40B4-BE49-F238E27FC236}">
+                <a16:creationId xmlns:a16="http://schemas.microsoft.com/office/drawing/2014/main" id="{2E8202D9-2CFB-FB92-C100-24FB72A7E6E1}"/>
+              </a:ext>
+            </a:extLst>
+          </p:cNvPr>
+          <p:cNvSpPr txBox="1"/>
+          <p:nvPr/>
+        </p:nvSpPr>
+        <p:spPr>
+          <a:xfrm>
+            <a:off x="149629" y="4753904"/>
+            <a:ext cx="11840307" cy="945992"/>
+          </a:xfrm>
+          <a:prstGeom prst="rect">
+            <a:avLst/>
+          </a:prstGeom>
+          <a:noFill/>
+          <a:ln>
+            <a:noFill/>
+          </a:ln>
+        </p:spPr>
+        <p:txBody>
+          <a:bodyPr spcFirstLastPara="1" wrap="square" lIns="91425" tIns="45700" rIns="91425" bIns="45700" anchor="b" anchorCtr="0">
+            <a:noAutofit/>
+          </a:bodyPr>
+          <a:lstStyle/>
+          <a:p>
+            <a:pPr marL="457200" indent="-457200">
+              <a:buClr>
+                <a:schemeClr val="dk1"/>
+              </a:buClr>
+              <a:buSzPts val="2200"/>
+              <a:buFont typeface="Arial" panose="020B0604020202020204" pitchFamily="34" charset="0"/>
+              <a:buChar char="•"/>
+            </a:pPr>
+            <a:r>
+              <a:rPr lang="en-US" altLang="zh-CN" sz="2800" b="0" i="0" u="none" strike="noStrike" cap="none" dirty="0" err="1">
+                <a:solidFill>
+                  <a:schemeClr val="tx1"/>
+                </a:solidFill>
+                <a:latin typeface="Calibri" panose="020F0502020204030204" pitchFamily="34" charset="0"/>
+                <a:cs typeface="Calibri" panose="020F0502020204030204" pitchFamily="34" charset="0"/>
+                <a:sym typeface="Microsoft YaHei"/>
+              </a:rPr>
+              <a:t>MoE</a:t>
+            </a:r>
+            <a:r>
+              <a:rPr lang="en-US" altLang="zh-CN" sz="2800" b="0" i="0" u="none" strike="noStrike" cap="none" dirty="0">
+                <a:solidFill>
+                  <a:schemeClr val="tx1"/>
+                </a:solidFill>
+                <a:latin typeface="Calibri" panose="020F0502020204030204" pitchFamily="34" charset="0"/>
+                <a:cs typeface="Calibri" panose="020F0502020204030204" pitchFamily="34" charset="0"/>
+                <a:sym typeface="Microsoft YaHei"/>
+              </a:rPr>
+              <a:t> training requires holistic optimization beyond attention and GEMMs, including routing, dispatch/combine, and operators with dynamic shapes.</a:t>
+            </a:r>
+          </a:p>
+        </p:txBody>
+      </p:sp>
+      <p:pic>
+        <p:nvPicPr>
+          <p:cNvPr id="3" name="图片 2">
+            <a:extLst>
+              <a:ext uri="{FF2B5EF4-FFF2-40B4-BE49-F238E27FC236}">
+                <a16:creationId xmlns:a16="http://schemas.microsoft.com/office/drawing/2014/main" id="{ACBC91FC-E2DD-8D0A-3875-A9F38B4C4C65}"/>
+              </a:ext>
+            </a:extLst>
+          </p:cNvPr>
+          <p:cNvPicPr>
+            <a:picLocks noChangeAspect="1"/>
+          </p:cNvPicPr>
+          <p:nvPr/>
+        </p:nvPicPr>
+        <p:blipFill>
+          <a:blip r:embed="rId4"/>
+          <a:stretch>
+            <a:fillRect/>
+          </a:stretch>
+        </p:blipFill>
+        <p:spPr>
+          <a:xfrm>
+            <a:off x="9433687" y="331968"/>
+            <a:ext cx="2743200" cy="387856"/>
+          </a:xfrm>
+          <a:prstGeom prst="rect">
+            <a:avLst/>
+          </a:prstGeom>
+        </p:spPr>
+      </p:pic>
+      <p:pic>
+        <p:nvPicPr>
+          <p:cNvPr id="5" name="图片 4">
+            <a:extLst>
+              <a:ext uri="{FF2B5EF4-FFF2-40B4-BE49-F238E27FC236}">
+                <a16:creationId xmlns:a16="http://schemas.microsoft.com/office/drawing/2014/main" id="{94537802-3367-6762-4675-8189B62C39B6}"/>
+              </a:ext>
+            </a:extLst>
+          </p:cNvPr>
+          <p:cNvPicPr>
+            <a:picLocks noChangeAspect="1"/>
+          </p:cNvPicPr>
+          <p:nvPr/>
+        </p:nvPicPr>
+        <p:blipFill>
+          <a:blip r:embed="rId5" cstate="print">
+            <a:extLst>
+              <a:ext uri="{28A0092B-C50C-407E-A947-70E740481C1C}">
+                <a14:useLocalDpi xmlns:a14="http://schemas.microsoft.com/office/drawing/2010/main" val="0"/>
+              </a:ext>
+            </a:extLst>
+          </a:blip>
+          <a:stretch>
+            <a:fillRect/>
+          </a:stretch>
+        </p:blipFill>
+        <p:spPr>
+          <a:xfrm>
+            <a:off x="7927450" y="335419"/>
+            <a:ext cx="1366300" cy="384405"/>
+          </a:xfrm>
+          <a:prstGeom prst="rect">
+            <a:avLst/>
+          </a:prstGeom>
+        </p:spPr>
+      </p:pic>
+    </p:spTree>
+    <p:extLst>
+      <p:ext uri="{BB962C8B-B14F-4D97-AF65-F5344CB8AC3E}">
+        <p14:creationId xmlns:p14="http://schemas.microsoft.com/office/powerpoint/2010/main" val="1181696688"/>
+      </p:ext>
+    </p:extLst>
+  </p:cSld>
+  <p:clrMapOvr>
+    <a:masterClrMapping/>
+  </p:clrMapOvr>
+</p:sld>
+</file>
+
+<file path=ppt/slides/slide22.xml><?xml version="1.0" encoding="utf-8"?>
+<p:sld xmlns:a="http://schemas.openxmlformats.org/drawingml/2006/main" xmlns:r="http://schemas.openxmlformats.org/officeDocument/2006/relationships" xmlns:p="http://schemas.openxmlformats.org/presentationml/2006/main">
+  <p:cSld>
+    <p:spTree>
+      <p:nvGrpSpPr>
+        <p:cNvPr id="1" name="">
+          <a:extLst>
+            <a:ext uri="{FF2B5EF4-FFF2-40B4-BE49-F238E27FC236}">
               <a16:creationId xmlns:a16="http://schemas.microsoft.com/office/drawing/2014/main" id="{230EFEC2-869A-9FE3-3FD3-A88C670EF465}"/>
             </a:ext>
           </a:extLst>
@@ -15814,7 +17326,7 @@
           <a:p>
             <a:fld id="{24910F54-69FC-A944-93E9-EFB57972FC5C}" type="slidenum">
               <a:rPr kumimoji="1" lang="zh-CN" altLang="en-US" smtClean="0"/>
-              <a:t>20</a:t>
+              <a:t>22</a:t>
             </a:fld>
             <a:endParaRPr kumimoji="1" lang="zh-CN" altLang="en-US" dirty="0"/>
           </a:p>
@@ -21654,6 +23166,268 @@
         <p:cNvPr id="1" name="">
           <a:extLst>
             <a:ext uri="{FF2B5EF4-FFF2-40B4-BE49-F238E27FC236}">
+              <a16:creationId xmlns:a16="http://schemas.microsoft.com/office/drawing/2014/main" id="{AB086738-F386-87AF-1CE5-6DB0B935FDD0}"/>
+            </a:ext>
+          </a:extLst>
+        </p:cNvPr>
+        <p:cNvGrpSpPr/>
+        <p:nvPr/>
+      </p:nvGrpSpPr>
+      <p:grpSpPr>
+        <a:xfrm>
+          <a:off x="0" y="0"/>
+          <a:ext cx="0" cy="0"/>
+          <a:chOff x="0" y="0"/>
+          <a:chExt cx="0" cy="0"/>
+        </a:xfrm>
+      </p:grpSpPr>
+      <p:sp>
+        <p:nvSpPr>
+          <p:cNvPr id="2" name="标题 1">
+            <a:extLst>
+              <a:ext uri="{FF2B5EF4-FFF2-40B4-BE49-F238E27FC236}">
+                <a16:creationId xmlns:a16="http://schemas.microsoft.com/office/drawing/2014/main" id="{EB8E990D-F5BA-6A35-2E39-6F69BF5D95A1}"/>
+              </a:ext>
+            </a:extLst>
+          </p:cNvPr>
+          <p:cNvSpPr>
+            <a:spLocks noGrp="1"/>
+          </p:cNvSpPr>
+          <p:nvPr>
+            <p:ph type="ctrTitle"/>
+          </p:nvPr>
+        </p:nvSpPr>
+        <p:spPr>
+          <a:xfrm>
+            <a:off x="149629" y="182880"/>
+            <a:ext cx="11006051" cy="650972"/>
+          </a:xfrm>
+        </p:spPr>
+        <p:txBody>
+          <a:bodyPr>
+            <a:noAutofit/>
+          </a:bodyPr>
+          <a:lstStyle/>
+          <a:p>
+            <a:pPr algn="l">
+              <a:lnSpc>
+                <a:spcPct val="130000"/>
+              </a:lnSpc>
+            </a:pPr>
+            <a:r>
+              <a:rPr lang="en-US" altLang="zh-CN" sz="3600" b="1" dirty="0">
+                <a:latin typeface="Calibri" panose="020F0502020204030204" pitchFamily="34" charset="0"/>
+                <a:ea typeface="SimHei" charset="-122"/>
+                <a:cs typeface="Calibri" panose="020F0502020204030204" pitchFamily="34" charset="0"/>
+              </a:rPr>
+              <a:t>Communication Bottleneck </a:t>
+            </a:r>
+            <a:endParaRPr lang="en" altLang="zh-CN" sz="3600" b="1" dirty="0">
+              <a:latin typeface="Calibri" panose="020F0502020204030204" pitchFamily="34" charset="0"/>
+              <a:ea typeface="SimHei" charset="-122"/>
+              <a:cs typeface="Calibri" panose="020F0502020204030204" pitchFamily="34" charset="0"/>
+            </a:endParaRPr>
+          </a:p>
+        </p:txBody>
+      </p:sp>
+      <p:sp>
+        <p:nvSpPr>
+          <p:cNvPr id="7" name="灯片编号占位符 6">
+            <a:extLst>
+              <a:ext uri="{FF2B5EF4-FFF2-40B4-BE49-F238E27FC236}">
+                <a16:creationId xmlns:a16="http://schemas.microsoft.com/office/drawing/2014/main" id="{46BCAC18-DF09-AA90-6A59-E8AF2E239E83}"/>
+              </a:ext>
+            </a:extLst>
+          </p:cNvPr>
+          <p:cNvSpPr>
+            <a:spLocks noGrp="1"/>
+          </p:cNvSpPr>
+          <p:nvPr>
+            <p:ph type="sldNum" sz="quarter" idx="12"/>
+          </p:nvPr>
+        </p:nvSpPr>
+        <p:spPr/>
+        <p:txBody>
+          <a:bodyPr/>
+          <a:lstStyle/>
+          <a:p>
+            <a:fld id="{24910F54-69FC-A944-93E9-EFB57972FC5C}" type="slidenum">
+              <a:rPr kumimoji="1" lang="zh-CN" altLang="en-US" smtClean="0"/>
+              <a:t>5</a:t>
+            </a:fld>
+            <a:endParaRPr kumimoji="1" lang="zh-CN" altLang="en-US" dirty="0"/>
+          </a:p>
+        </p:txBody>
+      </p:sp>
+      <p:sp>
+        <p:nvSpPr>
+          <p:cNvPr id="56" name="文本框 55">
+            <a:extLst>
+              <a:ext uri="{FF2B5EF4-FFF2-40B4-BE49-F238E27FC236}">
+                <a16:creationId xmlns:a16="http://schemas.microsoft.com/office/drawing/2014/main" id="{3D4395BF-CDEA-AF1C-6BEC-9A28DE36CCA2}"/>
+              </a:ext>
+            </a:extLst>
+          </p:cNvPr>
+          <p:cNvSpPr txBox="1"/>
+          <p:nvPr/>
+        </p:nvSpPr>
+        <p:spPr>
+          <a:xfrm>
+            <a:off x="400774" y="1088899"/>
+            <a:ext cx="11283150" cy="584775"/>
+          </a:xfrm>
+          <a:prstGeom prst="rect">
+            <a:avLst/>
+          </a:prstGeom>
+          <a:noFill/>
+        </p:spPr>
+        <p:txBody>
+          <a:bodyPr wrap="square">
+            <a:spAutoFit/>
+          </a:bodyPr>
+          <a:lstStyle/>
+          <a:p>
+            <a:r>
+              <a:rPr lang="en-US" altLang="zh-CN" sz="3200" dirty="0">
+                <a:latin typeface="Calibri" panose="020F0502020204030204" pitchFamily="34" charset="0"/>
+                <a:cs typeface="Calibri" panose="020F0502020204030204" pitchFamily="34" charset="0"/>
+              </a:rPr>
+              <a:t>2. Hardware</a:t>
+            </a:r>
+            <a:r>
+              <a:rPr lang="zh-CN" altLang="en-US" sz="3200" dirty="0">
+                <a:latin typeface="Calibri" panose="020F0502020204030204" pitchFamily="34" charset="0"/>
+                <a:cs typeface="Calibri" panose="020F0502020204030204" pitchFamily="34" charset="0"/>
+              </a:rPr>
+              <a:t> </a:t>
+            </a:r>
+            <a:r>
+              <a:rPr lang="en-US" altLang="zh-CN" sz="3200" dirty="0">
+                <a:latin typeface="Calibri" panose="020F0502020204030204" pitchFamily="34" charset="0"/>
+                <a:cs typeface="Calibri" panose="020F0502020204030204" pitchFamily="34" charset="0"/>
+              </a:rPr>
+              <a:t>evolution &amp; low-precision training </a:t>
+            </a:r>
+          </a:p>
+        </p:txBody>
+      </p:sp>
+      <p:pic>
+        <p:nvPicPr>
+          <p:cNvPr id="4" name="图片 3">
+            <a:extLst>
+              <a:ext uri="{FF2B5EF4-FFF2-40B4-BE49-F238E27FC236}">
+                <a16:creationId xmlns:a16="http://schemas.microsoft.com/office/drawing/2014/main" id="{42DF9DEE-C3C9-6AD5-1E2C-C377F88E46C1}"/>
+              </a:ext>
+            </a:extLst>
+          </p:cNvPr>
+          <p:cNvPicPr>
+            <a:picLocks noChangeAspect="1"/>
+          </p:cNvPicPr>
+          <p:nvPr/>
+        </p:nvPicPr>
+        <p:blipFill>
+          <a:blip r:embed="rId3"/>
+          <a:stretch>
+            <a:fillRect/>
+          </a:stretch>
+        </p:blipFill>
+        <p:spPr>
+          <a:xfrm>
+            <a:off x="2513676" y="2218440"/>
+            <a:ext cx="7164648" cy="3909643"/>
+          </a:xfrm>
+          <a:prstGeom prst="rect">
+            <a:avLst/>
+          </a:prstGeom>
+        </p:spPr>
+      </p:pic>
+      <p:pic>
+        <p:nvPicPr>
+          <p:cNvPr id="8" name="图片 7">
+            <a:extLst>
+              <a:ext uri="{FF2B5EF4-FFF2-40B4-BE49-F238E27FC236}">
+                <a16:creationId xmlns:a16="http://schemas.microsoft.com/office/drawing/2014/main" id="{832EF6BD-0F66-590B-D3D7-10E514C62925}"/>
+              </a:ext>
+            </a:extLst>
+          </p:cNvPr>
+          <p:cNvPicPr>
+            <a:picLocks noChangeAspect="1"/>
+          </p:cNvPicPr>
+          <p:nvPr/>
+        </p:nvPicPr>
+        <p:blipFill>
+          <a:blip r:embed="rId4"/>
+          <a:stretch>
+            <a:fillRect/>
+          </a:stretch>
+        </p:blipFill>
+        <p:spPr>
+          <a:xfrm>
+            <a:off x="9433687" y="331968"/>
+            <a:ext cx="2743200" cy="387856"/>
+          </a:xfrm>
+          <a:prstGeom prst="rect">
+            <a:avLst/>
+          </a:prstGeom>
+        </p:spPr>
+      </p:pic>
+      <p:pic>
+        <p:nvPicPr>
+          <p:cNvPr id="9" name="图片 8">
+            <a:extLst>
+              <a:ext uri="{FF2B5EF4-FFF2-40B4-BE49-F238E27FC236}">
+                <a16:creationId xmlns:a16="http://schemas.microsoft.com/office/drawing/2014/main" id="{D63AE003-61B4-A6B2-B739-52DB84BB4459}"/>
+              </a:ext>
+            </a:extLst>
+          </p:cNvPr>
+          <p:cNvPicPr>
+            <a:picLocks noChangeAspect="1"/>
+          </p:cNvPicPr>
+          <p:nvPr/>
+        </p:nvPicPr>
+        <p:blipFill>
+          <a:blip r:embed="rId5" cstate="print">
+            <a:extLst>
+              <a:ext uri="{28A0092B-C50C-407E-A947-70E740481C1C}">
+                <a14:useLocalDpi xmlns:a14="http://schemas.microsoft.com/office/drawing/2010/main" val="0"/>
+              </a:ext>
+            </a:extLst>
+          </a:blip>
+          <a:stretch>
+            <a:fillRect/>
+          </a:stretch>
+        </p:blipFill>
+        <p:spPr>
+          <a:xfrm>
+            <a:off x="7927450" y="335419"/>
+            <a:ext cx="1366300" cy="384405"/>
+          </a:xfrm>
+          <a:prstGeom prst="rect">
+            <a:avLst/>
+          </a:prstGeom>
+        </p:spPr>
+      </p:pic>
+    </p:spTree>
+    <p:extLst>
+      <p:ext uri="{BB962C8B-B14F-4D97-AF65-F5344CB8AC3E}">
+        <p14:creationId xmlns:p14="http://schemas.microsoft.com/office/powerpoint/2010/main" val="4146756645"/>
+      </p:ext>
+    </p:extLst>
+  </p:cSld>
+  <p:clrMapOvr>
+    <a:masterClrMapping/>
+  </p:clrMapOvr>
+</p:sld>
+</file>
+
+<file path=ppt/slides/slide6.xml><?xml version="1.0" encoding="utf-8"?>
+<p:sld xmlns:a="http://schemas.openxmlformats.org/drawingml/2006/main" xmlns:r="http://schemas.openxmlformats.org/officeDocument/2006/relationships" xmlns:p="http://schemas.openxmlformats.org/presentationml/2006/main">
+  <p:cSld>
+    <p:spTree>
+      <p:nvGrpSpPr>
+        <p:cNvPr id="1" name="">
+          <a:extLst>
+            <a:ext uri="{FF2B5EF4-FFF2-40B4-BE49-F238E27FC236}">
               <a16:creationId xmlns:a16="http://schemas.microsoft.com/office/drawing/2014/main" id="{90C4BB66-BCA5-26D5-6A17-85B9AA6AD980}"/>
             </a:ext>
           </a:extLst>
@@ -21741,7 +23515,7 @@
           <a:p>
             <a:fld id="{24910F54-69FC-A944-93E9-EFB57972FC5C}" type="slidenum">
               <a:rPr kumimoji="1" lang="zh-CN" altLang="en-US" smtClean="0"/>
-              <a:t>5</a:t>
+              <a:t>6</a:t>
             </a:fld>
             <a:endParaRPr kumimoji="1" lang="zh-CN" altLang="en-US" dirty="0"/>
           </a:p>
@@ -22135,7 +23909,7 @@
 </p:sld>
 </file>
 
-<file path=ppt/slides/slide6.xml><?xml version="1.0" encoding="utf-8"?>
+<file path=ppt/slides/slide7.xml><?xml version="1.0" encoding="utf-8"?>
 <p:sld xmlns:a="http://schemas.openxmlformats.org/drawingml/2006/main" xmlns:r="http://schemas.openxmlformats.org/officeDocument/2006/relationships" xmlns:p="http://schemas.openxmlformats.org/presentationml/2006/main">
   <p:cSld>
     <p:spTree>
@@ -22238,7 +24012,7 @@
           <a:p>
             <a:fld id="{24910F54-69FC-A944-93E9-EFB57972FC5C}" type="slidenum">
               <a:rPr kumimoji="1" lang="zh-CN" altLang="en-US" smtClean="0"/>
-              <a:t>6</a:t>
+              <a:t>7</a:t>
             </a:fld>
             <a:endParaRPr kumimoji="1" lang="zh-CN" altLang="en-US" dirty="0"/>
           </a:p>
@@ -22471,7 +24245,7 @@
 </p:sld>
 </file>
 
-<file path=ppt/slides/slide7.xml><?xml version="1.0" encoding="utf-8"?>
+<file path=ppt/slides/slide8.xml><?xml version="1.0" encoding="utf-8"?>
 <p:sld xmlns:a="http://schemas.openxmlformats.org/drawingml/2006/main" xmlns:r="http://schemas.openxmlformats.org/officeDocument/2006/relationships" xmlns:p="http://schemas.openxmlformats.org/presentationml/2006/main">
   <p:cSld>
     <p:spTree>
@@ -22574,7 +24348,7 @@
           <a:p>
             <a:fld id="{24910F54-69FC-A944-93E9-EFB57972FC5C}" type="slidenum">
               <a:rPr kumimoji="1" lang="zh-CN" altLang="en-US" smtClean="0"/>
-              <a:t>7</a:t>
+              <a:t>8</a:t>
             </a:fld>
             <a:endParaRPr kumimoji="1" lang="zh-CN" altLang="en-US" dirty="0"/>
           </a:p>
@@ -22953,7 +24727,7 @@
 </p:sld>
 </file>
 
-<file path=ppt/slides/slide8.xml><?xml version="1.0" encoding="utf-8"?>
+<file path=ppt/slides/slide9.xml><?xml version="1.0" encoding="utf-8"?>
 <p:sld xmlns:a="http://schemas.openxmlformats.org/drawingml/2006/main" xmlns:r="http://schemas.openxmlformats.org/officeDocument/2006/relationships" xmlns:p="http://schemas.openxmlformats.org/presentationml/2006/main">
   <p:cSld>
     <p:spTree>
@@ -23048,7 +24822,7 @@
           <a:p>
             <a:fld id="{24910F54-69FC-A944-93E9-EFB57972FC5C}" type="slidenum">
               <a:rPr kumimoji="1" lang="zh-CN" altLang="en-US" smtClean="0"/>
-              <a:t>8</a:t>
+              <a:t>9</a:t>
             </a:fld>
             <a:endParaRPr kumimoji="1" lang="zh-CN" altLang="en-US" dirty="0"/>
           </a:p>
@@ -23160,809 +24934,6 @@
   <p:clrMapOvr>
     <a:masterClrMapping/>
   </p:clrMapOvr>
-</p:sld>
-</file>
-
-<file path=ppt/slides/slide9.xml><?xml version="1.0" encoding="utf-8"?>
-<p:sld xmlns:a="http://schemas.openxmlformats.org/drawingml/2006/main" xmlns:r="http://schemas.openxmlformats.org/officeDocument/2006/relationships" xmlns:p="http://schemas.openxmlformats.org/presentationml/2006/main">
-  <p:cSld>
-    <p:spTree>
-      <p:nvGrpSpPr>
-        <p:cNvPr id="1" name="">
-          <a:extLst>
-            <a:ext uri="{FF2B5EF4-FFF2-40B4-BE49-F238E27FC236}">
-              <a16:creationId xmlns:a16="http://schemas.microsoft.com/office/drawing/2014/main" id="{C3C13E68-073E-5951-8D4B-C8AC07D3B47D}"/>
-            </a:ext>
-          </a:extLst>
-        </p:cNvPr>
-        <p:cNvGrpSpPr/>
-        <p:nvPr/>
-      </p:nvGrpSpPr>
-      <p:grpSpPr>
-        <a:xfrm>
-          <a:off x="0" y="0"/>
-          <a:ext cx="0" cy="0"/>
-          <a:chOff x="0" y="0"/>
-          <a:chExt cx="0" cy="0"/>
-        </a:xfrm>
-      </p:grpSpPr>
-      <p:sp>
-        <p:nvSpPr>
-          <p:cNvPr id="2" name="标题 1">
-            <a:extLst>
-              <a:ext uri="{FF2B5EF4-FFF2-40B4-BE49-F238E27FC236}">
-                <a16:creationId xmlns:a16="http://schemas.microsoft.com/office/drawing/2014/main" id="{E79D43EB-6F5A-3260-06B0-FBF948DDBE09}"/>
-              </a:ext>
-            </a:extLst>
-          </p:cNvPr>
-          <p:cNvSpPr>
-            <a:spLocks noGrp="1"/>
-          </p:cNvSpPr>
-          <p:nvPr>
-            <p:ph type="ctrTitle"/>
-          </p:nvPr>
-        </p:nvSpPr>
-        <p:spPr>
-          <a:xfrm>
-            <a:off x="149629" y="182880"/>
-            <a:ext cx="11006051" cy="650972"/>
-          </a:xfrm>
-        </p:spPr>
-        <p:txBody>
-          <a:bodyPr>
-            <a:noAutofit/>
-          </a:bodyPr>
-          <a:lstStyle/>
-          <a:p>
-            <a:pPr algn="l">
-              <a:lnSpc>
-                <a:spcPct val="130000"/>
-              </a:lnSpc>
-            </a:pPr>
-            <a:r>
-              <a:rPr lang="en-US" altLang="zh-CN" sz="3600" b="1" dirty="0">
-                <a:latin typeface="Calibri" panose="020F0502020204030204" pitchFamily="34" charset="0"/>
-                <a:ea typeface="SimHei" charset="-122"/>
-                <a:cs typeface="Calibri" panose="020F0502020204030204" pitchFamily="34" charset="0"/>
-              </a:rPr>
-              <a:t>Sequence Parallelism for Attention</a:t>
-            </a:r>
-            <a:endParaRPr lang="en" altLang="zh-CN" sz="3600" b="1" dirty="0">
-              <a:latin typeface="Calibri" panose="020F0502020204030204" pitchFamily="34" charset="0"/>
-              <a:ea typeface="SimHei" charset="-122"/>
-              <a:cs typeface="Calibri" panose="020F0502020204030204" pitchFamily="34" charset="0"/>
-            </a:endParaRPr>
-          </a:p>
-        </p:txBody>
-      </p:sp>
-      <p:sp>
-        <p:nvSpPr>
-          <p:cNvPr id="7" name="灯片编号占位符 6">
-            <a:extLst>
-              <a:ext uri="{FF2B5EF4-FFF2-40B4-BE49-F238E27FC236}">
-                <a16:creationId xmlns:a16="http://schemas.microsoft.com/office/drawing/2014/main" id="{D1EA0651-6C47-7C5C-254D-7540209B9A8A}"/>
-              </a:ext>
-            </a:extLst>
-          </p:cNvPr>
-          <p:cNvSpPr>
-            <a:spLocks noGrp="1"/>
-          </p:cNvSpPr>
-          <p:nvPr>
-            <p:ph type="sldNum" sz="quarter" idx="12"/>
-          </p:nvPr>
-        </p:nvSpPr>
-        <p:spPr/>
-        <p:txBody>
-          <a:bodyPr/>
-          <a:lstStyle/>
-          <a:p>
-            <a:fld id="{24910F54-69FC-A944-93E9-EFB57972FC5C}" type="slidenum">
-              <a:rPr kumimoji="1" lang="zh-CN" altLang="en-US" smtClean="0"/>
-              <a:t>9</a:t>
-            </a:fld>
-            <a:endParaRPr kumimoji="1" lang="zh-CN" altLang="en-US" dirty="0"/>
-          </a:p>
-        </p:txBody>
-      </p:sp>
-      <p:pic>
-        <p:nvPicPr>
-          <p:cNvPr id="5" name="图片 4">
-            <a:extLst>
-              <a:ext uri="{FF2B5EF4-FFF2-40B4-BE49-F238E27FC236}">
-                <a16:creationId xmlns:a16="http://schemas.microsoft.com/office/drawing/2014/main" id="{00F345E9-7C08-DFD4-F6FC-BD9D5B219A7D}"/>
-              </a:ext>
-            </a:extLst>
-          </p:cNvPr>
-          <p:cNvPicPr>
-            <a:picLocks noChangeAspect="1"/>
-          </p:cNvPicPr>
-          <p:nvPr/>
-        </p:nvPicPr>
-        <p:blipFill>
-          <a:blip r:embed="rId3"/>
-          <a:srcRect r="67164"/>
-          <a:stretch>
-            <a:fillRect/>
-          </a:stretch>
-        </p:blipFill>
-        <p:spPr>
-          <a:xfrm>
-            <a:off x="392182" y="971335"/>
-            <a:ext cx="2500647" cy="4634333"/>
-          </a:xfrm>
-          <a:prstGeom prst="rect">
-            <a:avLst/>
-          </a:prstGeom>
-        </p:spPr>
-      </p:pic>
-      <p:pic>
-        <p:nvPicPr>
-          <p:cNvPr id="8" name="图片 7">
-            <a:extLst>
-              <a:ext uri="{FF2B5EF4-FFF2-40B4-BE49-F238E27FC236}">
-                <a16:creationId xmlns:a16="http://schemas.microsoft.com/office/drawing/2014/main" id="{AF4FE24E-CA8C-B218-AE2E-2EB237769EA9}"/>
-              </a:ext>
-            </a:extLst>
-          </p:cNvPr>
-          <p:cNvPicPr>
-            <a:picLocks noChangeAspect="1"/>
-          </p:cNvPicPr>
-          <p:nvPr/>
-        </p:nvPicPr>
-        <p:blipFill>
-          <a:blip r:embed="rId4"/>
-          <a:srcRect l="29214" t="74712" r="51334" b="8469"/>
-          <a:stretch>
-            <a:fillRect/>
-          </a:stretch>
-        </p:blipFill>
-        <p:spPr>
-          <a:xfrm>
-            <a:off x="667550" y="5737088"/>
-            <a:ext cx="1781930" cy="849085"/>
-          </a:xfrm>
-          <a:prstGeom prst="rect">
-            <a:avLst/>
-          </a:prstGeom>
-        </p:spPr>
-      </p:pic>
-      <p:pic>
-        <p:nvPicPr>
-          <p:cNvPr id="10" name="图片 9">
-            <a:extLst>
-              <a:ext uri="{FF2B5EF4-FFF2-40B4-BE49-F238E27FC236}">
-                <a16:creationId xmlns:a16="http://schemas.microsoft.com/office/drawing/2014/main" id="{E08ACDC6-CE99-B56E-5DA1-FCC4326BA8E1}"/>
-              </a:ext>
-            </a:extLst>
-          </p:cNvPr>
-          <p:cNvPicPr>
-            <a:picLocks noChangeAspect="1"/>
-          </p:cNvPicPr>
-          <p:nvPr/>
-        </p:nvPicPr>
-        <p:blipFill>
-          <a:blip r:embed="rId4"/>
-          <a:srcRect l="51435" t="81585" r="30892"/>
-          <a:stretch>
-            <a:fillRect/>
-          </a:stretch>
-        </p:blipFill>
-        <p:spPr>
-          <a:xfrm>
-            <a:off x="9046603" y="5731301"/>
-            <a:ext cx="1618942" cy="929670"/>
-          </a:xfrm>
-          <a:prstGeom prst="rect">
-            <a:avLst/>
-          </a:prstGeom>
-        </p:spPr>
-      </p:pic>
-      <p:pic>
-        <p:nvPicPr>
-          <p:cNvPr id="12" name="图片 11">
-            <a:extLst>
-              <a:ext uri="{FF2B5EF4-FFF2-40B4-BE49-F238E27FC236}">
-                <a16:creationId xmlns:a16="http://schemas.microsoft.com/office/drawing/2014/main" id="{45BC695A-5C9F-1FA1-B0A4-2CF93F51C680}"/>
-              </a:ext>
-            </a:extLst>
-          </p:cNvPr>
-          <p:cNvPicPr>
-            <a:picLocks noChangeAspect="1"/>
-          </p:cNvPicPr>
-          <p:nvPr/>
-        </p:nvPicPr>
-        <p:blipFill>
-          <a:blip r:embed="rId3"/>
-          <a:srcRect l="33357" r="33285"/>
-          <a:stretch>
-            <a:fillRect/>
-          </a:stretch>
-        </p:blipFill>
-        <p:spPr>
-          <a:xfrm>
-            <a:off x="8610600" y="965410"/>
-            <a:ext cx="2540385" cy="4634333"/>
-          </a:xfrm>
-          <a:prstGeom prst="rect">
-            <a:avLst/>
-          </a:prstGeom>
-        </p:spPr>
-      </p:pic>
-      <p:pic>
-        <p:nvPicPr>
-          <p:cNvPr id="14" name="图片 13">
-            <a:extLst>
-              <a:ext uri="{FF2B5EF4-FFF2-40B4-BE49-F238E27FC236}">
-                <a16:creationId xmlns:a16="http://schemas.microsoft.com/office/drawing/2014/main" id="{D4353A2B-C458-5E1E-6348-1D507DA45BEE}"/>
-              </a:ext>
-            </a:extLst>
-          </p:cNvPr>
-          <p:cNvPicPr>
-            <a:picLocks noChangeAspect="1"/>
-          </p:cNvPicPr>
-          <p:nvPr/>
-        </p:nvPicPr>
-        <p:blipFill>
-          <a:blip r:embed="rId5"/>
-          <a:stretch>
-            <a:fillRect/>
-          </a:stretch>
-        </p:blipFill>
-        <p:spPr>
-          <a:xfrm>
-            <a:off x="4105029" y="2194169"/>
-            <a:ext cx="3269208" cy="2094101"/>
-          </a:xfrm>
-          <a:prstGeom prst="rect">
-            <a:avLst/>
-          </a:prstGeom>
-        </p:spPr>
-      </p:pic>
-      <p:sp>
-        <p:nvSpPr>
-          <p:cNvPr id="15" name="标题 1">
-            <a:extLst>
-              <a:ext uri="{FF2B5EF4-FFF2-40B4-BE49-F238E27FC236}">
-                <a16:creationId xmlns:a16="http://schemas.microsoft.com/office/drawing/2014/main" id="{3F5EED58-1D79-A01A-4364-747C9B46ED5F}"/>
-              </a:ext>
-            </a:extLst>
-          </p:cNvPr>
-          <p:cNvSpPr txBox="1">
-            <a:spLocks/>
-          </p:cNvSpPr>
-          <p:nvPr/>
-        </p:nvSpPr>
-        <p:spPr>
-          <a:xfrm>
-            <a:off x="3612081" y="1604902"/>
-            <a:ext cx="4255103" cy="461750"/>
-          </a:xfrm>
-          <a:prstGeom prst="rect">
-            <a:avLst/>
-          </a:prstGeom>
-        </p:spPr>
-        <p:txBody>
-          <a:bodyPr vert="horz" lIns="91440" tIns="45720" rIns="91440" bIns="45720" rtlCol="0" anchor="b">
-            <a:noAutofit/>
-          </a:bodyPr>
-          <a:lstStyle>
-            <a:lvl1pPr algn="ctr" defTabSz="914400" rtl="0" eaLnBrk="1" latinLnBrk="0" hangingPunct="1">
-              <a:lnSpc>
-                <a:spcPct val="90000"/>
-              </a:lnSpc>
-              <a:spcBef>
-                <a:spcPct val="0"/>
-              </a:spcBef>
-              <a:buNone/>
-              <a:defRPr sz="6000" kern="1200">
-                <a:solidFill>
-                  <a:schemeClr val="tx1"/>
-                </a:solidFill>
-                <a:latin typeface="+mj-lt"/>
-                <a:ea typeface="+mj-ea"/>
-                <a:cs typeface="+mj-cs"/>
-              </a:defRPr>
-            </a:lvl1pPr>
-          </a:lstStyle>
-          <a:p>
-            <a:pPr algn="l">
-              <a:lnSpc>
-                <a:spcPct val="130000"/>
-              </a:lnSpc>
-            </a:pPr>
-            <a:r>
-              <a:rPr lang="en-US" altLang="zh-CN" sz="2400" b="1" dirty="0">
-                <a:latin typeface="Calibri" panose="020F0502020204030204" pitchFamily="34" charset="0"/>
-                <a:ea typeface="SimHei" charset="-122"/>
-                <a:cs typeface="Calibri" panose="020F0502020204030204" pitchFamily="34" charset="0"/>
-              </a:rPr>
-              <a:t>Grouped-Query Attention (GQA)</a:t>
-            </a:r>
-            <a:endParaRPr lang="en" altLang="zh-CN" sz="2400" b="1" dirty="0">
-              <a:latin typeface="Calibri" panose="020F0502020204030204" pitchFamily="34" charset="0"/>
-              <a:ea typeface="SimHei" charset="-122"/>
-              <a:cs typeface="Calibri" panose="020F0502020204030204" pitchFamily="34" charset="0"/>
-            </a:endParaRPr>
-          </a:p>
-        </p:txBody>
-      </p:sp>
-      <p:sp>
-        <p:nvSpPr>
-          <p:cNvPr id="16" name="右箭头 15">
-            <a:extLst>
-              <a:ext uri="{FF2B5EF4-FFF2-40B4-BE49-F238E27FC236}">
-                <a16:creationId xmlns:a16="http://schemas.microsoft.com/office/drawing/2014/main" id="{34EC9712-F1A1-2A25-ABCA-8CA20A057C93}"/>
-              </a:ext>
-            </a:extLst>
-          </p:cNvPr>
-          <p:cNvSpPr/>
-          <p:nvPr/>
-        </p:nvSpPr>
-        <p:spPr>
-          <a:xfrm>
-            <a:off x="2892829" y="3053443"/>
-            <a:ext cx="921855" cy="375557"/>
-          </a:xfrm>
-          <a:prstGeom prst="rightArrow">
-            <a:avLst/>
-          </a:prstGeom>
-          <a:solidFill>
-            <a:schemeClr val="accent2">
-              <a:lumMod val="60000"/>
-              <a:lumOff val="40000"/>
-            </a:schemeClr>
-          </a:solidFill>
-          <a:ln>
-            <a:solidFill>
-              <a:schemeClr val="accent2">
-                <a:lumMod val="60000"/>
-                <a:lumOff val="40000"/>
-              </a:schemeClr>
-            </a:solidFill>
-          </a:ln>
-        </p:spPr>
-        <p:style>
-          <a:lnRef idx="2">
-            <a:schemeClr val="accent1">
-              <a:shade val="15000"/>
-            </a:schemeClr>
-          </a:lnRef>
-          <a:fillRef idx="1">
-            <a:schemeClr val="accent1"/>
-          </a:fillRef>
-          <a:effectRef idx="0">
-            <a:schemeClr val="accent1"/>
-          </a:effectRef>
-          <a:fontRef idx="minor">
-            <a:schemeClr val="lt1"/>
-          </a:fontRef>
-        </p:style>
-        <p:txBody>
-          <a:bodyPr rtlCol="0" anchor="ctr"/>
-          <a:lstStyle/>
-          <a:p>
-            <a:pPr algn="ctr"/>
-            <a:endParaRPr kumimoji="1" lang="zh-CN" altLang="en-US"/>
-          </a:p>
-        </p:txBody>
-      </p:sp>
-      <p:sp>
-        <p:nvSpPr>
-          <p:cNvPr id="17" name="右箭头 16">
-            <a:extLst>
-              <a:ext uri="{FF2B5EF4-FFF2-40B4-BE49-F238E27FC236}">
-                <a16:creationId xmlns:a16="http://schemas.microsoft.com/office/drawing/2014/main" id="{2445222F-9AA7-0012-3AB3-C5F9723E5F0E}"/>
-              </a:ext>
-            </a:extLst>
-          </p:cNvPr>
-          <p:cNvSpPr/>
-          <p:nvPr/>
-        </p:nvSpPr>
-        <p:spPr>
-          <a:xfrm>
-            <a:off x="7664582" y="3053443"/>
-            <a:ext cx="957592" cy="375557"/>
-          </a:xfrm>
-          <a:prstGeom prst="rightArrow">
-            <a:avLst/>
-          </a:prstGeom>
-          <a:solidFill>
-            <a:schemeClr val="accent2">
-              <a:lumMod val="60000"/>
-              <a:lumOff val="40000"/>
-            </a:schemeClr>
-          </a:solidFill>
-          <a:ln>
-            <a:solidFill>
-              <a:schemeClr val="accent2">
-                <a:lumMod val="60000"/>
-                <a:lumOff val="40000"/>
-              </a:schemeClr>
-            </a:solidFill>
-          </a:ln>
-        </p:spPr>
-        <p:style>
-          <a:lnRef idx="2">
-            <a:schemeClr val="accent1">
-              <a:shade val="15000"/>
-            </a:schemeClr>
-          </a:lnRef>
-          <a:fillRef idx="1">
-            <a:schemeClr val="accent1"/>
-          </a:fillRef>
-          <a:effectRef idx="0">
-            <a:schemeClr val="accent1"/>
-          </a:effectRef>
-          <a:fontRef idx="minor">
-            <a:schemeClr val="lt1"/>
-          </a:fontRef>
-        </p:style>
-        <p:txBody>
-          <a:bodyPr rtlCol="0" anchor="ctr"/>
-          <a:lstStyle/>
-          <a:p>
-            <a:pPr algn="ctr"/>
-            <a:endParaRPr kumimoji="1" lang="zh-CN" altLang="en-US"/>
-          </a:p>
-        </p:txBody>
-      </p:sp>
-      <p:pic>
-        <p:nvPicPr>
-          <p:cNvPr id="4" name="图片 3">
-            <a:extLst>
-              <a:ext uri="{FF2B5EF4-FFF2-40B4-BE49-F238E27FC236}">
-                <a16:creationId xmlns:a16="http://schemas.microsoft.com/office/drawing/2014/main" id="{FEE863A9-5AA1-E770-42A6-7589C2396EA8}"/>
-              </a:ext>
-            </a:extLst>
-          </p:cNvPr>
-          <p:cNvPicPr>
-            <a:picLocks noChangeAspect="1"/>
-          </p:cNvPicPr>
-          <p:nvPr/>
-        </p:nvPicPr>
-        <p:blipFill>
-          <a:blip r:embed="rId6"/>
-          <a:stretch>
-            <a:fillRect/>
-          </a:stretch>
-        </p:blipFill>
-        <p:spPr>
-          <a:xfrm>
-            <a:off x="9433687" y="331968"/>
-            <a:ext cx="2743200" cy="387856"/>
-          </a:xfrm>
-          <a:prstGeom prst="rect">
-            <a:avLst/>
-          </a:prstGeom>
-        </p:spPr>
-      </p:pic>
-      <p:pic>
-        <p:nvPicPr>
-          <p:cNvPr id="9" name="图片 8">
-            <a:extLst>
-              <a:ext uri="{FF2B5EF4-FFF2-40B4-BE49-F238E27FC236}">
-                <a16:creationId xmlns:a16="http://schemas.microsoft.com/office/drawing/2014/main" id="{7C3CC6A3-B987-40BB-70D4-212D84F1A9C9}"/>
-              </a:ext>
-            </a:extLst>
-          </p:cNvPr>
-          <p:cNvPicPr>
-            <a:picLocks noChangeAspect="1"/>
-          </p:cNvPicPr>
-          <p:nvPr/>
-        </p:nvPicPr>
-        <p:blipFill>
-          <a:blip r:embed="rId7" cstate="print">
-            <a:extLst>
-              <a:ext uri="{28A0092B-C50C-407E-A947-70E740481C1C}">
-                <a14:useLocalDpi xmlns:a14="http://schemas.microsoft.com/office/drawing/2010/main" val="0"/>
-              </a:ext>
-            </a:extLst>
-          </a:blip>
-          <a:stretch>
-            <a:fillRect/>
-          </a:stretch>
-        </p:blipFill>
-        <p:spPr>
-          <a:xfrm>
-            <a:off x="7927450" y="335419"/>
-            <a:ext cx="1366300" cy="384405"/>
-          </a:xfrm>
-          <a:prstGeom prst="rect">
-            <a:avLst/>
-          </a:prstGeom>
-        </p:spPr>
-      </p:pic>
-    </p:spTree>
-    <p:extLst>
-      <p:ext uri="{BB962C8B-B14F-4D97-AF65-F5344CB8AC3E}">
-        <p14:creationId xmlns:p14="http://schemas.microsoft.com/office/powerpoint/2010/main" val="1152347291"/>
-      </p:ext>
-    </p:extLst>
-  </p:cSld>
-  <p:clrMapOvr>
-    <a:masterClrMapping/>
-  </p:clrMapOvr>
-  <p:timing>
-    <p:tnLst>
-      <p:par>
-        <p:cTn id="1" dur="indefinite" restart="never" nodeType="tmRoot">
-          <p:childTnLst>
-            <p:seq concurrent="1" nextAc="seek">
-              <p:cTn id="2" dur="indefinite" nodeType="mainSeq">
-                <p:childTnLst>
-                  <p:par>
-                    <p:cTn id="3" fill="hold">
-                      <p:stCondLst>
-                        <p:cond delay="indefinite"/>
-                      </p:stCondLst>
-                      <p:childTnLst>
-                        <p:par>
-                          <p:cTn id="4" fill="hold">
-                            <p:stCondLst>
-                              <p:cond delay="0"/>
-                            </p:stCondLst>
-                            <p:childTnLst>
-                              <p:par>
-                                <p:cTn id="5" presetID="3" presetClass="entr" presetSubtype="10" fill="hold" grpId="0" nodeType="clickEffect">
-                                  <p:stCondLst>
-                                    <p:cond delay="0"/>
-                                  </p:stCondLst>
-                                  <p:childTnLst>
-                                    <p:set>
-                                      <p:cBhvr>
-                                        <p:cTn id="6" dur="1" fill="hold">
-                                          <p:stCondLst>
-                                            <p:cond delay="0"/>
-                                          </p:stCondLst>
-                                        </p:cTn>
-                                        <p:tgtEl>
-                                          <p:spTgt spid="16"/>
-                                        </p:tgtEl>
-                                        <p:attrNameLst>
-                                          <p:attrName>style.visibility</p:attrName>
-                                        </p:attrNameLst>
-                                      </p:cBhvr>
-                                      <p:to>
-                                        <p:strVal val="visible"/>
-                                      </p:to>
-                                    </p:set>
-                                    <p:animEffect transition="in" filter="blinds(horizontal)">
-                                      <p:cBhvr>
-                                        <p:cTn id="7" dur="500"/>
-                                        <p:tgtEl>
-                                          <p:spTgt spid="16"/>
-                                        </p:tgtEl>
-                                      </p:cBhvr>
-                                    </p:animEffect>
-                                  </p:childTnLst>
-                                </p:cTn>
-                              </p:par>
-                              <p:par>
-                                <p:cTn id="8" presetID="3" presetClass="entr" presetSubtype="10" fill="hold" nodeType="withEffect">
-                                  <p:stCondLst>
-                                    <p:cond delay="0"/>
-                                  </p:stCondLst>
-                                  <p:childTnLst>
-                                    <p:set>
-                                      <p:cBhvr>
-                                        <p:cTn id="9" dur="1" fill="hold">
-                                          <p:stCondLst>
-                                            <p:cond delay="0"/>
-                                          </p:stCondLst>
-                                        </p:cTn>
-                                        <p:tgtEl>
-                                          <p:spTgt spid="14"/>
-                                        </p:tgtEl>
-                                        <p:attrNameLst>
-                                          <p:attrName>style.visibility</p:attrName>
-                                        </p:attrNameLst>
-                                      </p:cBhvr>
-                                      <p:to>
-                                        <p:strVal val="visible"/>
-                                      </p:to>
-                                    </p:set>
-                                    <p:animEffect transition="in" filter="blinds(horizontal)">
-                                      <p:cBhvr>
-                                        <p:cTn id="10" dur="500"/>
-                                        <p:tgtEl>
-                                          <p:spTgt spid="14"/>
-                                        </p:tgtEl>
-                                      </p:cBhvr>
-                                    </p:animEffect>
-                                  </p:childTnLst>
-                                </p:cTn>
-                              </p:par>
-                              <p:par>
-                                <p:cTn id="11" presetID="3" presetClass="entr" presetSubtype="10" fill="hold" grpId="0" nodeType="withEffect">
-                                  <p:stCondLst>
-                                    <p:cond delay="0"/>
-                                  </p:stCondLst>
-                                  <p:childTnLst>
-                                    <p:set>
-                                      <p:cBhvr>
-                                        <p:cTn id="12" dur="1" fill="hold">
-                                          <p:stCondLst>
-                                            <p:cond delay="0"/>
-                                          </p:stCondLst>
-                                        </p:cTn>
-                                        <p:tgtEl>
-                                          <p:spTgt spid="15"/>
-                                        </p:tgtEl>
-                                        <p:attrNameLst>
-                                          <p:attrName>style.visibility</p:attrName>
-                                        </p:attrNameLst>
-                                      </p:cBhvr>
-                                      <p:to>
-                                        <p:strVal val="visible"/>
-                                      </p:to>
-                                    </p:set>
-                                    <p:animEffect transition="in" filter="blinds(horizontal)">
-                                      <p:cBhvr>
-                                        <p:cTn id="13" dur="500"/>
-                                        <p:tgtEl>
-                                          <p:spTgt spid="15"/>
-                                        </p:tgtEl>
-                                      </p:cBhvr>
-                                    </p:animEffect>
-                                  </p:childTnLst>
-                                </p:cTn>
-                              </p:par>
-                            </p:childTnLst>
-                          </p:cTn>
-                        </p:par>
-                      </p:childTnLst>
-                    </p:cTn>
-                  </p:par>
-                  <p:par>
-                    <p:cTn id="14" fill="hold">
-                      <p:stCondLst>
-                        <p:cond delay="indefinite"/>
-                      </p:stCondLst>
-                      <p:childTnLst>
-                        <p:par>
-                          <p:cTn id="15" fill="hold">
-                            <p:stCondLst>
-                              <p:cond delay="0"/>
-                            </p:stCondLst>
-                            <p:childTnLst>
-                              <p:par>
-                                <p:cTn id="16" presetID="3" presetClass="entr" presetSubtype="10" fill="hold" grpId="0" nodeType="clickEffect">
-                                  <p:stCondLst>
-                                    <p:cond delay="0"/>
-                                  </p:stCondLst>
-                                  <p:childTnLst>
-                                    <p:set>
-                                      <p:cBhvr>
-                                        <p:cTn id="17" dur="1" fill="hold">
-                                          <p:stCondLst>
-                                            <p:cond delay="0"/>
-                                          </p:stCondLst>
-                                        </p:cTn>
-                                        <p:tgtEl>
-                                          <p:spTgt spid="17"/>
-                                        </p:tgtEl>
-                                        <p:attrNameLst>
-                                          <p:attrName>style.visibility</p:attrName>
-                                        </p:attrNameLst>
-                                      </p:cBhvr>
-                                      <p:to>
-                                        <p:strVal val="visible"/>
-                                      </p:to>
-                                    </p:set>
-                                    <p:animEffect transition="in" filter="blinds(horizontal)">
-                                      <p:cBhvr>
-                                        <p:cTn id="18" dur="500"/>
-                                        <p:tgtEl>
-                                          <p:spTgt spid="17"/>
-                                        </p:tgtEl>
-                                      </p:cBhvr>
-                                    </p:animEffect>
-                                  </p:childTnLst>
-                                </p:cTn>
-                              </p:par>
-                              <p:par>
-                                <p:cTn id="19" presetID="3" presetClass="entr" presetSubtype="10" fill="hold" nodeType="withEffect">
-                                  <p:stCondLst>
-                                    <p:cond delay="0"/>
-                                  </p:stCondLst>
-                                  <p:childTnLst>
-                                    <p:set>
-                                      <p:cBhvr>
-                                        <p:cTn id="20" dur="1" fill="hold">
-                                          <p:stCondLst>
-                                            <p:cond delay="0"/>
-                                          </p:stCondLst>
-                                        </p:cTn>
-                                        <p:tgtEl>
-                                          <p:spTgt spid="12"/>
-                                        </p:tgtEl>
-                                        <p:attrNameLst>
-                                          <p:attrName>style.visibility</p:attrName>
-                                        </p:attrNameLst>
-                                      </p:cBhvr>
-                                      <p:to>
-                                        <p:strVal val="visible"/>
-                                      </p:to>
-                                    </p:set>
-                                    <p:animEffect transition="in" filter="blinds(horizontal)">
-                                      <p:cBhvr>
-                                        <p:cTn id="21" dur="500"/>
-                                        <p:tgtEl>
-                                          <p:spTgt spid="12"/>
-                                        </p:tgtEl>
-                                      </p:cBhvr>
-                                    </p:animEffect>
-                                  </p:childTnLst>
-                                </p:cTn>
-                              </p:par>
-                              <p:par>
-                                <p:cTn id="22" presetID="3" presetClass="entr" presetSubtype="10" fill="hold" nodeType="withEffect">
-                                  <p:stCondLst>
-                                    <p:cond delay="0"/>
-                                  </p:stCondLst>
-                                  <p:childTnLst>
-                                    <p:set>
-                                      <p:cBhvr>
-                                        <p:cTn id="23" dur="1" fill="hold">
-                                          <p:stCondLst>
-                                            <p:cond delay="0"/>
-                                          </p:stCondLst>
-                                        </p:cTn>
-                                        <p:tgtEl>
-                                          <p:spTgt spid="10"/>
-                                        </p:tgtEl>
-                                        <p:attrNameLst>
-                                          <p:attrName>style.visibility</p:attrName>
-                                        </p:attrNameLst>
-                                      </p:cBhvr>
-                                      <p:to>
-                                        <p:strVal val="visible"/>
-                                      </p:to>
-                                    </p:set>
-                                    <p:animEffect transition="in" filter="blinds(horizontal)">
-                                      <p:cBhvr>
-                                        <p:cTn id="24" dur="500"/>
-                                        <p:tgtEl>
-                                          <p:spTgt spid="10"/>
-                                        </p:tgtEl>
-                                      </p:cBhvr>
-                                    </p:animEffect>
-                                  </p:childTnLst>
-                                </p:cTn>
-                              </p:par>
-                            </p:childTnLst>
-                          </p:cTn>
-                        </p:par>
-                      </p:childTnLst>
-                    </p:cTn>
-                  </p:par>
-                </p:childTnLst>
-              </p:cTn>
-              <p:prevCondLst>
-                <p:cond evt="onPrev" delay="0">
-                  <p:tgtEl>
-                    <p:sldTgt/>
-                  </p:tgtEl>
-                </p:cond>
-              </p:prevCondLst>
-              <p:nextCondLst>
-                <p:cond evt="onNext" delay="0">
-                  <p:tgtEl>
-                    <p:sldTgt/>
-                  </p:tgtEl>
-                </p:cond>
-              </p:nextCondLst>
-            </p:seq>
-          </p:childTnLst>
-        </p:cTn>
-      </p:par>
-    </p:tnLst>
-    <p:bldLst>
-      <p:bldP spid="15" grpId="0"/>
-      <p:bldP spid="16" grpId="0" animBg="1"/>
-      <p:bldP spid="17" grpId="0" animBg="1"/>
-    </p:bldLst>
-  </p:timing>
 </p:sld>
 </file>
 
